--- a/docs/presentation/Neftecode_Advisor.pptx
+++ b/docs/presentation/Neftecode_Advisor.pptx
@@ -2,22 +2,22 @@
 <file path=ppt/presentation.xml><?xml version="1.0" encoding="utf-8"?>
 <p:presentation xmlns:p="http://schemas.openxmlformats.org/presentationml/2006/main">
   <p:sldMasterIdLst>
-    <p:sldMasterId xmlns:r="http://schemas.openxmlformats.org/officeDocument/2006/relationships" id="2147483648" r:id="Rb20d1874c3384e72"/>
+    <p:sldMasterId xmlns:r="http://schemas.openxmlformats.org/officeDocument/2006/relationships" id="2147483648" r:id="R698a31fa7b0c44e8"/>
   </p:sldMasterIdLst>
   <p:notesMasterIdLst>
-    <p:notesMasterId xmlns:r="http://schemas.openxmlformats.org/officeDocument/2006/relationships" r:id="R0e78b6620d7b43f9"/>
+    <p:notesMasterId xmlns:r="http://schemas.openxmlformats.org/officeDocument/2006/relationships" r:id="Ra0361d4808044060"/>
   </p:notesMasterIdLst>
   <p:sldIdLst>
-    <p:sldId xmlns:r="http://schemas.openxmlformats.org/officeDocument/2006/relationships" id="256" r:id="Rc7a63e1322d042af"/>
-    <p:sldId xmlns:r="http://schemas.openxmlformats.org/officeDocument/2006/relationships" id="257" r:id="Rd531138a8de9483e"/>
-    <p:sldId xmlns:r="http://schemas.openxmlformats.org/officeDocument/2006/relationships" id="258" r:id="Re130ff2f958246e0"/>
-    <p:sldId xmlns:r="http://schemas.openxmlformats.org/officeDocument/2006/relationships" id="259" r:id="R8060c2e3b56248e9"/>
-    <p:sldId xmlns:r="http://schemas.openxmlformats.org/officeDocument/2006/relationships" id="260" r:id="R326ed8323d454f2a"/>
-    <p:sldId xmlns:r="http://schemas.openxmlformats.org/officeDocument/2006/relationships" id="261" r:id="Raeb5319899764a44"/>
-    <p:sldId xmlns:r="http://schemas.openxmlformats.org/officeDocument/2006/relationships" id="262" r:id="R88eb9585fc0e4606"/>
-    <p:sldId xmlns:r="http://schemas.openxmlformats.org/officeDocument/2006/relationships" id="263" r:id="R6fd3366e25fd48ba"/>
-    <p:sldId xmlns:r="http://schemas.openxmlformats.org/officeDocument/2006/relationships" id="264" r:id="R6131ae185be642e6"/>
-    <p:sldId xmlns:r="http://schemas.openxmlformats.org/officeDocument/2006/relationships" id="265" r:id="R51993be68c5742d0"/>
+    <p:sldId xmlns:r="http://schemas.openxmlformats.org/officeDocument/2006/relationships" id="256" r:id="Rcebd9a22d0264630"/>
+    <p:sldId xmlns:r="http://schemas.openxmlformats.org/officeDocument/2006/relationships" id="257" r:id="R27d249f88a614408"/>
+    <p:sldId xmlns:r="http://schemas.openxmlformats.org/officeDocument/2006/relationships" id="258" r:id="R171336387be8496e"/>
+    <p:sldId xmlns:r="http://schemas.openxmlformats.org/officeDocument/2006/relationships" id="259" r:id="Rac49eeaf71594f9e"/>
+    <p:sldId xmlns:r="http://schemas.openxmlformats.org/officeDocument/2006/relationships" id="260" r:id="Rcb4e98e5b3a44ad2"/>
+    <p:sldId xmlns:r="http://schemas.openxmlformats.org/officeDocument/2006/relationships" id="261" r:id="Rfe0ff8091bff4f6d"/>
+    <p:sldId xmlns:r="http://schemas.openxmlformats.org/officeDocument/2006/relationships" id="262" r:id="Rb1dbec0021cb4116"/>
+    <p:sldId xmlns:r="http://schemas.openxmlformats.org/officeDocument/2006/relationships" id="263" r:id="R798064dff77045b8"/>
+    <p:sldId xmlns:r="http://schemas.openxmlformats.org/officeDocument/2006/relationships" id="264" r:id="Rb92bf1b08a0e4e6a"/>
+    <p:sldId xmlns:r="http://schemas.openxmlformats.org/officeDocument/2006/relationships" id="265" r:id="Rca02c277043d4e23"/>
   </p:sldIdLst>
   <p:sldSz cx="12192000" cy="6858000"/>
   <p:notesSz cx="6858000" cy="9144000"/>
@@ -1149,7 +1149,7 @@
   </p:cSld>
   <p:clrMap bg1="lt1" tx1="dk1" bg2="lt2" tx2="dk2" accent1="accent1" accent2="accent2" accent3="accent3" accent4="accent4" accent5="accent5" accent6="accent6" hlink="hlink" folHlink="folHlink"/>
   <p:sldLayoutIdLst>
-    <p:sldLayoutId xmlns:r="http://schemas.openxmlformats.org/officeDocument/2006/relationships" id="2147483649" r:id="Ra716b66f3821452f"/>
+    <p:sldLayoutId xmlns:r="http://schemas.openxmlformats.org/officeDocument/2006/relationships" id="2147483649" r:id="R900bf8a1fa7d4668"/>
   </p:sldLayoutIdLst>
   <p:txStyles>
     <p:titleStyle>
@@ -1774,9 +1774,9 @@
             <a:p xmlns:a="http://schemas.openxmlformats.org/drawingml/2006/main">
               <a:pPr>
                 <a:defRPr>
-                  <a:latin typeface="Helvetica Neue"/>
-                  <a:ea typeface="Helvetica Neue"/>
-                  <a:cs typeface="Helvetica Neue"/>
+                  <a:latin typeface="Liberation Sans"/>
+                  <a:ea typeface="Liberation Sans"/>
+                  <a:cs typeface="Liberation Sans"/>
                 </a:defRPr>
               </a:pPr>
             </a:p>
@@ -1820,9 +1820,9 @@
                 <a:solidFill>
                   <a:srgbClr val="666666"/>
                 </a:solidFill>
-                <a:latin typeface="Helvetica Neue"/>
-                <a:ea typeface="Helvetica Neue"/>
-                <a:cs typeface="Helvetica Neue"/>
+                <a:latin typeface="Liberation Sans"/>
+                <a:ea typeface="Liberation Sans"/>
+                <a:cs typeface="Liberation Sans"/>
               </a:defRPr>
             </a:pPr>
           </a:p>
@@ -1856,9 +1856,9 @@
                 <a:solidFill>
                   <a:srgbClr val="666666"/>
                 </a:solidFill>
-                <a:latin typeface="Helvetica Neue"/>
-                <a:ea typeface="Helvetica Neue"/>
-                <a:cs typeface="Helvetica Neue"/>
+                <a:latin typeface="Liberation Sans"/>
+                <a:ea typeface="Liberation Sans"/>
+                <a:cs typeface="Liberation Sans"/>
               </a:defRPr>
             </a:pPr>
           </a:p>
@@ -1876,9 +1876,9 @@
         <a:p xmlns:a="http://schemas.openxmlformats.org/drawingml/2006/main">
           <a:pPr>
             <a:defRPr>
-              <a:latin typeface="Helvetica Neue"/>
-              <a:ea typeface="Helvetica Neue"/>
-              <a:cs typeface="Helvetica Neue"/>
+              <a:latin typeface="Liberation Sans"/>
+              <a:ea typeface="Liberation Sans"/>
+              <a:cs typeface="Liberation Sans"/>
             </a:defRPr>
           </a:pPr>
         </a:p>
@@ -1916,7 +1916,7 @@
           <p:cNvPr id="9" name="">
             <a:extLst xmlns:a="http://schemas.openxmlformats.org/drawingml/2006/main">
               <a:ext uri="{FF2B5EF4-FFF2-40B4-BE49-F238E27FC236}">
-                <a16:creationId xmlns:a16="http://schemas.microsoft.com/office/drawing/2014/main" id="{78669ECA-31C8-4BCE-B3B3-3DB35C81E7FE}"/>
+                <a16:creationId xmlns:a16="http://schemas.microsoft.com/office/drawing/2014/main" id="{C3F6282C-EFFA-4418-B219-5BA3264DB050}"/>
               </a:ext>
             </a:extLst>
           </p:cNvPr>
@@ -1948,7 +1948,7 @@
           <p:cNvPr id="2" name="">
             <a:extLst xmlns:a="http://schemas.openxmlformats.org/drawingml/2006/main">
               <a:ext uri="{FF2B5EF4-FFF2-40B4-BE49-F238E27FC236}">
-                <a16:creationId xmlns:a16="http://schemas.microsoft.com/office/drawing/2014/main" id="{AD6191B7-A2D7-44B2-8178-38A64B17E3F0}"/>
+                <a16:creationId xmlns:a16="http://schemas.microsoft.com/office/drawing/2014/main" id="{01116CFF-4B4C-4F60-B6DB-9AF274C724A3}"/>
               </a:ext>
             </a:extLst>
           </p:cNvPr>
@@ -1981,9 +1981,9 @@
                 <a:solidFill>
                   <a:srgbClr val="9DE8CA"/>
                 </a:solidFill>
-                <a:latin typeface="Helvetica Neue"/>
-                <a:ea typeface="Helvetica Neue"/>
-                <a:cs typeface="Helvetica Neue"/>
+                <a:latin typeface="Liberation Sans"/>
+                <a:ea typeface="Liberation Sans"/>
+                <a:cs typeface="Liberation Sans"/>
               </a:defRPr>
             </a:pPr>
             <a:r>
@@ -1991,9 +1991,9 @@
                 <a:solidFill>
                   <a:srgbClr val="9DE8CA"/>
                 </a:solidFill>
-                <a:latin typeface="Helvetica Neue"/>
-                <a:ea typeface="Helvetica Neue"/>
-                <a:cs typeface="Helvetica Neue"/>
+                <a:latin typeface="Liberation Sans"/>
+                <a:ea typeface="Liberation Sans"/>
+                <a:cs typeface="Liberation Sans"/>
               </a:rPr>
               <a:t>NEFTECODE ADVISOR</a:t>
             </a:r>
@@ -2005,7 +2005,7 @@
           <p:cNvPr id="3" name="">
             <a:extLst xmlns:a="http://schemas.openxmlformats.org/drawingml/2006/main">
               <a:ext uri="{FF2B5EF4-FFF2-40B4-BE49-F238E27FC236}">
-                <a16:creationId xmlns:a16="http://schemas.microsoft.com/office/drawing/2014/main" id="{AFEFB044-7028-4DD7-AEAC-7A77A772E2F3}"/>
+                <a16:creationId xmlns:a16="http://schemas.microsoft.com/office/drawing/2014/main" id="{88C5CC2D-0E6D-41F0-A988-C546CF7703AE}"/>
               </a:ext>
             </a:extLst>
           </p:cNvPr>
@@ -2038,9 +2038,9 @@
                 <a:solidFill>
                   <a:srgbClr val="FFFFFF"/>
                 </a:solidFill>
-                <a:latin typeface="Helvetica Neue"/>
-                <a:ea typeface="Helvetica Neue"/>
-                <a:cs typeface="Helvetica Neue"/>
+                <a:latin typeface="Liberation Sans"/>
+                <a:ea typeface="Liberation Sans"/>
+                <a:cs typeface="Liberation Sans"/>
               </a:defRPr>
             </a:pPr>
             <a:r>
@@ -2048,9 +2048,9 @@
                 <a:solidFill>
                   <a:srgbClr val="FFFFFF"/>
                 </a:solidFill>
-                <a:latin typeface="Helvetica Neue"/>
-                <a:ea typeface="Helvetica Neue"/>
-                <a:cs typeface="Helvetica Neue"/>
+                <a:latin typeface="Liberation Sans"/>
+                <a:ea typeface="Liberation Sans"/>
+                <a:cs typeface="Liberation Sans"/>
               </a:rPr>
               <a:t>Советчик для полной</a:t>
             </a:r>
@@ -2061,9 +2061,9 @@
                 <a:solidFill>
                   <a:srgbClr val="FFFFFF"/>
                 </a:solidFill>
-                <a:latin typeface="Helvetica Neue"/>
-                <a:ea typeface="Helvetica Neue"/>
-                <a:cs typeface="Helvetica Neue"/>
+                <a:latin typeface="Liberation Sans"/>
+                <a:ea typeface="Liberation Sans"/>
+                <a:cs typeface="Liberation Sans"/>
               </a:defRPr>
             </a:pPr>
             <a:r>
@@ -2071,9 +2071,9 @@
                 <a:solidFill>
                   <a:srgbClr val="FFFFFF"/>
                 </a:solidFill>
-                <a:latin typeface="Helvetica Neue"/>
-                <a:ea typeface="Helvetica Neue"/>
-                <a:cs typeface="Helvetica Neue"/>
+                <a:latin typeface="Liberation Sans"/>
+                <a:ea typeface="Liberation Sans"/>
+                <a:cs typeface="Liberation Sans"/>
               </a:rPr>
               <a:t>цепочки дизельного топлива</a:t>
             </a:r>
@@ -2085,7 +2085,7 @@
           <p:cNvPr id="4" name="">
             <a:extLst xmlns:a="http://schemas.openxmlformats.org/drawingml/2006/main">
               <a:ext uri="{FF2B5EF4-FFF2-40B4-BE49-F238E27FC236}">
-                <a16:creationId xmlns:a16="http://schemas.microsoft.com/office/drawing/2014/main" id="{9B1D87E1-B744-4D38-B295-2FB1438210E4}"/>
+                <a16:creationId xmlns:a16="http://schemas.microsoft.com/office/drawing/2014/main" id="{6E310CA9-8680-4F2F-8A6B-CD307E173BCF}"/>
               </a:ext>
             </a:extLst>
           </p:cNvPr>
@@ -2118,9 +2118,9 @@
                 <a:solidFill>
                   <a:srgbClr val="9DE8CA"/>
                 </a:solidFill>
-                <a:latin typeface="Helvetica Neue"/>
-                <a:ea typeface="Helvetica Neue"/>
-                <a:cs typeface="Helvetica Neue"/>
+                <a:latin typeface="Liberation Sans"/>
+                <a:ea typeface="Liberation Sans"/>
+                <a:cs typeface="Liberation Sans"/>
               </a:defRPr>
             </a:pPr>
             <a:r>
@@ -2128,9 +2128,9 @@
                 <a:solidFill>
                   <a:srgbClr val="9DE8CA"/>
                 </a:solidFill>
-                <a:latin typeface="Helvetica Neue"/>
-                <a:ea typeface="Helvetica Neue"/>
-                <a:cs typeface="Helvetica Neue"/>
+                <a:latin typeface="Liberation Sans"/>
+                <a:ea typeface="Liberation Sans"/>
+                <a:cs typeface="Liberation Sans"/>
               </a:rPr>
               <a:t>АВТ → гидроочистка → блендинг</a:t>
             </a:r>
@@ -2142,7 +2142,7 @@
           <p:cNvPr id="5" name="">
             <a:extLst xmlns:a="http://schemas.openxmlformats.org/drawingml/2006/main">
               <a:ext uri="{FF2B5EF4-FFF2-40B4-BE49-F238E27FC236}">
-                <a16:creationId xmlns:a16="http://schemas.microsoft.com/office/drawing/2014/main" id="{3FF668E2-43D2-4530-BFEF-2A1E5D5CF842}"/>
+                <a16:creationId xmlns:a16="http://schemas.microsoft.com/office/drawing/2014/main" id="{DA5568A2-F62C-4ADE-86C7-28C7E1DDEF4B}"/>
               </a:ext>
             </a:extLst>
           </p:cNvPr>
@@ -2175,9 +2175,9 @@
                 <a:solidFill>
                   <a:srgbClr val="BED7CE"/>
                 </a:solidFill>
-                <a:latin typeface="Helvetica Neue"/>
-                <a:ea typeface="Helvetica Neue"/>
-                <a:cs typeface="Helvetica Neue"/>
+                <a:latin typeface="Liberation Sans"/>
+                <a:ea typeface="Liberation Sans"/>
+                <a:cs typeface="Liberation Sans"/>
               </a:defRPr>
             </a:pPr>
             <a:r>
@@ -2185,9 +2185,9 @@
                 <a:solidFill>
                   <a:srgbClr val="BED7CE"/>
                 </a:solidFill>
-                <a:latin typeface="Helvetica Neue"/>
-                <a:ea typeface="Helvetica Neue"/>
-                <a:cs typeface="Helvetica Neue"/>
+                <a:latin typeface="Liberation Sans"/>
+                <a:ea typeface="Liberation Sans"/>
+                <a:cs typeface="Liberation Sans"/>
               </a:rPr>
               <a:t>Два честно разделённых режима: исторический прогноз и редактируемый modelled what-if.</a:t>
             </a:r>
@@ -2199,7 +2199,7 @@
           <p:cNvPr id="6" name="">
             <a:extLst xmlns:a="http://schemas.openxmlformats.org/drawingml/2006/main">
               <a:ext uri="{FF2B5EF4-FFF2-40B4-BE49-F238E27FC236}">
-                <a16:creationId xmlns:a16="http://schemas.microsoft.com/office/drawing/2014/main" id="{A37CF346-12F6-4931-B240-6090D1C34F5B}"/>
+                <a16:creationId xmlns:a16="http://schemas.microsoft.com/office/drawing/2014/main" id="{635DF6B9-7C6B-4A9A-A7D1-527650B82361}"/>
               </a:ext>
             </a:extLst>
           </p:cNvPr>
@@ -2231,7 +2231,7 @@
           <p:cNvPr id="7" name="">
             <a:extLst xmlns:a="http://schemas.openxmlformats.org/drawingml/2006/main">
               <a:ext uri="{FF2B5EF4-FFF2-40B4-BE49-F238E27FC236}">
-                <a16:creationId xmlns:a16="http://schemas.microsoft.com/office/drawing/2014/main" id="{FFFEDC64-AA13-45BF-BD19-F71CD3B38D06}"/>
+                <a16:creationId xmlns:a16="http://schemas.microsoft.com/office/drawing/2014/main" id="{4B729718-E777-4F77-B505-1121C5B99E39}"/>
               </a:ext>
             </a:extLst>
           </p:cNvPr>
@@ -2264,9 +2264,9 @@
                 <a:solidFill>
                   <a:srgbClr val="0B211A"/>
                 </a:solidFill>
-                <a:latin typeface="Helvetica Neue"/>
-                <a:ea typeface="Helvetica Neue"/>
-                <a:cs typeface="Helvetica Neue"/>
+                <a:latin typeface="Liberation Sans"/>
+                <a:ea typeface="Liberation Sans"/>
+                <a:cs typeface="Liberation Sans"/>
               </a:defRPr>
             </a:pPr>
             <a:r>
@@ -2274,9 +2274,9 @@
                 <a:solidFill>
                   <a:srgbClr val="0B211A"/>
                 </a:solidFill>
-                <a:latin typeface="Helvetica Neue"/>
-                <a:ea typeface="Helvetica Neue"/>
-                <a:cs typeface="Helvetica Neue"/>
+                <a:latin typeface="Liberation Sans"/>
+                <a:ea typeface="Liberation Sans"/>
+                <a:cs typeface="Liberation Sans"/>
               </a:rPr>
               <a:t>НЕ УПРАВЛЯЕТ ОБОРУДОВАНИЕМ</a:t>
             </a:r>
@@ -2292,8 +2292,8 @@
           <p:nvPr/>
         </p:nvPicPr>
         <p:blipFill>
-          <a:blip xmlns:r="http://schemas.openxmlformats.org/officeDocument/2006/relationships" xmlns:a="http://schemas.openxmlformats.org/drawingml/2006/main" r:embed="Re29aaff938404f11"/>
-          <a:srcRect xmlns:a="http://schemas.openxmlformats.org/drawingml/2006/main" l="0" t="9355" r="0" b="9355"/>
+          <a:blip xmlns:r="http://schemas.openxmlformats.org/officeDocument/2006/relationships" xmlns:a="http://schemas.openxmlformats.org/drawingml/2006/main" r:embed="Rfe6c5a799a044319"/>
+          <a:srcRect xmlns:a="http://schemas.openxmlformats.org/drawingml/2006/main" l="0" t="10611" r="0" b="10611"/>
           <a:stretch xmlns:a="http://schemas.openxmlformats.org/drawingml/2006/main">
             <a:fillRect l="0" t="0" r="0" b="0"/>
           </a:stretch>
@@ -2313,7 +2313,7 @@
     </p:spTree>
     <p:extLst>
       <p:ext uri="{BB962C8B-B14F-4D97-AF65-F5344CB8AC3E}">
-        <p14:creationId xmlns:p14="http://schemas.microsoft.com/office/powerpoint/2010/main" val="349492574"/>
+        <p14:creationId xmlns:p14="http://schemas.microsoft.com/office/powerpoint/2010/main" val="1645603757"/>
       </p:ext>
     </p:extLst>
   </p:cSld>
@@ -2344,7 +2344,7 @@
           <p:cNvPr id="20" name="">
             <a:extLst xmlns:a="http://schemas.openxmlformats.org/drawingml/2006/main">
               <a:ext uri="{FF2B5EF4-FFF2-40B4-BE49-F238E27FC236}">
-                <a16:creationId xmlns:a16="http://schemas.microsoft.com/office/drawing/2014/main" id="{11BC4035-E83B-4A14-8869-11D5B4B5480C}"/>
+                <a16:creationId xmlns:a16="http://schemas.microsoft.com/office/drawing/2014/main" id="{097B9F75-2F06-4C79-9938-527A04EA930B}"/>
               </a:ext>
             </a:extLst>
           </p:cNvPr>
@@ -2377,9 +2377,9 @@
                 <a:solidFill>
                   <a:srgbClr val="9DE8CA"/>
                 </a:solidFill>
-                <a:latin typeface="Helvetica Neue"/>
-                <a:ea typeface="Helvetica Neue"/>
-                <a:cs typeface="Helvetica Neue"/>
+                <a:latin typeface="Liberation Sans"/>
+                <a:ea typeface="Liberation Sans"/>
+                <a:cs typeface="Liberation Sans"/>
               </a:defRPr>
             </a:pPr>
             <a:r>
@@ -2387,9 +2387,9 @@
                 <a:solidFill>
                   <a:srgbClr val="9DE8CA"/>
                 </a:solidFill>
-                <a:latin typeface="Helvetica Neue"/>
-                <a:ea typeface="Helvetica Neue"/>
-                <a:cs typeface="Helvetica Neue"/>
+                <a:latin typeface="Liberation Sans"/>
+                <a:ea typeface="Liberation Sans"/>
+                <a:cs typeface="Liberation Sans"/>
               </a:rPr>
               <a:t>NEFTECODE ADVISOR</a:t>
             </a:r>
@@ -2401,7 +2401,7 @@
           <p:cNvPr id="2" name="">
             <a:extLst xmlns:a="http://schemas.openxmlformats.org/drawingml/2006/main">
               <a:ext uri="{FF2B5EF4-FFF2-40B4-BE49-F238E27FC236}">
-                <a16:creationId xmlns:a16="http://schemas.microsoft.com/office/drawing/2014/main" id="{3B77A749-700C-4C51-BBCD-160039CA3B80}"/>
+                <a16:creationId xmlns:a16="http://schemas.microsoft.com/office/drawing/2014/main" id="{0CE6312F-FBBE-49B5-9E2D-BC74E2E60978}"/>
               </a:ext>
             </a:extLst>
           </p:cNvPr>
@@ -2434,9 +2434,9 @@
                 <a:solidFill>
                   <a:srgbClr val="FFFFFF"/>
                 </a:solidFill>
-                <a:latin typeface="Helvetica Neue"/>
-                <a:ea typeface="Helvetica Neue"/>
-                <a:cs typeface="Helvetica Neue"/>
+                <a:latin typeface="Liberation Sans"/>
+                <a:ea typeface="Liberation Sans"/>
+                <a:cs typeface="Liberation Sans"/>
               </a:defRPr>
             </a:pPr>
             <a:r>
@@ -2444,9 +2444,9 @@
                 <a:solidFill>
                   <a:srgbClr val="FFFFFF"/>
                 </a:solidFill>
-                <a:latin typeface="Helvetica Neue"/>
-                <a:ea typeface="Helvetica Neue"/>
-                <a:cs typeface="Helvetica Neue"/>
+                <a:latin typeface="Liberation Sans"/>
+                <a:ea typeface="Liberation Sans"/>
+                <a:cs typeface="Liberation Sans"/>
               </a:rPr>
               <a:t>Прототип готов</a:t>
             </a:r>
@@ -2457,9 +2457,9 @@
                 <a:solidFill>
                   <a:srgbClr val="FFFFFF"/>
                 </a:solidFill>
-                <a:latin typeface="Helvetica Neue"/>
-                <a:ea typeface="Helvetica Neue"/>
-                <a:cs typeface="Helvetica Neue"/>
+                <a:latin typeface="Liberation Sans"/>
+                <a:ea typeface="Liberation Sans"/>
+                <a:cs typeface="Liberation Sans"/>
               </a:defRPr>
             </a:pPr>
             <a:r>
@@ -2467,9 +2467,9 @@
                 <a:solidFill>
                   <a:srgbClr val="FFFFFF"/>
                 </a:solidFill>
-                <a:latin typeface="Helvetica Neue"/>
-                <a:ea typeface="Helvetica Neue"/>
-                <a:cs typeface="Helvetica Neue"/>
+                <a:latin typeface="Liberation Sans"/>
+                <a:ea typeface="Liberation Sans"/>
+                <a:cs typeface="Liberation Sans"/>
               </a:rPr>
               <a:t>к пяти минутам проверки</a:t>
             </a:r>
@@ -2481,7 +2481,7 @@
           <p:cNvPr id="3" name="">
             <a:extLst xmlns:a="http://schemas.openxmlformats.org/drawingml/2006/main">
               <a:ext uri="{FF2B5EF4-FFF2-40B4-BE49-F238E27FC236}">
-                <a16:creationId xmlns:a16="http://schemas.microsoft.com/office/drawing/2014/main" id="{6B2EA3EA-7023-409B-B0AB-41F276DC4060}"/>
+                <a16:creationId xmlns:a16="http://schemas.microsoft.com/office/drawing/2014/main" id="{5961DE8E-3100-4A27-9D27-E8BA7E3B2FFD}"/>
               </a:ext>
             </a:extLst>
           </p:cNvPr>
@@ -2513,7 +2513,7 @@
           <p:cNvPr id="4" name="">
             <a:extLst xmlns:a="http://schemas.openxmlformats.org/drawingml/2006/main">
               <a:ext uri="{FF2B5EF4-FFF2-40B4-BE49-F238E27FC236}">
-                <a16:creationId xmlns:a16="http://schemas.microsoft.com/office/drawing/2014/main" id="{0B649847-1DF4-40AD-A074-3EE7ABE6C3A7}"/>
+                <a16:creationId xmlns:a16="http://schemas.microsoft.com/office/drawing/2014/main" id="{DB1FDDD2-4267-4E4C-B6A3-8103AF345CCD}"/>
               </a:ext>
             </a:extLst>
           </p:cNvPr>
@@ -2546,9 +2546,9 @@
                 <a:solidFill>
                   <a:srgbClr val="FFFFFF"/>
                 </a:solidFill>
-                <a:latin typeface="Helvetica Neue"/>
-                <a:ea typeface="Helvetica Neue"/>
-                <a:cs typeface="Helvetica Neue"/>
+                <a:latin typeface="Liberation Sans"/>
+                <a:ea typeface="Liberation Sans"/>
+                <a:cs typeface="Liberation Sans"/>
               </a:defRPr>
             </a:pPr>
             <a:r>
@@ -2556,9 +2556,9 @@
                 <a:solidFill>
                   <a:srgbClr val="FFFFFF"/>
                 </a:solidFill>
-                <a:latin typeface="Helvetica Neue"/>
-                <a:ea typeface="Helvetica Neue"/>
-                <a:cs typeface="Helvetica Neue"/>
+                <a:latin typeface="Liberation Sans"/>
+                <a:ea typeface="Liberation Sans"/>
+                <a:cs typeface="Liberation Sans"/>
               </a:rPr>
               <a:t>01</a:t>
             </a:r>
@@ -2570,7 +2570,7 @@
           <p:cNvPr id="5" name="">
             <a:extLst xmlns:a="http://schemas.openxmlformats.org/drawingml/2006/main">
               <a:ext uri="{FF2B5EF4-FFF2-40B4-BE49-F238E27FC236}">
-                <a16:creationId xmlns:a16="http://schemas.microsoft.com/office/drawing/2014/main" id="{C9665E44-29CE-4629-A8CD-D0BDB51FA981}"/>
+                <a16:creationId xmlns:a16="http://schemas.microsoft.com/office/drawing/2014/main" id="{2E21C58F-F097-40FE-B283-5E6EC79C2066}"/>
               </a:ext>
             </a:extLst>
           </p:cNvPr>
@@ -2603,9 +2603,9 @@
                 <a:solidFill>
                   <a:srgbClr val="9DE8CA"/>
                 </a:solidFill>
-                <a:latin typeface="Helvetica Neue"/>
-                <a:ea typeface="Helvetica Neue"/>
-                <a:cs typeface="Helvetica Neue"/>
+                <a:latin typeface="Liberation Sans"/>
+                <a:ea typeface="Liberation Sans"/>
+                <a:cs typeface="Liberation Sans"/>
               </a:defRPr>
             </a:pPr>
             <a:r>
@@ -2613,9 +2613,9 @@
                 <a:solidFill>
                   <a:srgbClr val="9DE8CA"/>
                 </a:solidFill>
-                <a:latin typeface="Helvetica Neue"/>
-                <a:ea typeface="Helvetica Neue"/>
-                <a:cs typeface="Helvetica Neue"/>
+                <a:latin typeface="Liberation Sans"/>
+                <a:ea typeface="Liberation Sans"/>
+                <a:cs typeface="Liberation Sans"/>
               </a:rPr>
               <a:t>Честно</a:t>
             </a:r>
@@ -2627,7 +2627,7 @@
           <p:cNvPr id="6" name="">
             <a:extLst xmlns:a="http://schemas.openxmlformats.org/drawingml/2006/main">
               <a:ext uri="{FF2B5EF4-FFF2-40B4-BE49-F238E27FC236}">
-                <a16:creationId xmlns:a16="http://schemas.microsoft.com/office/drawing/2014/main" id="{F158AD2C-1A28-4A14-A1D3-AC4E5D353834}"/>
+                <a16:creationId xmlns:a16="http://schemas.microsoft.com/office/drawing/2014/main" id="{E863F7FA-838E-4E07-AD87-5F6771F4D355}"/>
               </a:ext>
             </a:extLst>
           </p:cNvPr>
@@ -2660,9 +2660,9 @@
                 <a:solidFill>
                   <a:srgbClr val="BED7CE"/>
                 </a:solidFill>
-                <a:latin typeface="Helvetica Neue"/>
-                <a:ea typeface="Helvetica Neue"/>
-                <a:cs typeface="Helvetica Neue"/>
+                <a:latin typeface="Liberation Sans"/>
+                <a:ea typeface="Liberation Sans"/>
+                <a:cs typeface="Liberation Sans"/>
               </a:defRPr>
             </a:pPr>
             <a:r>
@@ -2670,9 +2670,9 @@
                 <a:solidFill>
                   <a:srgbClr val="BED7CE"/>
                 </a:solidFill>
-                <a:latin typeface="Helvetica Neue"/>
-                <a:ea typeface="Helvetica Neue"/>
-                <a:cs typeface="Helvetica Neue"/>
+                <a:latin typeface="Liberation Sans"/>
+                <a:ea typeface="Liberation Sans"/>
+                <a:cs typeface="Liberation Sans"/>
               </a:rPr>
               <a:t>forecast и action effect разделены</a:t>
             </a:r>
@@ -2684,7 +2684,7 @@
           <p:cNvPr id="7" name="">
             <a:extLst xmlns:a="http://schemas.openxmlformats.org/drawingml/2006/main">
               <a:ext uri="{FF2B5EF4-FFF2-40B4-BE49-F238E27FC236}">
-                <a16:creationId xmlns:a16="http://schemas.microsoft.com/office/drawing/2014/main" id="{08CCC66E-9738-4447-8AF2-6E6765C89A1F}"/>
+                <a16:creationId xmlns:a16="http://schemas.microsoft.com/office/drawing/2014/main" id="{7DC96EF8-4B77-4B01-9A8F-FF0C3E18F447}"/>
               </a:ext>
             </a:extLst>
           </p:cNvPr>
@@ -2716,7 +2716,7 @@
           <p:cNvPr id="8" name="">
             <a:extLst xmlns:a="http://schemas.openxmlformats.org/drawingml/2006/main">
               <a:ext uri="{FF2B5EF4-FFF2-40B4-BE49-F238E27FC236}">
-                <a16:creationId xmlns:a16="http://schemas.microsoft.com/office/drawing/2014/main" id="{A524770A-9022-488D-BBEF-36678256CC11}"/>
+                <a16:creationId xmlns:a16="http://schemas.microsoft.com/office/drawing/2014/main" id="{0EA8BA1D-FFB1-46DC-8C79-4FAFD75BAC74}"/>
               </a:ext>
             </a:extLst>
           </p:cNvPr>
@@ -2749,9 +2749,9 @@
                 <a:solidFill>
                   <a:srgbClr val="FFFFFF"/>
                 </a:solidFill>
-                <a:latin typeface="Helvetica Neue"/>
-                <a:ea typeface="Helvetica Neue"/>
-                <a:cs typeface="Helvetica Neue"/>
+                <a:latin typeface="Liberation Sans"/>
+                <a:ea typeface="Liberation Sans"/>
+                <a:cs typeface="Liberation Sans"/>
               </a:defRPr>
             </a:pPr>
             <a:r>
@@ -2759,9 +2759,9 @@
                 <a:solidFill>
                   <a:srgbClr val="FFFFFF"/>
                 </a:solidFill>
-                <a:latin typeface="Helvetica Neue"/>
-                <a:ea typeface="Helvetica Neue"/>
-                <a:cs typeface="Helvetica Neue"/>
+                <a:latin typeface="Liberation Sans"/>
+                <a:ea typeface="Liberation Sans"/>
+                <a:cs typeface="Liberation Sans"/>
               </a:rPr>
               <a:t>02</a:t>
             </a:r>
@@ -2773,7 +2773,7 @@
           <p:cNvPr id="9" name="">
             <a:extLst xmlns:a="http://schemas.openxmlformats.org/drawingml/2006/main">
               <a:ext uri="{FF2B5EF4-FFF2-40B4-BE49-F238E27FC236}">
-                <a16:creationId xmlns:a16="http://schemas.microsoft.com/office/drawing/2014/main" id="{85BD895E-2903-4BEA-AA1C-5AC87542E4CA}"/>
+                <a16:creationId xmlns:a16="http://schemas.microsoft.com/office/drawing/2014/main" id="{C3F57B1B-DBA0-4CFA-9633-2820411A44BB}"/>
               </a:ext>
             </a:extLst>
           </p:cNvPr>
@@ -2806,9 +2806,9 @@
                 <a:solidFill>
                   <a:srgbClr val="9DE8CA"/>
                 </a:solidFill>
-                <a:latin typeface="Helvetica Neue"/>
-                <a:ea typeface="Helvetica Neue"/>
-                <a:cs typeface="Helvetica Neue"/>
+                <a:latin typeface="Liberation Sans"/>
+                <a:ea typeface="Liberation Sans"/>
+                <a:cs typeface="Liberation Sans"/>
               </a:defRPr>
             </a:pPr>
             <a:r>
@@ -2816,9 +2816,9 @@
                 <a:solidFill>
                   <a:srgbClr val="9DE8CA"/>
                 </a:solidFill>
-                <a:latin typeface="Helvetica Neue"/>
-                <a:ea typeface="Helvetica Neue"/>
-                <a:cs typeface="Helvetica Neue"/>
+                <a:latin typeface="Liberation Sans"/>
+                <a:ea typeface="Liberation Sans"/>
+                <a:cs typeface="Liberation Sans"/>
               </a:rPr>
               <a:t>Полно</a:t>
             </a:r>
@@ -2830,7 +2830,7 @@
           <p:cNvPr id="10" name="">
             <a:extLst xmlns:a="http://schemas.openxmlformats.org/drawingml/2006/main">
               <a:ext uri="{FF2B5EF4-FFF2-40B4-BE49-F238E27FC236}">
-                <a16:creationId xmlns:a16="http://schemas.microsoft.com/office/drawing/2014/main" id="{93C5915D-98A8-4D97-8635-2F6762256D4A}"/>
+                <a16:creationId xmlns:a16="http://schemas.microsoft.com/office/drawing/2014/main" id="{A4D7BF61-A3F4-4F10-BF7B-F314D0030992}"/>
               </a:ext>
             </a:extLst>
           </p:cNvPr>
@@ -2863,9 +2863,9 @@
                 <a:solidFill>
                   <a:srgbClr val="BED7CE"/>
                 </a:solidFill>
-                <a:latin typeface="Helvetica Neue"/>
-                <a:ea typeface="Helvetica Neue"/>
-                <a:cs typeface="Helvetica Neue"/>
+                <a:latin typeface="Liberation Sans"/>
+                <a:ea typeface="Liberation Sans"/>
+                <a:cs typeface="Liberation Sans"/>
               </a:defRPr>
             </a:pPr>
             <a:r>
@@ -2873,9 +2873,9 @@
                 <a:solidFill>
                   <a:srgbClr val="BED7CE"/>
                 </a:solidFill>
-                <a:latin typeface="Helvetica Neue"/>
-                <a:ea typeface="Helvetica Neue"/>
-                <a:cs typeface="Helvetica Neue"/>
+                <a:latin typeface="Liberation Sans"/>
+                <a:ea typeface="Liberation Sans"/>
+                <a:cs typeface="Liberation Sans"/>
               </a:rPr>
               <a:t>АВТ → гидроочистка → блендинг</a:t>
             </a:r>
@@ -2887,7 +2887,7 @@
           <p:cNvPr id="11" name="">
             <a:extLst xmlns:a="http://schemas.openxmlformats.org/drawingml/2006/main">
               <a:ext uri="{FF2B5EF4-FFF2-40B4-BE49-F238E27FC236}">
-                <a16:creationId xmlns:a16="http://schemas.microsoft.com/office/drawing/2014/main" id="{56B2C32D-9D7F-48BD-A48E-6043CA533629}"/>
+                <a16:creationId xmlns:a16="http://schemas.microsoft.com/office/drawing/2014/main" id="{EDF48621-BC1F-49D5-AFDF-6D34FB47324C}"/>
               </a:ext>
             </a:extLst>
           </p:cNvPr>
@@ -2919,7 +2919,7 @@
           <p:cNvPr id="12" name="">
             <a:extLst xmlns:a="http://schemas.openxmlformats.org/drawingml/2006/main">
               <a:ext uri="{FF2B5EF4-FFF2-40B4-BE49-F238E27FC236}">
-                <a16:creationId xmlns:a16="http://schemas.microsoft.com/office/drawing/2014/main" id="{90001462-A1D4-4899-AD8F-DAF8A8932C28}"/>
+                <a16:creationId xmlns:a16="http://schemas.microsoft.com/office/drawing/2014/main" id="{C849817D-628C-4C72-A611-82E8736DAB71}"/>
               </a:ext>
             </a:extLst>
           </p:cNvPr>
@@ -2952,9 +2952,9 @@
                 <a:solidFill>
                   <a:srgbClr val="FFFFFF"/>
                 </a:solidFill>
-                <a:latin typeface="Helvetica Neue"/>
-                <a:ea typeface="Helvetica Neue"/>
-                <a:cs typeface="Helvetica Neue"/>
+                <a:latin typeface="Liberation Sans"/>
+                <a:ea typeface="Liberation Sans"/>
+                <a:cs typeface="Liberation Sans"/>
               </a:defRPr>
             </a:pPr>
             <a:r>
@@ -2962,9 +2962,9 @@
                 <a:solidFill>
                   <a:srgbClr val="FFFFFF"/>
                 </a:solidFill>
-                <a:latin typeface="Helvetica Neue"/>
-                <a:ea typeface="Helvetica Neue"/>
-                <a:cs typeface="Helvetica Neue"/>
+                <a:latin typeface="Liberation Sans"/>
+                <a:ea typeface="Liberation Sans"/>
+                <a:cs typeface="Liberation Sans"/>
               </a:rPr>
               <a:t>03</a:t>
             </a:r>
@@ -2976,7 +2976,7 @@
           <p:cNvPr id="13" name="">
             <a:extLst xmlns:a="http://schemas.openxmlformats.org/drawingml/2006/main">
               <a:ext uri="{FF2B5EF4-FFF2-40B4-BE49-F238E27FC236}">
-                <a16:creationId xmlns:a16="http://schemas.microsoft.com/office/drawing/2014/main" id="{298E401E-477F-4763-819E-B316B7B2FE96}"/>
+                <a16:creationId xmlns:a16="http://schemas.microsoft.com/office/drawing/2014/main" id="{10AFD774-F4CC-4750-ACB6-048954832268}"/>
               </a:ext>
             </a:extLst>
           </p:cNvPr>
@@ -3009,9 +3009,9 @@
                 <a:solidFill>
                   <a:srgbClr val="9DE8CA"/>
                 </a:solidFill>
-                <a:latin typeface="Helvetica Neue"/>
-                <a:ea typeface="Helvetica Neue"/>
-                <a:cs typeface="Helvetica Neue"/>
+                <a:latin typeface="Liberation Sans"/>
+                <a:ea typeface="Liberation Sans"/>
+                <a:cs typeface="Liberation Sans"/>
               </a:defRPr>
             </a:pPr>
             <a:r>
@@ -3019,9 +3019,9 @@
                 <a:solidFill>
                   <a:srgbClr val="9DE8CA"/>
                 </a:solidFill>
-                <a:latin typeface="Helvetica Neue"/>
-                <a:ea typeface="Helvetica Neue"/>
-                <a:cs typeface="Helvetica Neue"/>
+                <a:latin typeface="Liberation Sans"/>
+                <a:ea typeface="Liberation Sans"/>
+                <a:cs typeface="Liberation Sans"/>
               </a:rPr>
               <a:t>Воспроизводимо</a:t>
             </a:r>
@@ -3033,7 +3033,7 @@
           <p:cNvPr id="14" name="">
             <a:extLst xmlns:a="http://schemas.openxmlformats.org/drawingml/2006/main">
               <a:ext uri="{FF2B5EF4-FFF2-40B4-BE49-F238E27FC236}">
-                <a16:creationId xmlns:a16="http://schemas.microsoft.com/office/drawing/2014/main" id="{D2BBC968-6CA4-4C33-B82B-93D591A3E70E}"/>
+                <a16:creationId xmlns:a16="http://schemas.microsoft.com/office/drawing/2014/main" id="{1ED29A16-220C-43F2-A312-C15C0CE4F071}"/>
               </a:ext>
             </a:extLst>
           </p:cNvPr>
@@ -3066,9 +3066,9 @@
                 <a:solidFill>
                   <a:srgbClr val="BED7CE"/>
                 </a:solidFill>
-                <a:latin typeface="Helvetica Neue"/>
-                <a:ea typeface="Helvetica Neue"/>
-                <a:cs typeface="Helvetica Neue"/>
+                <a:latin typeface="Liberation Sans"/>
+                <a:ea typeface="Liberation Sans"/>
+                <a:cs typeface="Liberation Sans"/>
               </a:defRPr>
             </a:pPr>
             <a:r>
@@ -3076,9 +3076,9 @@
                 <a:solidFill>
                   <a:srgbClr val="BED7CE"/>
                 </a:solidFill>
-                <a:latin typeface="Helvetica Neue"/>
-                <a:ea typeface="Helvetica Neue"/>
-                <a:cs typeface="Helvetica Neue"/>
+                <a:latin typeface="Liberation Sans"/>
+                <a:ea typeface="Liberation Sans"/>
+                <a:cs typeface="Liberation Sans"/>
               </a:rPr>
               <a:t>код, БД, dashboard, отчёт, deck</a:t>
             </a:r>
@@ -3090,7 +3090,7 @@
           <p:cNvPr id="15" name="">
             <a:extLst xmlns:a="http://schemas.openxmlformats.org/drawingml/2006/main">
               <a:ext uri="{FF2B5EF4-FFF2-40B4-BE49-F238E27FC236}">
-                <a16:creationId xmlns:a16="http://schemas.microsoft.com/office/drawing/2014/main" id="{0C95E898-B4F6-490E-ACA8-7AB929694055}"/>
+                <a16:creationId xmlns:a16="http://schemas.microsoft.com/office/drawing/2014/main" id="{5372F9A9-8081-4843-BC42-BEBDA65D3366}"/>
               </a:ext>
             </a:extLst>
           </p:cNvPr>
@@ -3122,7 +3122,7 @@
           <p:cNvPr id="16" name="">
             <a:extLst xmlns:a="http://schemas.openxmlformats.org/drawingml/2006/main">
               <a:ext uri="{FF2B5EF4-FFF2-40B4-BE49-F238E27FC236}">
-                <a16:creationId xmlns:a16="http://schemas.microsoft.com/office/drawing/2014/main" id="{F1D68AE3-B2B8-4B97-98E4-911ECBB33D8E}"/>
+                <a16:creationId xmlns:a16="http://schemas.microsoft.com/office/drawing/2014/main" id="{3294FE45-1C82-4570-9B12-D936A10D8EE8}"/>
               </a:ext>
             </a:extLst>
           </p:cNvPr>
@@ -3155,9 +3155,9 @@
                 <a:solidFill>
                   <a:srgbClr val="FFFFFF"/>
                 </a:solidFill>
-                <a:latin typeface="Helvetica Neue"/>
-                <a:ea typeface="Helvetica Neue"/>
-                <a:cs typeface="Helvetica Neue"/>
+                <a:latin typeface="Liberation Sans"/>
+                <a:ea typeface="Liberation Sans"/>
+                <a:cs typeface="Liberation Sans"/>
               </a:defRPr>
             </a:pPr>
             <a:r>
@@ -3165,9 +3165,9 @@
                 <a:solidFill>
                   <a:srgbClr val="FFFFFF"/>
                 </a:solidFill>
-                <a:latin typeface="Helvetica Neue"/>
-                <a:ea typeface="Helvetica Neue"/>
-                <a:cs typeface="Helvetica Neue"/>
+                <a:latin typeface="Liberation Sans"/>
+                <a:ea typeface="Liberation Sans"/>
+                <a:cs typeface="Liberation Sans"/>
               </a:rPr>
               <a:t>Запуск</a:t>
             </a:r>
@@ -3179,7 +3179,7 @@
           <p:cNvPr id="17" name="">
             <a:extLst xmlns:a="http://schemas.openxmlformats.org/drawingml/2006/main">
               <a:ext uri="{FF2B5EF4-FFF2-40B4-BE49-F238E27FC236}">
-                <a16:creationId xmlns:a16="http://schemas.microsoft.com/office/drawing/2014/main" id="{C4DFA219-45B0-429C-ADE3-C765C93E7037}"/>
+                <a16:creationId xmlns:a16="http://schemas.microsoft.com/office/drawing/2014/main" id="{0E0EA288-4AA0-4DB8-9C1E-E5DA281AA31A}"/>
               </a:ext>
             </a:extLst>
           </p:cNvPr>
@@ -3212,9 +3212,9 @@
                 <a:solidFill>
                   <a:srgbClr val="0B211A"/>
                 </a:solidFill>
-                <a:latin typeface="Helvetica Neue"/>
-                <a:ea typeface="Helvetica Neue"/>
-                <a:cs typeface="Helvetica Neue"/>
+                <a:latin typeface="Liberation Sans"/>
+                <a:ea typeface="Liberation Sans"/>
+                <a:cs typeface="Liberation Sans"/>
               </a:defRPr>
             </a:pPr>
             <a:r>
@@ -3222,9 +3222,9 @@
                 <a:solidFill>
                   <a:srgbClr val="0B211A"/>
                 </a:solidFill>
-                <a:latin typeface="Helvetica Neue"/>
-                <a:ea typeface="Helvetica Neue"/>
-                <a:cs typeface="Helvetica Neue"/>
+                <a:latin typeface="Liberation Sans"/>
+                <a:ea typeface="Liberation Sans"/>
+                <a:cs typeface="Liberation Sans"/>
               </a:rPr>
               <a:t>./scripts/demo.sh up</a:t>
             </a:r>
@@ -3236,7 +3236,7 @@
           <p:cNvPr id="18" name="">
             <a:extLst xmlns:a="http://schemas.openxmlformats.org/drawingml/2006/main">
               <a:ext uri="{FF2B5EF4-FFF2-40B4-BE49-F238E27FC236}">
-                <a16:creationId xmlns:a16="http://schemas.microsoft.com/office/drawing/2014/main" id="{4ED34645-760E-4CA3-875F-0581C30AE1BC}"/>
+                <a16:creationId xmlns:a16="http://schemas.microsoft.com/office/drawing/2014/main" id="{717B669F-4930-42A2-AB7C-A6E164C027C2}"/>
               </a:ext>
             </a:extLst>
           </p:cNvPr>
@@ -3269,9 +3269,9 @@
                 <a:solidFill>
                   <a:srgbClr val="FFFFFF"/>
                 </a:solidFill>
-                <a:latin typeface="Helvetica Neue"/>
-                <a:ea typeface="Helvetica Neue"/>
-                <a:cs typeface="Helvetica Neue"/>
+                <a:latin typeface="Liberation Sans"/>
+                <a:ea typeface="Liberation Sans"/>
+                <a:cs typeface="Liberation Sans"/>
               </a:defRPr>
             </a:pPr>
             <a:r>
@@ -3279,9 +3279,9 @@
                 <a:solidFill>
                   <a:srgbClr val="FFFFFF"/>
                 </a:solidFill>
-                <a:latin typeface="Helvetica Neue"/>
-                <a:ea typeface="Helvetica Neue"/>
-                <a:cs typeface="Helvetica Neue"/>
+                <a:latin typeface="Liberation Sans"/>
+                <a:ea typeface="Liberation Sans"/>
+                <a:cs typeface="Liberation Sans"/>
               </a:rPr>
               <a:t>http://127.0.0.1:8080</a:t>
             </a:r>
@@ -3293,7 +3293,7 @@
           <p:cNvPr id="19" name="">
             <a:extLst xmlns:a="http://schemas.openxmlformats.org/drawingml/2006/main">
               <a:ext uri="{FF2B5EF4-FFF2-40B4-BE49-F238E27FC236}">
-                <a16:creationId xmlns:a16="http://schemas.microsoft.com/office/drawing/2014/main" id="{27EE1B7A-28C6-4895-B65D-EEF8E92ECF75}"/>
+                <a16:creationId xmlns:a16="http://schemas.microsoft.com/office/drawing/2014/main" id="{6EECD1AF-C701-44C2-92FA-18210FADCA51}"/>
               </a:ext>
             </a:extLst>
           </p:cNvPr>
@@ -3326,9 +3326,9 @@
                 <a:solidFill>
                   <a:srgbClr val="9DE8CA"/>
                 </a:solidFill>
-                <a:latin typeface="Helvetica Neue"/>
-                <a:ea typeface="Helvetica Neue"/>
-                <a:cs typeface="Helvetica Neue"/>
+                <a:latin typeface="Liberation Sans"/>
+                <a:ea typeface="Liberation Sans"/>
+                <a:cs typeface="Liberation Sans"/>
               </a:defRPr>
             </a:pPr>
             <a:r>
@@ -3336,9 +3336,9 @@
                 <a:solidFill>
                   <a:srgbClr val="9DE8CA"/>
                 </a:solidFill>
-                <a:latin typeface="Helvetica Neue"/>
-                <a:ea typeface="Helvetica Neue"/>
-                <a:cs typeface="Helvetica Neue"/>
+                <a:latin typeface="Liberation Sans"/>
+                <a:ea typeface="Liberation Sans"/>
+                <a:cs typeface="Liberation Sans"/>
               </a:rPr>
               <a:t>Рекомендации не исполняются автоматически.</a:t>
             </a:r>
@@ -3348,7 +3348,7 @@
     </p:spTree>
     <p:extLst>
       <p:ext uri="{BB962C8B-B14F-4D97-AF65-F5344CB8AC3E}">
-        <p14:creationId xmlns:p14="http://schemas.microsoft.com/office/powerpoint/2010/main" val="1929914125"/>
+        <p14:creationId xmlns:p14="http://schemas.microsoft.com/office/powerpoint/2010/main" val="498599974"/>
       </p:ext>
     </p:extLst>
   </p:cSld>
@@ -3379,7 +3379,7 @@
           <p:cNvPr id="38" name="">
             <a:extLst xmlns:a="http://schemas.openxmlformats.org/drawingml/2006/main">
               <a:ext uri="{FF2B5EF4-FFF2-40B4-BE49-F238E27FC236}">
-                <a16:creationId xmlns:a16="http://schemas.microsoft.com/office/drawing/2014/main" id="{7833204F-F919-4A51-97FC-27598CEB9105}"/>
+                <a16:creationId xmlns:a16="http://schemas.microsoft.com/office/drawing/2014/main" id="{12EC827A-ACA2-42C1-B106-1F4E3B7EF0EB}"/>
               </a:ext>
             </a:extLst>
           </p:cNvPr>
@@ -3412,9 +3412,9 @@
                 <a:solidFill>
                   <a:srgbClr val="08775A"/>
                 </a:solidFill>
-                <a:latin typeface="Helvetica Neue"/>
-                <a:ea typeface="Helvetica Neue"/>
-                <a:cs typeface="Helvetica Neue"/>
+                <a:latin typeface="Liberation Sans"/>
+                <a:ea typeface="Liberation Sans"/>
+                <a:cs typeface="Liberation Sans"/>
               </a:defRPr>
             </a:pPr>
             <a:r>
@@ -3422,9 +3422,9 @@
                 <a:solidFill>
                   <a:srgbClr val="08775A"/>
                 </a:solidFill>
-                <a:latin typeface="Helvetica Neue"/>
-                <a:ea typeface="Helvetica Neue"/>
-                <a:cs typeface="Helvetica Neue"/>
+                <a:latin typeface="Liberation Sans"/>
+                <a:ea typeface="Liberation Sans"/>
+                <a:cs typeface="Liberation Sans"/>
               </a:rPr>
               <a:t>РАБОЧИЙ ПРОЦЕСС</a:t>
             </a:r>
@@ -3436,7 +3436,7 @@
           <p:cNvPr id="2" name="">
             <a:extLst xmlns:a="http://schemas.openxmlformats.org/drawingml/2006/main">
               <a:ext uri="{FF2B5EF4-FFF2-40B4-BE49-F238E27FC236}">
-                <a16:creationId xmlns:a16="http://schemas.microsoft.com/office/drawing/2014/main" id="{8F478250-7DB4-423B-A228-9FF855B7B46A}"/>
+                <a16:creationId xmlns:a16="http://schemas.microsoft.com/office/drawing/2014/main" id="{FAB58377-0DDB-46DC-BDD7-23E8258ED5FC}"/>
               </a:ext>
             </a:extLst>
           </p:cNvPr>
@@ -3469,9 +3469,9 @@
                 <a:solidFill>
                   <a:srgbClr val="0B211A"/>
                 </a:solidFill>
-                <a:latin typeface="Helvetica Neue"/>
-                <a:ea typeface="Helvetica Neue"/>
-                <a:cs typeface="Helvetica Neue"/>
+                <a:latin typeface="Liberation Sans"/>
+                <a:ea typeface="Liberation Sans"/>
+                <a:cs typeface="Liberation Sans"/>
               </a:defRPr>
             </a:pPr>
             <a:r>
@@ -3479,9 +3479,9 @@
                 <a:solidFill>
                   <a:srgbClr val="0B211A"/>
                 </a:solidFill>
-                <a:latin typeface="Helvetica Neue"/>
-                <a:ea typeface="Helvetica Neue"/>
-                <a:cs typeface="Helvetica Neue"/>
+                <a:latin typeface="Liberation Sans"/>
+                <a:ea typeface="Liberation Sans"/>
+                <a:cs typeface="Liberation Sans"/>
               </a:rPr>
               <a:t>Оператор получает решение, а не ещё один график</a:t>
             </a:r>
@@ -3493,7 +3493,7 @@
           <p:cNvPr id="3" name="">
             <a:extLst xmlns:a="http://schemas.openxmlformats.org/drawingml/2006/main">
               <a:ext uri="{FF2B5EF4-FFF2-40B4-BE49-F238E27FC236}">
-                <a16:creationId xmlns:a16="http://schemas.microsoft.com/office/drawing/2014/main" id="{EC7ED204-FD10-4DFF-AB58-83913717B317}"/>
+                <a16:creationId xmlns:a16="http://schemas.microsoft.com/office/drawing/2014/main" id="{FF0D81FD-FCE0-4A84-A5BE-985508ABB9B1}"/>
               </a:ext>
             </a:extLst>
           </p:cNvPr>
@@ -3526,9 +3526,9 @@
                 <a:solidFill>
                   <a:srgbClr val="667A72"/>
                 </a:solidFill>
-                <a:latin typeface="Helvetica Neue"/>
-                <a:ea typeface="Helvetica Neue"/>
-                <a:cs typeface="Helvetica Neue"/>
+                <a:latin typeface="Liberation Sans"/>
+                <a:ea typeface="Liberation Sans"/>
+                <a:cs typeface="Liberation Sans"/>
               </a:defRPr>
             </a:pPr>
             <a:r>
@@ -3536,9 +3536,9 @@
                 <a:solidFill>
                   <a:srgbClr val="667A72"/>
                 </a:solidFill>
-                <a:latin typeface="Helvetica Neue"/>
-                <a:ea typeface="Helvetica Neue"/>
-                <a:cs typeface="Helvetica Neue"/>
+                <a:latin typeface="Liberation Sans"/>
+                <a:ea typeface="Liberation Sans"/>
+                <a:cs typeface="Liberation Sans"/>
               </a:rPr>
               <a:t>02</a:t>
             </a:r>
@@ -3550,7 +3550,7 @@
           <p:cNvPr id="4" name="">
             <a:extLst xmlns:a="http://schemas.openxmlformats.org/drawingml/2006/main">
               <a:ext uri="{FF2B5EF4-FFF2-40B4-BE49-F238E27FC236}">
-                <a16:creationId xmlns:a16="http://schemas.microsoft.com/office/drawing/2014/main" id="{DEAFF0AD-FACB-4BF2-B0D9-072B4998FC26}"/>
+                <a16:creationId xmlns:a16="http://schemas.microsoft.com/office/drawing/2014/main" id="{0A53D96F-81E4-4E7C-BD06-26659EE979F0}"/>
               </a:ext>
             </a:extLst>
           </p:cNvPr>
@@ -3582,7 +3582,7 @@
           <p:cNvPr id="5" name="">
             <a:extLst xmlns:a="http://schemas.openxmlformats.org/drawingml/2006/main">
               <a:ext uri="{FF2B5EF4-FFF2-40B4-BE49-F238E27FC236}">
-                <a16:creationId xmlns:a16="http://schemas.microsoft.com/office/drawing/2014/main" id="{1913AA63-3E3D-40E5-9C5F-4BBC1C046218}"/>
+                <a16:creationId xmlns:a16="http://schemas.microsoft.com/office/drawing/2014/main" id="{218896EA-F207-4412-B109-977FE0D1956F}"/>
               </a:ext>
             </a:extLst>
           </p:cNvPr>
@@ -3614,7 +3614,7 @@
           <p:cNvPr id="6" name="">
             <a:extLst xmlns:a="http://schemas.openxmlformats.org/drawingml/2006/main">
               <a:ext uri="{FF2B5EF4-FFF2-40B4-BE49-F238E27FC236}">
-                <a16:creationId xmlns:a16="http://schemas.microsoft.com/office/drawing/2014/main" id="{4D610E1D-D4A6-4FDB-BCA8-FF3A0D590ADF}"/>
+                <a16:creationId xmlns:a16="http://schemas.microsoft.com/office/drawing/2014/main" id="{7A5C9DC7-5655-4C8F-89CB-FFFC40229CE2}"/>
               </a:ext>
             </a:extLst>
           </p:cNvPr>
@@ -3647,9 +3647,9 @@
                 <a:solidFill>
                   <a:srgbClr val="0B211A"/>
                 </a:solidFill>
-                <a:latin typeface="Helvetica Neue"/>
-                <a:ea typeface="Helvetica Neue"/>
-                <a:cs typeface="Helvetica Neue"/>
+                <a:latin typeface="Liberation Sans"/>
+                <a:ea typeface="Liberation Sans"/>
+                <a:cs typeface="Liberation Sans"/>
               </a:defRPr>
             </a:pPr>
             <a:r>
@@ -3657,9 +3657,9 @@
                 <a:solidFill>
                   <a:srgbClr val="0B211A"/>
                 </a:solidFill>
-                <a:latin typeface="Helvetica Neue"/>
-                <a:ea typeface="Helvetica Neue"/>
-                <a:cs typeface="Helvetica Neue"/>
+                <a:latin typeface="Liberation Sans"/>
+                <a:ea typeface="Liberation Sans"/>
+                <a:cs typeface="Liberation Sans"/>
               </a:rPr>
               <a:t>01</a:t>
             </a:r>
@@ -3671,7 +3671,7 @@
           <p:cNvPr id="7" name="">
             <a:extLst xmlns:a="http://schemas.openxmlformats.org/drawingml/2006/main">
               <a:ext uri="{FF2B5EF4-FFF2-40B4-BE49-F238E27FC236}">
-                <a16:creationId xmlns:a16="http://schemas.microsoft.com/office/drawing/2014/main" id="{061452DC-A2AB-4782-9545-643C911FDE10}"/>
+                <a16:creationId xmlns:a16="http://schemas.microsoft.com/office/drawing/2014/main" id="{F5201C32-C388-4355-B620-189B02C1BE0B}"/>
               </a:ext>
             </a:extLst>
           </p:cNvPr>
@@ -3704,9 +3704,9 @@
                 <a:solidFill>
                   <a:srgbClr val="0B211A"/>
                 </a:solidFill>
-                <a:latin typeface="Helvetica Neue"/>
-                <a:ea typeface="Helvetica Neue"/>
-                <a:cs typeface="Helvetica Neue"/>
+                <a:latin typeface="Liberation Sans"/>
+                <a:ea typeface="Liberation Sans"/>
+                <a:cs typeface="Liberation Sans"/>
               </a:defRPr>
             </a:pPr>
             <a:r>
@@ -3714,9 +3714,9 @@
                 <a:solidFill>
                   <a:srgbClr val="0B211A"/>
                 </a:solidFill>
-                <a:latin typeface="Helvetica Neue"/>
-                <a:ea typeface="Helvetica Neue"/>
-                <a:cs typeface="Helvetica Neue"/>
+                <a:latin typeface="Liberation Sans"/>
+                <a:ea typeface="Liberation Sans"/>
+                <a:cs typeface="Liberation Sans"/>
               </a:rPr>
               <a:t>Выбрать</a:t>
             </a:r>
@@ -3728,7 +3728,7 @@
           <p:cNvPr id="8" name="">
             <a:extLst xmlns:a="http://schemas.openxmlformats.org/drawingml/2006/main">
               <a:ext uri="{FF2B5EF4-FFF2-40B4-BE49-F238E27FC236}">
-                <a16:creationId xmlns:a16="http://schemas.microsoft.com/office/drawing/2014/main" id="{27D20B23-D716-40B9-B9B2-E9969A9C0E52}"/>
+                <a16:creationId xmlns:a16="http://schemas.microsoft.com/office/drawing/2014/main" id="{817E13DD-78D6-4F81-86D8-D2358AC43FF5}"/>
               </a:ext>
             </a:extLst>
           </p:cNvPr>
@@ -3761,9 +3761,9 @@
                 <a:solidFill>
                   <a:srgbClr val="667A72"/>
                 </a:solidFill>
-                <a:latin typeface="Helvetica Neue"/>
-                <a:ea typeface="Helvetica Neue"/>
-                <a:cs typeface="Helvetica Neue"/>
+                <a:latin typeface="Liberation Sans"/>
+                <a:ea typeface="Liberation Sans"/>
+                <a:cs typeface="Liberation Sans"/>
               </a:defRPr>
             </a:pPr>
             <a:r>
@@ -3771,9 +3771,9 @@
                 <a:solidFill>
                   <a:srgbClr val="667A72"/>
                 </a:solidFill>
-                <a:latin typeface="Helvetica Neue"/>
-                <a:ea typeface="Helvetica Neue"/>
-                <a:cs typeface="Helvetica Neue"/>
+                <a:latin typeface="Liberation Sans"/>
+                <a:ea typeface="Liberation Sans"/>
+                <a:cs typeface="Liberation Sans"/>
               </a:rPr>
               <a:t>готовый preset или свой ввод</a:t>
             </a:r>
@@ -3785,7 +3785,7 @@
           <p:cNvPr id="9" name="">
             <a:extLst xmlns:a="http://schemas.openxmlformats.org/drawingml/2006/main">
               <a:ext uri="{FF2B5EF4-FFF2-40B4-BE49-F238E27FC236}">
-                <a16:creationId xmlns:a16="http://schemas.microsoft.com/office/drawing/2014/main" id="{CB3177C8-51DB-44EB-8306-B5B676724AA1}"/>
+                <a16:creationId xmlns:a16="http://schemas.microsoft.com/office/drawing/2014/main" id="{A21385D4-8F4D-442B-8649-3BDC606DC968}"/>
               </a:ext>
             </a:extLst>
           </p:cNvPr>
@@ -3818,9 +3818,9 @@
                 <a:solidFill>
                   <a:srgbClr val="08775A"/>
                 </a:solidFill>
-                <a:latin typeface="Helvetica Neue"/>
-                <a:ea typeface="Helvetica Neue"/>
-                <a:cs typeface="Helvetica Neue"/>
+                <a:latin typeface="Liberation Sans"/>
+                <a:ea typeface="Liberation Sans"/>
+                <a:cs typeface="Liberation Sans"/>
               </a:defRPr>
             </a:pPr>
             <a:r>
@@ -3828,9 +3828,9 @@
                 <a:solidFill>
                   <a:srgbClr val="08775A"/>
                 </a:solidFill>
-                <a:latin typeface="Helvetica Neue"/>
-                <a:ea typeface="Helvetica Neue"/>
-                <a:cs typeface="Helvetica Neue"/>
+                <a:latin typeface="Liberation Sans"/>
+                <a:ea typeface="Liberation Sans"/>
+                <a:cs typeface="Liberation Sans"/>
               </a:rPr>
               <a:t>→</a:t>
             </a:r>
@@ -3842,7 +3842,7 @@
           <p:cNvPr id="10" name="">
             <a:extLst xmlns:a="http://schemas.openxmlformats.org/drawingml/2006/main">
               <a:ext uri="{FF2B5EF4-FFF2-40B4-BE49-F238E27FC236}">
-                <a16:creationId xmlns:a16="http://schemas.microsoft.com/office/drawing/2014/main" id="{D9DA2452-4216-490F-9233-473EE1E8382B}"/>
+                <a16:creationId xmlns:a16="http://schemas.microsoft.com/office/drawing/2014/main" id="{EFC46D75-6854-4272-8609-5B6C673F6E49}"/>
               </a:ext>
             </a:extLst>
           </p:cNvPr>
@@ -3874,7 +3874,7 @@
           <p:cNvPr id="11" name="">
             <a:extLst xmlns:a="http://schemas.openxmlformats.org/drawingml/2006/main">
               <a:ext uri="{FF2B5EF4-FFF2-40B4-BE49-F238E27FC236}">
-                <a16:creationId xmlns:a16="http://schemas.microsoft.com/office/drawing/2014/main" id="{4565E104-22F9-4829-93D8-4482274E4463}"/>
+                <a16:creationId xmlns:a16="http://schemas.microsoft.com/office/drawing/2014/main" id="{A911F6ED-AA71-4FFA-8D91-66172344B88F}"/>
               </a:ext>
             </a:extLst>
           </p:cNvPr>
@@ -3906,7 +3906,7 @@
           <p:cNvPr id="12" name="">
             <a:extLst xmlns:a="http://schemas.openxmlformats.org/drawingml/2006/main">
               <a:ext uri="{FF2B5EF4-FFF2-40B4-BE49-F238E27FC236}">
-                <a16:creationId xmlns:a16="http://schemas.microsoft.com/office/drawing/2014/main" id="{2B2CDCBA-04DE-46A0-9EDD-A0E2430A96F5}"/>
+                <a16:creationId xmlns:a16="http://schemas.microsoft.com/office/drawing/2014/main" id="{D2F7694E-B2B4-4FDF-83FC-B087D19D5FA1}"/>
               </a:ext>
             </a:extLst>
           </p:cNvPr>
@@ -3939,9 +3939,9 @@
                 <a:solidFill>
                   <a:srgbClr val="0B211A"/>
                 </a:solidFill>
-                <a:latin typeface="Helvetica Neue"/>
-                <a:ea typeface="Helvetica Neue"/>
-                <a:cs typeface="Helvetica Neue"/>
+                <a:latin typeface="Liberation Sans"/>
+                <a:ea typeface="Liberation Sans"/>
+                <a:cs typeface="Liberation Sans"/>
               </a:defRPr>
             </a:pPr>
             <a:r>
@@ -3949,9 +3949,9 @@
                 <a:solidFill>
                   <a:srgbClr val="0B211A"/>
                 </a:solidFill>
-                <a:latin typeface="Helvetica Neue"/>
-                <a:ea typeface="Helvetica Neue"/>
-                <a:cs typeface="Helvetica Neue"/>
+                <a:latin typeface="Liberation Sans"/>
+                <a:ea typeface="Liberation Sans"/>
+                <a:cs typeface="Liberation Sans"/>
               </a:rPr>
               <a:t>02</a:t>
             </a:r>
@@ -3963,7 +3963,7 @@
           <p:cNvPr id="13" name="">
             <a:extLst xmlns:a="http://schemas.openxmlformats.org/drawingml/2006/main">
               <a:ext uri="{FF2B5EF4-FFF2-40B4-BE49-F238E27FC236}">
-                <a16:creationId xmlns:a16="http://schemas.microsoft.com/office/drawing/2014/main" id="{2A8F1D78-09B2-477F-838E-B28A102CA34A}"/>
+                <a16:creationId xmlns:a16="http://schemas.microsoft.com/office/drawing/2014/main" id="{423D8538-0948-4D0E-ADC8-D801CE502A75}"/>
               </a:ext>
             </a:extLst>
           </p:cNvPr>
@@ -3996,9 +3996,9 @@
                 <a:solidFill>
                   <a:srgbClr val="0B211A"/>
                 </a:solidFill>
-                <a:latin typeface="Helvetica Neue"/>
-                <a:ea typeface="Helvetica Neue"/>
-                <a:cs typeface="Helvetica Neue"/>
+                <a:latin typeface="Liberation Sans"/>
+                <a:ea typeface="Liberation Sans"/>
+                <a:cs typeface="Liberation Sans"/>
               </a:defRPr>
             </a:pPr>
             <a:r>
@@ -4006,9 +4006,9 @@
                 <a:solidFill>
                   <a:srgbClr val="0B211A"/>
                 </a:solidFill>
-                <a:latin typeface="Helvetica Neue"/>
-                <a:ea typeface="Helvetica Neue"/>
-                <a:cs typeface="Helvetica Neue"/>
+                <a:latin typeface="Liberation Sans"/>
+                <a:ea typeface="Liberation Sans"/>
+                <a:cs typeface="Liberation Sans"/>
               </a:rPr>
               <a:t>Изменить</a:t>
             </a:r>
@@ -4020,7 +4020,7 @@
           <p:cNvPr id="14" name="">
             <a:extLst xmlns:a="http://schemas.openxmlformats.org/drawingml/2006/main">
               <a:ext uri="{FF2B5EF4-FFF2-40B4-BE49-F238E27FC236}">
-                <a16:creationId xmlns:a16="http://schemas.microsoft.com/office/drawing/2014/main" id="{18FE0FA2-62E5-4C7E-BD80-6E8C67B0E022}"/>
+                <a16:creationId xmlns:a16="http://schemas.microsoft.com/office/drawing/2014/main" id="{181AD4B4-BCF9-4E55-B257-0DE4803D6D64}"/>
               </a:ext>
             </a:extLst>
           </p:cNvPr>
@@ -4053,9 +4053,9 @@
                 <a:solidFill>
                   <a:srgbClr val="667A72"/>
                 </a:solidFill>
-                <a:latin typeface="Helvetica Neue"/>
-                <a:ea typeface="Helvetica Neue"/>
-                <a:cs typeface="Helvetica Neue"/>
+                <a:latin typeface="Liberation Sans"/>
+                <a:ea typeface="Liberation Sans"/>
+                <a:cs typeface="Liberation Sans"/>
               </a:defRPr>
             </a:pPr>
             <a:r>
@@ -4063,9 +4063,9 @@
                 <a:solidFill>
                   <a:srgbClr val="667A72"/>
                 </a:solidFill>
-                <a:latin typeface="Helvetica Neue"/>
-                <a:ea typeface="Helvetica Neue"/>
-                <a:cs typeface="Helvetica Neue"/>
+                <a:latin typeface="Liberation Sans"/>
+                <a:ea typeface="Liberation Sans"/>
+                <a:cs typeface="Liberation Sans"/>
               </a:rPr>
               <a:t>сырьё, P8/T11/F19, spec</a:t>
             </a:r>
@@ -4077,7 +4077,7 @@
           <p:cNvPr id="15" name="">
             <a:extLst xmlns:a="http://schemas.openxmlformats.org/drawingml/2006/main">
               <a:ext uri="{FF2B5EF4-FFF2-40B4-BE49-F238E27FC236}">
-                <a16:creationId xmlns:a16="http://schemas.microsoft.com/office/drawing/2014/main" id="{229F5273-A022-4424-8493-4EA91984B539}"/>
+                <a16:creationId xmlns:a16="http://schemas.microsoft.com/office/drawing/2014/main" id="{51241F0F-F428-47C8-95B2-A460993BD362}"/>
               </a:ext>
             </a:extLst>
           </p:cNvPr>
@@ -4110,9 +4110,9 @@
                 <a:solidFill>
                   <a:srgbClr val="08775A"/>
                 </a:solidFill>
-                <a:latin typeface="Helvetica Neue"/>
-                <a:ea typeface="Helvetica Neue"/>
-                <a:cs typeface="Helvetica Neue"/>
+                <a:latin typeface="Liberation Sans"/>
+                <a:ea typeface="Liberation Sans"/>
+                <a:cs typeface="Liberation Sans"/>
               </a:defRPr>
             </a:pPr>
             <a:r>
@@ -4120,9 +4120,9 @@
                 <a:solidFill>
                   <a:srgbClr val="08775A"/>
                 </a:solidFill>
-                <a:latin typeface="Helvetica Neue"/>
-                <a:ea typeface="Helvetica Neue"/>
-                <a:cs typeface="Helvetica Neue"/>
+                <a:latin typeface="Liberation Sans"/>
+                <a:ea typeface="Liberation Sans"/>
+                <a:cs typeface="Liberation Sans"/>
               </a:rPr>
               <a:t>→</a:t>
             </a:r>
@@ -4134,7 +4134,7 @@
           <p:cNvPr id="16" name="">
             <a:extLst xmlns:a="http://schemas.openxmlformats.org/drawingml/2006/main">
               <a:ext uri="{FF2B5EF4-FFF2-40B4-BE49-F238E27FC236}">
-                <a16:creationId xmlns:a16="http://schemas.microsoft.com/office/drawing/2014/main" id="{1A8A4ACD-36A3-499D-B11F-29EFCAF670D9}"/>
+                <a16:creationId xmlns:a16="http://schemas.microsoft.com/office/drawing/2014/main" id="{D8B3D9E0-CF86-4B87-8A81-80ED83EB59EC}"/>
               </a:ext>
             </a:extLst>
           </p:cNvPr>
@@ -4166,7 +4166,7 @@
           <p:cNvPr id="17" name="">
             <a:extLst xmlns:a="http://schemas.openxmlformats.org/drawingml/2006/main">
               <a:ext uri="{FF2B5EF4-FFF2-40B4-BE49-F238E27FC236}">
-                <a16:creationId xmlns:a16="http://schemas.microsoft.com/office/drawing/2014/main" id="{41473384-EA08-4967-B5BA-30BECE75D0DD}"/>
+                <a16:creationId xmlns:a16="http://schemas.microsoft.com/office/drawing/2014/main" id="{547EFCFD-0A10-4E3D-B864-40F0DFE3732B}"/>
               </a:ext>
             </a:extLst>
           </p:cNvPr>
@@ -4198,7 +4198,7 @@
           <p:cNvPr id="18" name="">
             <a:extLst xmlns:a="http://schemas.openxmlformats.org/drawingml/2006/main">
               <a:ext uri="{FF2B5EF4-FFF2-40B4-BE49-F238E27FC236}">
-                <a16:creationId xmlns:a16="http://schemas.microsoft.com/office/drawing/2014/main" id="{DAA2C8E7-49B0-430C-B143-FEDAB24EC9B5}"/>
+                <a16:creationId xmlns:a16="http://schemas.microsoft.com/office/drawing/2014/main" id="{241EBD1F-109A-4128-BC52-BA7BC68B1B70}"/>
               </a:ext>
             </a:extLst>
           </p:cNvPr>
@@ -4231,9 +4231,9 @@
                 <a:solidFill>
                   <a:srgbClr val="0B211A"/>
                 </a:solidFill>
-                <a:latin typeface="Helvetica Neue"/>
-                <a:ea typeface="Helvetica Neue"/>
-                <a:cs typeface="Helvetica Neue"/>
+                <a:latin typeface="Liberation Sans"/>
+                <a:ea typeface="Liberation Sans"/>
+                <a:cs typeface="Liberation Sans"/>
               </a:defRPr>
             </a:pPr>
             <a:r>
@@ -4241,9 +4241,9 @@
                 <a:solidFill>
                   <a:srgbClr val="0B211A"/>
                 </a:solidFill>
-                <a:latin typeface="Helvetica Neue"/>
-                <a:ea typeface="Helvetica Neue"/>
-                <a:cs typeface="Helvetica Neue"/>
+                <a:latin typeface="Liberation Sans"/>
+                <a:ea typeface="Liberation Sans"/>
+                <a:cs typeface="Liberation Sans"/>
               </a:rPr>
               <a:t>03</a:t>
             </a:r>
@@ -4255,7 +4255,7 @@
           <p:cNvPr id="19" name="">
             <a:extLst xmlns:a="http://schemas.openxmlformats.org/drawingml/2006/main">
               <a:ext uri="{FF2B5EF4-FFF2-40B4-BE49-F238E27FC236}">
-                <a16:creationId xmlns:a16="http://schemas.microsoft.com/office/drawing/2014/main" id="{389AE171-B2D9-442A-83CD-7A8F49C194F3}"/>
+                <a16:creationId xmlns:a16="http://schemas.microsoft.com/office/drawing/2014/main" id="{BDA02253-C969-495A-8B74-60E5D1897225}"/>
               </a:ext>
             </a:extLst>
           </p:cNvPr>
@@ -4288,9 +4288,9 @@
                 <a:solidFill>
                   <a:srgbClr val="0B211A"/>
                 </a:solidFill>
-                <a:latin typeface="Helvetica Neue"/>
-                <a:ea typeface="Helvetica Neue"/>
-                <a:cs typeface="Helvetica Neue"/>
+                <a:latin typeface="Liberation Sans"/>
+                <a:ea typeface="Liberation Sans"/>
+                <a:cs typeface="Liberation Sans"/>
               </a:defRPr>
             </a:pPr>
             <a:r>
@@ -4298,9 +4298,9 @@
                 <a:solidFill>
                   <a:srgbClr val="0B211A"/>
                 </a:solidFill>
-                <a:latin typeface="Helvetica Neue"/>
-                <a:ea typeface="Helvetica Neue"/>
-                <a:cs typeface="Helvetica Neue"/>
+                <a:latin typeface="Liberation Sans"/>
+                <a:ea typeface="Liberation Sans"/>
+                <a:cs typeface="Liberation Sans"/>
               </a:rPr>
               <a:t>Сравнить</a:t>
             </a:r>
@@ -4312,7 +4312,7 @@
           <p:cNvPr id="20" name="">
             <a:extLst xmlns:a="http://schemas.openxmlformats.org/drawingml/2006/main">
               <a:ext uri="{FF2B5EF4-FFF2-40B4-BE49-F238E27FC236}">
-                <a16:creationId xmlns:a16="http://schemas.microsoft.com/office/drawing/2014/main" id="{3360495A-1A03-4531-931D-84AA57EEA04B}"/>
+                <a16:creationId xmlns:a16="http://schemas.microsoft.com/office/drawing/2014/main" id="{7726FB2E-6A18-4455-BD08-1D08A031D582}"/>
               </a:ext>
             </a:extLst>
           </p:cNvPr>
@@ -4345,9 +4345,9 @@
                 <a:solidFill>
                   <a:srgbClr val="667A72"/>
                 </a:solidFill>
-                <a:latin typeface="Helvetica Neue"/>
-                <a:ea typeface="Helvetica Neue"/>
-                <a:cs typeface="Helvetica Neue"/>
+                <a:latin typeface="Liberation Sans"/>
+                <a:ea typeface="Liberation Sans"/>
+                <a:cs typeface="Liberation Sans"/>
               </a:defRPr>
             </a:pPr>
             <a:r>
@@ -4355,9 +4355,9 @@
                 <a:solidFill>
                   <a:srgbClr val="667A72"/>
                 </a:solidFill>
-                <a:latin typeface="Helvetica Neue"/>
-                <a:ea typeface="Helvetica Neue"/>
-                <a:cs typeface="Helvetica Neue"/>
+                <a:latin typeface="Liberation Sans"/>
+                <a:ea typeface="Liberation Sans"/>
+                <a:cs typeface="Liberation Sans"/>
               </a:rPr>
               <a:t>baseline, system, operator</a:t>
             </a:r>
@@ -4369,7 +4369,7 @@
           <p:cNvPr id="21" name="">
             <a:extLst xmlns:a="http://schemas.openxmlformats.org/drawingml/2006/main">
               <a:ext uri="{FF2B5EF4-FFF2-40B4-BE49-F238E27FC236}">
-                <a16:creationId xmlns:a16="http://schemas.microsoft.com/office/drawing/2014/main" id="{45B6BB86-FE55-4971-887C-F968BB708565}"/>
+                <a16:creationId xmlns:a16="http://schemas.microsoft.com/office/drawing/2014/main" id="{FA8FB829-F1FA-4550-A0FA-F7097D962B5B}"/>
               </a:ext>
             </a:extLst>
           </p:cNvPr>
@@ -4402,9 +4402,9 @@
                 <a:solidFill>
                   <a:srgbClr val="08775A"/>
                 </a:solidFill>
-                <a:latin typeface="Helvetica Neue"/>
-                <a:ea typeface="Helvetica Neue"/>
-                <a:cs typeface="Helvetica Neue"/>
+                <a:latin typeface="Liberation Sans"/>
+                <a:ea typeface="Liberation Sans"/>
+                <a:cs typeface="Liberation Sans"/>
               </a:defRPr>
             </a:pPr>
             <a:r>
@@ -4412,9 +4412,9 @@
                 <a:solidFill>
                   <a:srgbClr val="08775A"/>
                 </a:solidFill>
-                <a:latin typeface="Helvetica Neue"/>
-                <a:ea typeface="Helvetica Neue"/>
-                <a:cs typeface="Helvetica Neue"/>
+                <a:latin typeface="Liberation Sans"/>
+                <a:ea typeface="Liberation Sans"/>
+                <a:cs typeface="Liberation Sans"/>
               </a:rPr>
               <a:t>→</a:t>
             </a:r>
@@ -4426,7 +4426,7 @@
           <p:cNvPr id="22" name="">
             <a:extLst xmlns:a="http://schemas.openxmlformats.org/drawingml/2006/main">
               <a:ext uri="{FF2B5EF4-FFF2-40B4-BE49-F238E27FC236}">
-                <a16:creationId xmlns:a16="http://schemas.microsoft.com/office/drawing/2014/main" id="{44474495-ECA3-4543-8E87-9759D6045E75}"/>
+                <a16:creationId xmlns:a16="http://schemas.microsoft.com/office/drawing/2014/main" id="{42FB80C8-4F03-4669-8BE9-6F7E938827DE}"/>
               </a:ext>
             </a:extLst>
           </p:cNvPr>
@@ -4458,7 +4458,7 @@
           <p:cNvPr id="23" name="">
             <a:extLst xmlns:a="http://schemas.openxmlformats.org/drawingml/2006/main">
               <a:ext uri="{FF2B5EF4-FFF2-40B4-BE49-F238E27FC236}">
-                <a16:creationId xmlns:a16="http://schemas.microsoft.com/office/drawing/2014/main" id="{83E1A4EA-F389-4913-83E3-17BFB62F2D86}"/>
+                <a16:creationId xmlns:a16="http://schemas.microsoft.com/office/drawing/2014/main" id="{0103795F-AB43-4B37-BF69-15A1E2254A14}"/>
               </a:ext>
             </a:extLst>
           </p:cNvPr>
@@ -4490,7 +4490,7 @@
           <p:cNvPr id="24" name="">
             <a:extLst xmlns:a="http://schemas.openxmlformats.org/drawingml/2006/main">
               <a:ext uri="{FF2B5EF4-FFF2-40B4-BE49-F238E27FC236}">
-                <a16:creationId xmlns:a16="http://schemas.microsoft.com/office/drawing/2014/main" id="{5EAC3A51-36F4-417F-88C3-BB37A76B97E2}"/>
+                <a16:creationId xmlns:a16="http://schemas.microsoft.com/office/drawing/2014/main" id="{D0C9BE9E-2D57-40F0-B5F8-B085A6D3F078}"/>
               </a:ext>
             </a:extLst>
           </p:cNvPr>
@@ -4523,9 +4523,9 @@
                 <a:solidFill>
                   <a:srgbClr val="0B211A"/>
                 </a:solidFill>
-                <a:latin typeface="Helvetica Neue"/>
-                <a:ea typeface="Helvetica Neue"/>
-                <a:cs typeface="Helvetica Neue"/>
+                <a:latin typeface="Liberation Sans"/>
+                <a:ea typeface="Liberation Sans"/>
+                <a:cs typeface="Liberation Sans"/>
               </a:defRPr>
             </a:pPr>
             <a:r>
@@ -4533,9 +4533,9 @@
                 <a:solidFill>
                   <a:srgbClr val="0B211A"/>
                 </a:solidFill>
-                <a:latin typeface="Helvetica Neue"/>
-                <a:ea typeface="Helvetica Neue"/>
-                <a:cs typeface="Helvetica Neue"/>
+                <a:latin typeface="Liberation Sans"/>
+                <a:ea typeface="Liberation Sans"/>
+                <a:cs typeface="Liberation Sans"/>
               </a:rPr>
               <a:t>04</a:t>
             </a:r>
@@ -4547,7 +4547,7 @@
           <p:cNvPr id="25" name="">
             <a:extLst xmlns:a="http://schemas.openxmlformats.org/drawingml/2006/main">
               <a:ext uri="{FF2B5EF4-FFF2-40B4-BE49-F238E27FC236}">
-                <a16:creationId xmlns:a16="http://schemas.microsoft.com/office/drawing/2014/main" id="{D64C80F1-B5BC-4072-925C-0480DCF13B6A}"/>
+                <a16:creationId xmlns:a16="http://schemas.microsoft.com/office/drawing/2014/main" id="{D6DC6AED-4959-4B00-BAD4-668D01706920}"/>
               </a:ext>
             </a:extLst>
           </p:cNvPr>
@@ -4580,9 +4580,9 @@
                 <a:solidFill>
                   <a:srgbClr val="0B211A"/>
                 </a:solidFill>
-                <a:latin typeface="Helvetica Neue"/>
-                <a:ea typeface="Helvetica Neue"/>
-                <a:cs typeface="Helvetica Neue"/>
+                <a:latin typeface="Liberation Sans"/>
+                <a:ea typeface="Liberation Sans"/>
+                <a:cs typeface="Liberation Sans"/>
               </a:defRPr>
             </a:pPr>
             <a:r>
@@ -4590,9 +4590,9 @@
                 <a:solidFill>
                   <a:srgbClr val="0B211A"/>
                 </a:solidFill>
-                <a:latin typeface="Helvetica Neue"/>
-                <a:ea typeface="Helvetica Neue"/>
-                <a:cs typeface="Helvetica Neue"/>
+                <a:latin typeface="Liberation Sans"/>
+                <a:ea typeface="Liberation Sans"/>
+                <a:cs typeface="Liberation Sans"/>
               </a:rPr>
               <a:t>Проверить</a:t>
             </a:r>
@@ -4604,7 +4604,7 @@
           <p:cNvPr id="26" name="">
             <a:extLst xmlns:a="http://schemas.openxmlformats.org/drawingml/2006/main">
               <a:ext uri="{FF2B5EF4-FFF2-40B4-BE49-F238E27FC236}">
-                <a16:creationId xmlns:a16="http://schemas.microsoft.com/office/drawing/2014/main" id="{FCE21D42-B0D9-4D8F-970C-F53599F8C61D}"/>
+                <a16:creationId xmlns:a16="http://schemas.microsoft.com/office/drawing/2014/main" id="{99C32ACB-D9BE-4D58-80C3-92DCD2A541D9}"/>
               </a:ext>
             </a:extLst>
           </p:cNvPr>
@@ -4637,9 +4637,9 @@
                 <a:solidFill>
                   <a:srgbClr val="667A72"/>
                 </a:solidFill>
-                <a:latin typeface="Helvetica Neue"/>
-                <a:ea typeface="Helvetica Neue"/>
-                <a:cs typeface="Helvetica Neue"/>
+                <a:latin typeface="Liberation Sans"/>
+                <a:ea typeface="Liberation Sans"/>
+                <a:cs typeface="Liberation Sans"/>
               </a:defRPr>
             </a:pPr>
             <a:r>
@@ -4647,9 +4647,9 @@
                 <a:solidFill>
                   <a:srgbClr val="667A72"/>
                 </a:solidFill>
-                <a:latin typeface="Helvetica Neue"/>
-                <a:ea typeface="Helvetica Neue"/>
-                <a:cs typeface="Helvetica Neue"/>
+                <a:latin typeface="Liberation Sans"/>
+                <a:ea typeface="Liberation Sans"/>
+                <a:cs typeface="Liberation Sans"/>
               </a:rPr>
               <a:t>качество раньше proxy</a:t>
             </a:r>
@@ -4661,7 +4661,7 @@
           <p:cNvPr id="27" name="">
             <a:extLst xmlns:a="http://schemas.openxmlformats.org/drawingml/2006/main">
               <a:ext uri="{FF2B5EF4-FFF2-40B4-BE49-F238E27FC236}">
-                <a16:creationId xmlns:a16="http://schemas.microsoft.com/office/drawing/2014/main" id="{6D912110-E393-49EC-83F2-53090D9395DF}"/>
+                <a16:creationId xmlns:a16="http://schemas.microsoft.com/office/drawing/2014/main" id="{18ED13E4-263C-490E-B263-B8FE3241E2E4}"/>
               </a:ext>
             </a:extLst>
           </p:cNvPr>
@@ -4694,9 +4694,9 @@
                 <a:solidFill>
                   <a:srgbClr val="08775A"/>
                 </a:solidFill>
-                <a:latin typeface="Helvetica Neue"/>
-                <a:ea typeface="Helvetica Neue"/>
-                <a:cs typeface="Helvetica Neue"/>
+                <a:latin typeface="Liberation Sans"/>
+                <a:ea typeface="Liberation Sans"/>
+                <a:cs typeface="Liberation Sans"/>
               </a:defRPr>
             </a:pPr>
             <a:r>
@@ -4704,9 +4704,9 @@
                 <a:solidFill>
                   <a:srgbClr val="08775A"/>
                 </a:solidFill>
-                <a:latin typeface="Helvetica Neue"/>
-                <a:ea typeface="Helvetica Neue"/>
-                <a:cs typeface="Helvetica Neue"/>
+                <a:latin typeface="Liberation Sans"/>
+                <a:ea typeface="Liberation Sans"/>
+                <a:cs typeface="Liberation Sans"/>
               </a:rPr>
               <a:t>→</a:t>
             </a:r>
@@ -4718,7 +4718,7 @@
           <p:cNvPr id="28" name="">
             <a:extLst xmlns:a="http://schemas.openxmlformats.org/drawingml/2006/main">
               <a:ext uri="{FF2B5EF4-FFF2-40B4-BE49-F238E27FC236}">
-                <a16:creationId xmlns:a16="http://schemas.microsoft.com/office/drawing/2014/main" id="{C15CD90A-DF4F-4677-8316-F6E74BC7E49B}"/>
+                <a16:creationId xmlns:a16="http://schemas.microsoft.com/office/drawing/2014/main" id="{0DEAF75F-8DD9-4F4F-9AEF-49919CAC6354}"/>
               </a:ext>
             </a:extLst>
           </p:cNvPr>
@@ -4750,7 +4750,7 @@
           <p:cNvPr id="29" name="">
             <a:extLst xmlns:a="http://schemas.openxmlformats.org/drawingml/2006/main">
               <a:ext uri="{FF2B5EF4-FFF2-40B4-BE49-F238E27FC236}">
-                <a16:creationId xmlns:a16="http://schemas.microsoft.com/office/drawing/2014/main" id="{7EFDFEE6-92F9-4538-972B-001D4663D2EC}"/>
+                <a16:creationId xmlns:a16="http://schemas.microsoft.com/office/drawing/2014/main" id="{1342A0D4-1D2C-4045-8C6C-F42384F74DD7}"/>
               </a:ext>
             </a:extLst>
           </p:cNvPr>
@@ -4782,7 +4782,7 @@
           <p:cNvPr id="30" name="">
             <a:extLst xmlns:a="http://schemas.openxmlformats.org/drawingml/2006/main">
               <a:ext uri="{FF2B5EF4-FFF2-40B4-BE49-F238E27FC236}">
-                <a16:creationId xmlns:a16="http://schemas.microsoft.com/office/drawing/2014/main" id="{2BFCA270-473E-4344-BCDE-3A6E3C6034DC}"/>
+                <a16:creationId xmlns:a16="http://schemas.microsoft.com/office/drawing/2014/main" id="{5D03F38B-E548-4112-8F24-56E1373D2C50}"/>
               </a:ext>
             </a:extLst>
           </p:cNvPr>
@@ -4815,9 +4815,9 @@
                 <a:solidFill>
                   <a:srgbClr val="0B211A"/>
                 </a:solidFill>
-                <a:latin typeface="Helvetica Neue"/>
-                <a:ea typeface="Helvetica Neue"/>
-                <a:cs typeface="Helvetica Neue"/>
+                <a:latin typeface="Liberation Sans"/>
+                <a:ea typeface="Liberation Sans"/>
+                <a:cs typeface="Liberation Sans"/>
               </a:defRPr>
             </a:pPr>
             <a:r>
@@ -4825,9 +4825,9 @@
                 <a:solidFill>
                   <a:srgbClr val="0B211A"/>
                 </a:solidFill>
-                <a:latin typeface="Helvetica Neue"/>
-                <a:ea typeface="Helvetica Neue"/>
-                <a:cs typeface="Helvetica Neue"/>
+                <a:latin typeface="Liberation Sans"/>
+                <a:ea typeface="Liberation Sans"/>
+                <a:cs typeface="Liberation Sans"/>
               </a:rPr>
               <a:t>05</a:t>
             </a:r>
@@ -4839,7 +4839,7 @@
           <p:cNvPr id="31" name="">
             <a:extLst xmlns:a="http://schemas.openxmlformats.org/drawingml/2006/main">
               <a:ext uri="{FF2B5EF4-FFF2-40B4-BE49-F238E27FC236}">
-                <a16:creationId xmlns:a16="http://schemas.microsoft.com/office/drawing/2014/main" id="{2778860E-8649-43AF-A5D3-645CCC7DA562}"/>
+                <a16:creationId xmlns:a16="http://schemas.microsoft.com/office/drawing/2014/main" id="{4C90B16F-A8AC-4D78-B1E1-0976B951A6D9}"/>
               </a:ext>
             </a:extLst>
           </p:cNvPr>
@@ -4872,9 +4872,9 @@
                 <a:solidFill>
                   <a:srgbClr val="0B211A"/>
                 </a:solidFill>
-                <a:latin typeface="Helvetica Neue"/>
-                <a:ea typeface="Helvetica Neue"/>
-                <a:cs typeface="Helvetica Neue"/>
+                <a:latin typeface="Liberation Sans"/>
+                <a:ea typeface="Liberation Sans"/>
+                <a:cs typeface="Liberation Sans"/>
               </a:defRPr>
             </a:pPr>
             <a:r>
@@ -4882,9 +4882,9 @@
                 <a:solidFill>
                   <a:srgbClr val="0B211A"/>
                 </a:solidFill>
-                <a:latin typeface="Helvetica Neue"/>
-                <a:ea typeface="Helvetica Neue"/>
-                <a:cs typeface="Helvetica Neue"/>
+                <a:latin typeface="Liberation Sans"/>
+                <a:ea typeface="Liberation Sans"/>
+                <a:cs typeface="Liberation Sans"/>
               </a:rPr>
               <a:t>Сохранить</a:t>
             </a:r>
@@ -4896,7 +4896,7 @@
           <p:cNvPr id="32" name="">
             <a:extLst xmlns:a="http://schemas.openxmlformats.org/drawingml/2006/main">
               <a:ext uri="{FF2B5EF4-FFF2-40B4-BE49-F238E27FC236}">
-                <a16:creationId xmlns:a16="http://schemas.microsoft.com/office/drawing/2014/main" id="{318E9619-EA08-49C0-83BC-D2994FE4607D}"/>
+                <a16:creationId xmlns:a16="http://schemas.microsoft.com/office/drawing/2014/main" id="{4F5C73A0-BE48-4735-B1A2-359BEEF12DE4}"/>
               </a:ext>
             </a:extLst>
           </p:cNvPr>
@@ -4929,9 +4929,9 @@
                 <a:solidFill>
                   <a:srgbClr val="667A72"/>
                 </a:solidFill>
-                <a:latin typeface="Helvetica Neue"/>
-                <a:ea typeface="Helvetica Neue"/>
-                <a:cs typeface="Helvetica Neue"/>
+                <a:latin typeface="Liberation Sans"/>
+                <a:ea typeface="Liberation Sans"/>
+                <a:cs typeface="Liberation Sans"/>
               </a:defRPr>
             </a:pPr>
             <a:r>
@@ -4939,9 +4939,9 @@
                 <a:solidFill>
                   <a:srgbClr val="667A72"/>
                 </a:solidFill>
-                <a:latin typeface="Helvetica Neue"/>
-                <a:ea typeface="Helvetica Neue"/>
-                <a:cs typeface="Helvetica Neue"/>
+                <a:latin typeface="Liberation Sans"/>
+                <a:ea typeface="Liberation Sans"/>
+                <a:cs typeface="Liberation Sans"/>
               </a:rPr>
               <a:t>полный run и версии</a:t>
             </a:r>
@@ -4953,7 +4953,7 @@
           <p:cNvPr id="33" name="">
             <a:extLst xmlns:a="http://schemas.openxmlformats.org/drawingml/2006/main">
               <a:ext uri="{FF2B5EF4-FFF2-40B4-BE49-F238E27FC236}">
-                <a16:creationId xmlns:a16="http://schemas.microsoft.com/office/drawing/2014/main" id="{5BAF00A6-665C-4426-8303-B2F552ADC076}"/>
+                <a16:creationId xmlns:a16="http://schemas.microsoft.com/office/drawing/2014/main" id="{968DEA61-0793-43BD-9244-9ECBA76C6C4F}"/>
               </a:ext>
             </a:extLst>
           </p:cNvPr>
@@ -4986,9 +4986,9 @@
                 <a:solidFill>
                   <a:srgbClr val="08775A"/>
                 </a:solidFill>
-                <a:latin typeface="Helvetica Neue"/>
-                <a:ea typeface="Helvetica Neue"/>
-                <a:cs typeface="Helvetica Neue"/>
+                <a:latin typeface="Liberation Sans"/>
+                <a:ea typeface="Liberation Sans"/>
+                <a:cs typeface="Liberation Sans"/>
               </a:defRPr>
             </a:pPr>
             <a:r>
@@ -4996,9 +4996,9 @@
                 <a:solidFill>
                   <a:srgbClr val="08775A"/>
                 </a:solidFill>
-                <a:latin typeface="Helvetica Neue"/>
-                <a:ea typeface="Helvetica Neue"/>
-                <a:cs typeface="Helvetica Neue"/>
+                <a:latin typeface="Liberation Sans"/>
+                <a:ea typeface="Liberation Sans"/>
+                <a:cs typeface="Liberation Sans"/>
               </a:rPr>
               <a:t>Ввод остаётся редактируемым. Preset — только начальная точка.</a:t>
             </a:r>
@@ -5010,7 +5010,7 @@
           <p:cNvPr id="34" name="">
             <a:extLst xmlns:a="http://schemas.openxmlformats.org/drawingml/2006/main">
               <a:ext uri="{FF2B5EF4-FFF2-40B4-BE49-F238E27FC236}">
-                <a16:creationId xmlns:a16="http://schemas.microsoft.com/office/drawing/2014/main" id="{0FC9EED9-AD8A-4412-B3C5-DCC8FD55B8AB}"/>
+                <a16:creationId xmlns:a16="http://schemas.microsoft.com/office/drawing/2014/main" id="{8F1C62A4-5A45-46EE-9FD2-40654FF9D8E7}"/>
               </a:ext>
             </a:extLst>
           </p:cNvPr>
@@ -5042,7 +5042,7 @@
           <p:cNvPr id="35" name="">
             <a:extLst xmlns:a="http://schemas.openxmlformats.org/drawingml/2006/main">
               <a:ext uri="{FF2B5EF4-FFF2-40B4-BE49-F238E27FC236}">
-                <a16:creationId xmlns:a16="http://schemas.microsoft.com/office/drawing/2014/main" id="{B6F03F57-DFA0-4E3B-9809-0B86E0F43671}"/>
+                <a16:creationId xmlns:a16="http://schemas.microsoft.com/office/drawing/2014/main" id="{F8032197-5502-4197-BD0B-780E3C4D41EA}"/>
               </a:ext>
             </a:extLst>
           </p:cNvPr>
@@ -5075,9 +5075,9 @@
                 <a:solidFill>
                   <a:srgbClr val="0B211A"/>
                 </a:solidFill>
-                <a:latin typeface="Helvetica Neue"/>
-                <a:ea typeface="Helvetica Neue"/>
-                <a:cs typeface="Helvetica Neue"/>
+                <a:latin typeface="Liberation Sans"/>
+                <a:ea typeface="Liberation Sans"/>
+                <a:cs typeface="Liberation Sans"/>
               </a:defRPr>
             </a:pPr>
             <a:r>
@@ -5085,9 +5085,9 @@
                 <a:solidFill>
                   <a:srgbClr val="0B211A"/>
                 </a:solidFill>
-                <a:latin typeface="Helvetica Neue"/>
-                <a:ea typeface="Helvetica Neue"/>
-                <a:cs typeface="Helvetica Neue"/>
+                <a:latin typeface="Liberation Sans"/>
+                <a:ea typeface="Liberation Sans"/>
+                <a:cs typeface="Liberation Sans"/>
               </a:rPr>
               <a:t>180 мин</a:t>
             </a:r>
@@ -5099,7 +5099,7 @@
           <p:cNvPr id="36" name="">
             <a:extLst xmlns:a="http://schemas.openxmlformats.org/drawingml/2006/main">
               <a:ext uri="{FF2B5EF4-FFF2-40B4-BE49-F238E27FC236}">
-                <a16:creationId xmlns:a16="http://schemas.microsoft.com/office/drawing/2014/main" id="{A69F2EB1-5330-42B2-9785-A47DD821DE89}"/>
+                <a16:creationId xmlns:a16="http://schemas.microsoft.com/office/drawing/2014/main" id="{2EECAB14-6262-4131-9C13-11B065723ECE}"/>
               </a:ext>
             </a:extLst>
           </p:cNvPr>
@@ -5131,7 +5131,7 @@
           <p:cNvPr id="37" name="">
             <a:extLst xmlns:a="http://schemas.openxmlformats.org/drawingml/2006/main">
               <a:ext uri="{FF2B5EF4-FFF2-40B4-BE49-F238E27FC236}">
-                <a16:creationId xmlns:a16="http://schemas.microsoft.com/office/drawing/2014/main" id="{6C13752C-AF3D-4630-B2E9-4497B6773CF3}"/>
+                <a16:creationId xmlns:a16="http://schemas.microsoft.com/office/drawing/2014/main" id="{7A82A3B0-A227-4880-BD9F-1DA8C31D9351}"/>
               </a:ext>
             </a:extLst>
           </p:cNvPr>
@@ -5164,9 +5164,9 @@
                 <a:solidFill>
                   <a:srgbClr val="0B211A"/>
                 </a:solidFill>
-                <a:latin typeface="Helvetica Neue"/>
-                <a:ea typeface="Helvetica Neue"/>
-                <a:cs typeface="Helvetica Neue"/>
+                <a:latin typeface="Liberation Sans"/>
+                <a:ea typeface="Liberation Sans"/>
+                <a:cs typeface="Liberation Sans"/>
               </a:defRPr>
             </a:pPr>
             <a:r>
@@ -5174,9 +5174,9 @@
                 <a:solidFill>
                   <a:srgbClr val="0B211A"/>
                 </a:solidFill>
-                <a:latin typeface="Helvetica Neue"/>
-                <a:ea typeface="Helvetica Neue"/>
-                <a:cs typeface="Helvetica Neue"/>
+                <a:latin typeface="Liberation Sans"/>
+                <a:ea typeface="Liberation Sans"/>
+                <a:cs typeface="Liberation Sans"/>
               </a:rPr>
               <a:t>шаг 60 мин</a:t>
             </a:r>
@@ -5186,7 +5186,7 @@
     </p:spTree>
     <p:extLst>
       <p:ext uri="{BB962C8B-B14F-4D97-AF65-F5344CB8AC3E}">
-        <p14:creationId xmlns:p14="http://schemas.microsoft.com/office/powerpoint/2010/main" val="705552992"/>
+        <p14:creationId xmlns:p14="http://schemas.microsoft.com/office/powerpoint/2010/main" val="1231149177"/>
       </p:ext>
     </p:extLst>
   </p:cSld>
@@ -5217,7 +5217,7 @@
           <p:cNvPr id="14" name="">
             <a:extLst xmlns:a="http://schemas.openxmlformats.org/drawingml/2006/main">
               <a:ext uri="{FF2B5EF4-FFF2-40B4-BE49-F238E27FC236}">
-                <a16:creationId xmlns:a16="http://schemas.microsoft.com/office/drawing/2014/main" id="{FEC2D055-32A3-4C5A-8C5C-0DABB0FF5501}"/>
+                <a16:creationId xmlns:a16="http://schemas.microsoft.com/office/drawing/2014/main" id="{97C504ED-16E8-4968-B7AC-D641CE68F563}"/>
               </a:ext>
             </a:extLst>
           </p:cNvPr>
@@ -5250,9 +5250,9 @@
                 <a:solidFill>
                   <a:srgbClr val="08775A"/>
                 </a:solidFill>
-                <a:latin typeface="Helvetica Neue"/>
-                <a:ea typeface="Helvetica Neue"/>
-                <a:cs typeface="Helvetica Neue"/>
+                <a:latin typeface="Liberation Sans"/>
+                <a:ea typeface="Liberation Sans"/>
+                <a:cs typeface="Liberation Sans"/>
               </a:defRPr>
             </a:pPr>
             <a:r>
@@ -5260,9 +5260,9 @@
                 <a:solidFill>
                   <a:srgbClr val="08775A"/>
                 </a:solidFill>
-                <a:latin typeface="Helvetica Neue"/>
-                <a:ea typeface="Helvetica Neue"/>
-                <a:cs typeface="Helvetica Neue"/>
+                <a:latin typeface="Liberation Sans"/>
+                <a:ea typeface="Liberation Sans"/>
+                <a:cs typeface="Liberation Sans"/>
               </a:rPr>
               <a:t>ДАННЫЕ И ЗАЩИТА ОТ УТЕЧКИ</a:t>
             </a:r>
@@ -5274,7 +5274,7 @@
           <p:cNvPr id="2" name="">
             <a:extLst xmlns:a="http://schemas.openxmlformats.org/drawingml/2006/main">
               <a:ext uri="{FF2B5EF4-FFF2-40B4-BE49-F238E27FC236}">
-                <a16:creationId xmlns:a16="http://schemas.microsoft.com/office/drawing/2014/main" id="{BBA3DAEE-2181-4603-A7AE-6E3097BAD43B}"/>
+                <a16:creationId xmlns:a16="http://schemas.microsoft.com/office/drawing/2014/main" id="{CA22E345-BB6B-4754-82F5-51809BA776D7}"/>
               </a:ext>
             </a:extLst>
           </p:cNvPr>
@@ -5307,9 +5307,9 @@
                 <a:solidFill>
                   <a:srgbClr val="0B211A"/>
                 </a:solidFill>
-                <a:latin typeface="Helvetica Neue"/>
-                <a:ea typeface="Helvetica Neue"/>
-                <a:cs typeface="Helvetica Neue"/>
+                <a:latin typeface="Liberation Sans"/>
+                <a:ea typeface="Liberation Sans"/>
+                <a:cs typeface="Liberation Sans"/>
               </a:defRPr>
             </a:pPr>
             <a:r>
@@ -5317,9 +5317,9 @@
                 <a:solidFill>
                   <a:srgbClr val="0B211A"/>
                 </a:solidFill>
-                <a:latin typeface="Helvetica Neue"/>
-                <a:ea typeface="Helvetica Neue"/>
-                <a:cs typeface="Helvetica Neue"/>
+                <a:latin typeface="Liberation Sans"/>
+                <a:ea typeface="Liberation Sans"/>
+                <a:cs typeface="Liberation Sans"/>
               </a:rPr>
               <a:t>В момент t система знает только опубликованное к t</a:t>
             </a:r>
@@ -5331,7 +5331,7 @@
           <p:cNvPr id="3" name="">
             <a:extLst xmlns:a="http://schemas.openxmlformats.org/drawingml/2006/main">
               <a:ext uri="{FF2B5EF4-FFF2-40B4-BE49-F238E27FC236}">
-                <a16:creationId xmlns:a16="http://schemas.microsoft.com/office/drawing/2014/main" id="{E2EB284B-2C4C-44D3-A7AF-39EADB1C6DD7}"/>
+                <a16:creationId xmlns:a16="http://schemas.microsoft.com/office/drawing/2014/main" id="{CD68DB90-51C9-422F-A259-E619AC7E9157}"/>
               </a:ext>
             </a:extLst>
           </p:cNvPr>
@@ -5364,9 +5364,9 @@
                 <a:solidFill>
                   <a:srgbClr val="667A72"/>
                 </a:solidFill>
-                <a:latin typeface="Helvetica Neue"/>
-                <a:ea typeface="Helvetica Neue"/>
-                <a:cs typeface="Helvetica Neue"/>
+                <a:latin typeface="Liberation Sans"/>
+                <a:ea typeface="Liberation Sans"/>
+                <a:cs typeface="Liberation Sans"/>
               </a:defRPr>
             </a:pPr>
             <a:r>
@@ -5374,9 +5374,9 @@
                 <a:solidFill>
                   <a:srgbClr val="667A72"/>
                 </a:solidFill>
-                <a:latin typeface="Helvetica Neue"/>
-                <a:ea typeface="Helvetica Neue"/>
-                <a:cs typeface="Helvetica Neue"/>
+                <a:latin typeface="Liberation Sans"/>
+                <a:ea typeface="Liberation Sans"/>
+                <a:cs typeface="Liberation Sans"/>
               </a:rPr>
               <a:t>03</a:t>
             </a:r>
@@ -5388,7 +5388,7 @@
           <p:cNvPr id="4" name="">
             <a:extLst xmlns:a="http://schemas.openxmlformats.org/drawingml/2006/main">
               <a:ext uri="{FF2B5EF4-FFF2-40B4-BE49-F238E27FC236}">
-                <a16:creationId xmlns:a16="http://schemas.microsoft.com/office/drawing/2014/main" id="{B8C82B1C-AE09-4845-8723-082B65FB7D0E}"/>
+                <a16:creationId xmlns:a16="http://schemas.microsoft.com/office/drawing/2014/main" id="{0021B642-5002-4563-B92A-4EB2BB3AA03D}"/>
               </a:ext>
             </a:extLst>
           </p:cNvPr>
@@ -5421,9 +5421,9 @@
                 <a:solidFill>
                   <a:srgbClr val="0B211A"/>
                 </a:solidFill>
-                <a:latin typeface="Helvetica Neue"/>
-                <a:ea typeface="Helvetica Neue"/>
-                <a:cs typeface="Helvetica Neue"/>
+                <a:latin typeface="Liberation Sans"/>
+                <a:ea typeface="Liberation Sans"/>
+                <a:cs typeface="Liberation Sans"/>
               </a:defRPr>
             </a:pPr>
             <a:r>
@@ -5431,9 +5431,9 @@
                 <a:solidFill>
                   <a:srgbClr val="0B211A"/>
                 </a:solidFill>
-                <a:latin typeface="Helvetica Neue"/>
-                <a:ea typeface="Helvetica Neue"/>
-                <a:cs typeface="Helvetica Neue"/>
+                <a:latin typeface="Liberation Sans"/>
+                <a:ea typeface="Liberation Sans"/>
+                <a:cs typeface="Liberation Sans"/>
               </a:rPr>
               <a:t>отбор ЛИМС</a:t>
             </a:r>
@@ -5445,7 +5445,7 @@
           <p:cNvPr id="5" name="">
             <a:extLst xmlns:a="http://schemas.openxmlformats.org/drawingml/2006/main">
               <a:ext uri="{FF2B5EF4-FFF2-40B4-BE49-F238E27FC236}">
-                <a16:creationId xmlns:a16="http://schemas.microsoft.com/office/drawing/2014/main" id="{966CCF7B-277C-4D67-8637-E579E87104C0}"/>
+                <a16:creationId xmlns:a16="http://schemas.microsoft.com/office/drawing/2014/main" id="{331D47C5-7F8A-4AD3-9C93-CD262E976626}"/>
               </a:ext>
             </a:extLst>
           </p:cNvPr>
@@ -5478,9 +5478,9 @@
                 <a:solidFill>
                   <a:srgbClr val="E09938"/>
                 </a:solidFill>
-                <a:latin typeface="Helvetica Neue"/>
-                <a:ea typeface="Helvetica Neue"/>
-                <a:cs typeface="Helvetica Neue"/>
+                <a:latin typeface="Liberation Sans"/>
+                <a:ea typeface="Liberation Sans"/>
+                <a:cs typeface="Liberation Sans"/>
               </a:defRPr>
             </a:pPr>
             <a:r>
@@ -5488,9 +5488,9 @@
                 <a:solidFill>
                   <a:srgbClr val="E09938"/>
                 </a:solidFill>
-                <a:latin typeface="Helvetica Neue"/>
-                <a:ea typeface="Helvetica Neue"/>
-                <a:cs typeface="Helvetica Neue"/>
+                <a:latin typeface="Liberation Sans"/>
+                <a:ea typeface="Liberation Sans"/>
+                <a:cs typeface="Liberation Sans"/>
               </a:rPr>
               <a:t>+ до 4 часов</a:t>
             </a:r>
@@ -5502,7 +5502,7 @@
           <p:cNvPr id="6" name="">
             <a:extLst xmlns:a="http://schemas.openxmlformats.org/drawingml/2006/main">
               <a:ext uri="{FF2B5EF4-FFF2-40B4-BE49-F238E27FC236}">
-                <a16:creationId xmlns:a16="http://schemas.microsoft.com/office/drawing/2014/main" id="{E70C9C43-EB66-4A35-AEEF-EF0C226C0729}"/>
+                <a16:creationId xmlns:a16="http://schemas.microsoft.com/office/drawing/2014/main" id="{ADD81438-30DC-4EE0-88FA-DCEB2D374FA5}"/>
               </a:ext>
             </a:extLst>
           </p:cNvPr>
@@ -5535,9 +5535,9 @@
                 <a:solidFill>
                   <a:srgbClr val="08775A"/>
                 </a:solidFill>
-                <a:latin typeface="Helvetica Neue"/>
-                <a:ea typeface="Helvetica Neue"/>
-                <a:cs typeface="Helvetica Neue"/>
+                <a:latin typeface="Liberation Sans"/>
+                <a:ea typeface="Liberation Sans"/>
+                <a:cs typeface="Liberation Sans"/>
               </a:defRPr>
             </a:pPr>
             <a:r>
@@ -5545,9 +5545,9 @@
                 <a:solidFill>
                   <a:srgbClr val="08775A"/>
                 </a:solidFill>
-                <a:latin typeface="Helvetica Neue"/>
-                <a:ea typeface="Helvetica Neue"/>
-                <a:cs typeface="Helvetica Neue"/>
+                <a:latin typeface="Liberation Sans"/>
+                <a:ea typeface="Liberation Sans"/>
+                <a:cs typeface="Liberation Sans"/>
               </a:rPr>
               <a:t>доступно модели</a:t>
             </a:r>
@@ -5559,7 +5559,7 @@
           <p:cNvPr id="7" name="">
             <a:extLst xmlns:a="http://schemas.openxmlformats.org/drawingml/2006/main">
               <a:ext uri="{FF2B5EF4-FFF2-40B4-BE49-F238E27FC236}">
-                <a16:creationId xmlns:a16="http://schemas.microsoft.com/office/drawing/2014/main" id="{41E0B102-86CC-4041-8A80-EA7F55EADFE6}"/>
+                <a16:creationId xmlns:a16="http://schemas.microsoft.com/office/drawing/2014/main" id="{0F967178-D365-4C64-B3BA-9D451AAB09E1}"/>
               </a:ext>
             </a:extLst>
           </p:cNvPr>
@@ -5591,7 +5591,7 @@
           <p:cNvPr id="8" name="">
             <a:extLst xmlns:a="http://schemas.openxmlformats.org/drawingml/2006/main">
               <a:ext uri="{FF2B5EF4-FFF2-40B4-BE49-F238E27FC236}">
-                <a16:creationId xmlns:a16="http://schemas.microsoft.com/office/drawing/2014/main" id="{E0DD3D63-A082-46A2-AD25-7C8EC27CE181}"/>
+                <a16:creationId xmlns:a16="http://schemas.microsoft.com/office/drawing/2014/main" id="{95C46E5E-F598-4CAA-97AC-51AC465D430C}"/>
               </a:ext>
             </a:extLst>
           </p:cNvPr>
@@ -5623,7 +5623,7 @@
           <p:cNvPr id="9" name="">
             <a:extLst xmlns:a="http://schemas.openxmlformats.org/drawingml/2006/main">
               <a:ext uri="{FF2B5EF4-FFF2-40B4-BE49-F238E27FC236}">
-                <a16:creationId xmlns:a16="http://schemas.microsoft.com/office/drawing/2014/main" id="{9C3D87F0-C34D-43CC-A4A4-BEE6E8BE24C0}"/>
+                <a16:creationId xmlns:a16="http://schemas.microsoft.com/office/drawing/2014/main" id="{689C72FC-D594-4762-898D-739065B67859}"/>
               </a:ext>
             </a:extLst>
           </p:cNvPr>
@@ -5655,7 +5655,7 @@
           <p:cNvPr id="10" name="">
             <a:extLst xmlns:a="http://schemas.openxmlformats.org/drawingml/2006/main">
               <a:ext uri="{FF2B5EF4-FFF2-40B4-BE49-F238E27FC236}">
-                <a16:creationId xmlns:a16="http://schemas.microsoft.com/office/drawing/2014/main" id="{8229CC77-D30A-4CB4-AC31-CE9475429D64}"/>
+                <a16:creationId xmlns:a16="http://schemas.microsoft.com/office/drawing/2014/main" id="{EAF7A183-C8EB-4015-B40B-CCD81454E1AC}"/>
               </a:ext>
             </a:extLst>
           </p:cNvPr>
@@ -5687,7 +5687,7 @@
           <p:cNvPr id="11" name="">
             <a:extLst xmlns:a="http://schemas.openxmlformats.org/drawingml/2006/main">
               <a:ext uri="{FF2B5EF4-FFF2-40B4-BE49-F238E27FC236}">
-                <a16:creationId xmlns:a16="http://schemas.microsoft.com/office/drawing/2014/main" id="{D53281E4-9251-4BD0-BE4E-344EFF6BAD3D}"/>
+                <a16:creationId xmlns:a16="http://schemas.microsoft.com/office/drawing/2014/main" id="{CF44003D-EAE9-443E-A9DD-7818508372FB}"/>
               </a:ext>
             </a:extLst>
           </p:cNvPr>
@@ -5720,9 +5720,9 @@
                 <a:solidFill>
                   <a:srgbClr val="667A72"/>
                 </a:solidFill>
-                <a:latin typeface="Helvetica Neue"/>
-                <a:ea typeface="Helvetica Neue"/>
-                <a:cs typeface="Helvetica Neue"/>
+                <a:latin typeface="Liberation Sans"/>
+                <a:ea typeface="Liberation Sans"/>
+                <a:cs typeface="Liberation Sans"/>
               </a:defRPr>
             </a:pPr>
             <a:r>
@@ -5730,9 +5730,9 @@
                 <a:solidFill>
                   <a:srgbClr val="667A72"/>
                 </a:solidFill>
-                <a:latin typeface="Helvetica Neue"/>
-                <a:ea typeface="Helvetica Neue"/>
-                <a:cs typeface="Helvetica Neue"/>
+                <a:latin typeface="Liberation Sans"/>
+                <a:ea typeface="Liberation Sans"/>
+                <a:cs typeface="Liberation Sans"/>
               </a:rPr>
               <a:t>measured_at</a:t>
             </a:r>
@@ -5744,7 +5744,7 @@
           <p:cNvPr id="12" name="">
             <a:extLst xmlns:a="http://schemas.openxmlformats.org/drawingml/2006/main">
               <a:ext uri="{FF2B5EF4-FFF2-40B4-BE49-F238E27FC236}">
-                <a16:creationId xmlns:a16="http://schemas.microsoft.com/office/drawing/2014/main" id="{690702B9-99D9-46A1-9547-4719EA3D171B}"/>
+                <a16:creationId xmlns:a16="http://schemas.microsoft.com/office/drawing/2014/main" id="{9D17FB11-090C-4BDB-A2BB-2FCF895DB9CF}"/>
               </a:ext>
             </a:extLst>
           </p:cNvPr>
@@ -5777,9 +5777,9 @@
                 <a:solidFill>
                   <a:srgbClr val="667A72"/>
                 </a:solidFill>
-                <a:latin typeface="Helvetica Neue"/>
-                <a:ea typeface="Helvetica Neue"/>
-                <a:cs typeface="Helvetica Neue"/>
+                <a:latin typeface="Liberation Sans"/>
+                <a:ea typeface="Liberation Sans"/>
+                <a:cs typeface="Liberation Sans"/>
               </a:defRPr>
             </a:pPr>
             <a:r>
@@ -5787,9 +5787,9 @@
                 <a:solidFill>
                   <a:srgbClr val="667A72"/>
                 </a:solidFill>
-                <a:latin typeface="Helvetica Neue"/>
-                <a:ea typeface="Helvetica Neue"/>
-                <a:cs typeface="Helvetica Neue"/>
+                <a:latin typeface="Liberation Sans"/>
+                <a:ea typeface="Liberation Sans"/>
+                <a:cs typeface="Liberation Sans"/>
               </a:rPr>
               <a:t>available_at</a:t>
             </a:r>
@@ -6046,7 +6046,7 @@
     </p:spTree>
     <p:extLst>
       <p:ext uri="{BB962C8B-B14F-4D97-AF65-F5344CB8AC3E}">
-        <p14:creationId xmlns:p14="http://schemas.microsoft.com/office/powerpoint/2010/main" val="1760977067"/>
+        <p14:creationId xmlns:p14="http://schemas.microsoft.com/office/powerpoint/2010/main" val="1353060087"/>
       </p:ext>
     </p:extLst>
   </p:cSld>
@@ -6077,7 +6077,7 @@
           <p:cNvPr id="31" name="">
             <a:extLst xmlns:a="http://schemas.openxmlformats.org/drawingml/2006/main">
               <a:ext uri="{FF2B5EF4-FFF2-40B4-BE49-F238E27FC236}">
-                <a16:creationId xmlns:a16="http://schemas.microsoft.com/office/drawing/2014/main" id="{B0D163D8-A187-4FD2-B89E-94539A78CDB0}"/>
+                <a16:creationId xmlns:a16="http://schemas.microsoft.com/office/drawing/2014/main" id="{8F04A7B8-CAB5-42AD-B3A6-2E89CD947CA0}"/>
               </a:ext>
             </a:extLst>
           </p:cNvPr>
@@ -6110,9 +6110,9 @@
                 <a:solidFill>
                   <a:srgbClr val="08775A"/>
                 </a:solidFill>
-                <a:latin typeface="Helvetica Neue"/>
-                <a:ea typeface="Helvetica Neue"/>
-                <a:cs typeface="Helvetica Neue"/>
+                <a:latin typeface="Liberation Sans"/>
+                <a:ea typeface="Liberation Sans"/>
+                <a:cs typeface="Liberation Sans"/>
               </a:defRPr>
             </a:pPr>
             <a:r>
@@ -6120,9 +6120,9 @@
                 <a:solidFill>
                   <a:srgbClr val="08775A"/>
                 </a:solidFill>
-                <a:latin typeface="Helvetica Neue"/>
-                <a:ea typeface="Helvetica Neue"/>
-                <a:cs typeface="Helvetica Neue"/>
+                <a:latin typeface="Liberation Sans"/>
+                <a:ea typeface="Liberation Sans"/>
+                <a:cs typeface="Liberation Sans"/>
               </a:rPr>
               <a:t>АРХИТЕКТУРА АГЕНТОВ</a:t>
             </a:r>
@@ -6134,7 +6134,7 @@
           <p:cNvPr id="2" name="">
             <a:extLst xmlns:a="http://schemas.openxmlformats.org/drawingml/2006/main">
               <a:ext uri="{FF2B5EF4-FFF2-40B4-BE49-F238E27FC236}">
-                <a16:creationId xmlns:a16="http://schemas.microsoft.com/office/drawing/2014/main" id="{64BB4562-AFC2-4177-B1FD-316A2C20BD07}"/>
+                <a16:creationId xmlns:a16="http://schemas.microsoft.com/office/drawing/2014/main" id="{D9B7D8CA-3670-486D-95B2-5485ECD526C5}"/>
               </a:ext>
             </a:extLst>
           </p:cNvPr>
@@ -6167,9 +6167,9 @@
                 <a:solidFill>
                   <a:srgbClr val="0B211A"/>
                 </a:solidFill>
-                <a:latin typeface="Helvetica Neue"/>
-                <a:ea typeface="Helvetica Neue"/>
-                <a:cs typeface="Helvetica Neue"/>
+                <a:latin typeface="Liberation Sans"/>
+                <a:ea typeface="Liberation Sans"/>
+                <a:cs typeface="Liberation Sans"/>
               </a:defRPr>
             </a:pPr>
             <a:r>
@@ -6177,9 +6177,9 @@
                 <a:solidFill>
                   <a:srgbClr val="0B211A"/>
                 </a:solidFill>
-                <a:latin typeface="Helvetica Neue"/>
-                <a:ea typeface="Helvetica Neue"/>
-                <a:cs typeface="Helvetica Neue"/>
+                <a:latin typeface="Liberation Sans"/>
+                <a:ea typeface="Liberation Sans"/>
+                <a:cs typeface="Liberation Sans"/>
               </a:rPr>
               <a:t>Один контракт связывает расчёт, API, БД и UI</a:t>
             </a:r>
@@ -6191,7 +6191,7 @@
           <p:cNvPr id="3" name="">
             <a:extLst xmlns:a="http://schemas.openxmlformats.org/drawingml/2006/main">
               <a:ext uri="{FF2B5EF4-FFF2-40B4-BE49-F238E27FC236}">
-                <a16:creationId xmlns:a16="http://schemas.microsoft.com/office/drawing/2014/main" id="{54954CEA-786C-46F1-AF7E-611D349F4DA9}"/>
+                <a16:creationId xmlns:a16="http://schemas.microsoft.com/office/drawing/2014/main" id="{EF31E586-0983-4395-AC56-0BF5379D9E68}"/>
               </a:ext>
             </a:extLst>
           </p:cNvPr>
@@ -6224,9 +6224,9 @@
                 <a:solidFill>
                   <a:srgbClr val="667A72"/>
                 </a:solidFill>
-                <a:latin typeface="Helvetica Neue"/>
-                <a:ea typeface="Helvetica Neue"/>
-                <a:cs typeface="Helvetica Neue"/>
+                <a:latin typeface="Liberation Sans"/>
+                <a:ea typeface="Liberation Sans"/>
+                <a:cs typeface="Liberation Sans"/>
               </a:defRPr>
             </a:pPr>
             <a:r>
@@ -6234,9 +6234,9 @@
                 <a:solidFill>
                   <a:srgbClr val="667A72"/>
                 </a:solidFill>
-                <a:latin typeface="Helvetica Neue"/>
-                <a:ea typeface="Helvetica Neue"/>
-                <a:cs typeface="Helvetica Neue"/>
+                <a:latin typeface="Liberation Sans"/>
+                <a:ea typeface="Liberation Sans"/>
+                <a:cs typeface="Liberation Sans"/>
               </a:rPr>
               <a:t>04</a:t>
             </a:r>
@@ -6248,7 +6248,7 @@
           <p:cNvPr id="4" name="">
             <a:extLst xmlns:a="http://schemas.openxmlformats.org/drawingml/2006/main">
               <a:ext uri="{FF2B5EF4-FFF2-40B4-BE49-F238E27FC236}">
-                <a16:creationId xmlns:a16="http://schemas.microsoft.com/office/drawing/2014/main" id="{B70CFBC6-CA8B-40BA-804D-E2A051E1896C}"/>
+                <a16:creationId xmlns:a16="http://schemas.microsoft.com/office/drawing/2014/main" id="{D8F84C3F-44C6-4A5B-8946-71BF1ECB1F83}"/>
               </a:ext>
             </a:extLst>
           </p:cNvPr>
@@ -6280,7 +6280,7 @@
           <p:cNvPr id="5" name="">
             <a:extLst xmlns:a="http://schemas.openxmlformats.org/drawingml/2006/main">
               <a:ext uri="{FF2B5EF4-FFF2-40B4-BE49-F238E27FC236}">
-                <a16:creationId xmlns:a16="http://schemas.microsoft.com/office/drawing/2014/main" id="{03A70AC1-2467-4111-A912-6744F139574B}"/>
+                <a16:creationId xmlns:a16="http://schemas.microsoft.com/office/drawing/2014/main" id="{FF1FDE2C-320D-439E-83D8-16BA7BF1D81F}"/>
               </a:ext>
             </a:extLst>
           </p:cNvPr>
@@ -6313,9 +6313,9 @@
                 <a:solidFill>
                   <a:srgbClr val="0B211A"/>
                 </a:solidFill>
-                <a:latin typeface="Helvetica Neue"/>
-                <a:ea typeface="Helvetica Neue"/>
-                <a:cs typeface="Helvetica Neue"/>
+                <a:latin typeface="Liberation Sans"/>
+                <a:ea typeface="Liberation Sans"/>
+                <a:cs typeface="Liberation Sans"/>
               </a:defRPr>
             </a:pPr>
             <a:r>
@@ -6323,9 +6323,9 @@
                 <a:solidFill>
                   <a:srgbClr val="0B211A"/>
                 </a:solidFill>
-                <a:latin typeface="Helvetica Neue"/>
-                <a:ea typeface="Helvetica Neue"/>
-                <a:cs typeface="Helvetica Neue"/>
+                <a:latin typeface="Liberation Sans"/>
+                <a:ea typeface="Liberation Sans"/>
+                <a:cs typeface="Liberation Sans"/>
               </a:rPr>
               <a:t>Snapshot / input</a:t>
             </a:r>
@@ -6337,7 +6337,7 @@
           <p:cNvPr id="6" name="">
             <a:extLst xmlns:a="http://schemas.openxmlformats.org/drawingml/2006/main">
               <a:ext uri="{FF2B5EF4-FFF2-40B4-BE49-F238E27FC236}">
-                <a16:creationId xmlns:a16="http://schemas.microsoft.com/office/drawing/2014/main" id="{3AF460AE-9BDB-4300-95EB-96CF1F409825}"/>
+                <a16:creationId xmlns:a16="http://schemas.microsoft.com/office/drawing/2014/main" id="{61928A72-7535-4052-ACEB-D39583B4D583}"/>
               </a:ext>
             </a:extLst>
           </p:cNvPr>
@@ -6370,9 +6370,9 @@
                 <a:solidFill>
                   <a:srgbClr val="667A72"/>
                 </a:solidFill>
-                <a:latin typeface="Helvetica Neue"/>
-                <a:ea typeface="Helvetica Neue"/>
-                <a:cs typeface="Helvetica Neue"/>
+                <a:latin typeface="Liberation Sans"/>
+                <a:ea typeface="Liberation Sans"/>
+                <a:cs typeface="Liberation Sans"/>
               </a:defRPr>
             </a:pPr>
             <a:r>
@@ -6380,9 +6380,9 @@
                 <a:solidFill>
                   <a:srgbClr val="667A72"/>
                 </a:solidFill>
-                <a:latin typeface="Helvetica Neue"/>
-                <a:ea typeface="Helvetica Neue"/>
-                <a:cs typeface="Helvetica Neue"/>
+                <a:latin typeface="Liberation Sans"/>
+                <a:ea typeface="Liberation Sans"/>
+                <a:cs typeface="Liberation Sans"/>
               </a:rPr>
               <a:t>point-in-time</a:t>
             </a:r>
@@ -6394,7 +6394,7 @@
           <p:cNvPr id="7" name="">
             <a:extLst xmlns:a="http://schemas.openxmlformats.org/drawingml/2006/main">
               <a:ext uri="{FF2B5EF4-FFF2-40B4-BE49-F238E27FC236}">
-                <a16:creationId xmlns:a16="http://schemas.microsoft.com/office/drawing/2014/main" id="{0BC947B8-3B85-49DC-ACC3-8771C43FBF1E}"/>
+                <a16:creationId xmlns:a16="http://schemas.microsoft.com/office/drawing/2014/main" id="{390935A2-CB87-403D-B4EA-7D4AB4FC4187}"/>
               </a:ext>
             </a:extLst>
           </p:cNvPr>
@@ -6426,7 +6426,7 @@
           <p:cNvPr id="8" name="">
             <a:extLst xmlns:a="http://schemas.openxmlformats.org/drawingml/2006/main">
               <a:ext uri="{FF2B5EF4-FFF2-40B4-BE49-F238E27FC236}">
-                <a16:creationId xmlns:a16="http://schemas.microsoft.com/office/drawing/2014/main" id="{B4052582-9F4C-40F8-A20B-3882179209D2}"/>
+                <a16:creationId xmlns:a16="http://schemas.microsoft.com/office/drawing/2014/main" id="{564C0130-AA48-490C-BEF0-BCF7DC2601A5}"/>
               </a:ext>
             </a:extLst>
           </p:cNvPr>
@@ -6459,9 +6459,9 @@
                 <a:solidFill>
                   <a:srgbClr val="0B211A"/>
                 </a:solidFill>
-                <a:latin typeface="Helvetica Neue"/>
-                <a:ea typeface="Helvetica Neue"/>
-                <a:cs typeface="Helvetica Neue"/>
+                <a:latin typeface="Liberation Sans"/>
+                <a:ea typeface="Liberation Sans"/>
+                <a:cs typeface="Liberation Sans"/>
               </a:defRPr>
             </a:pPr>
             <a:r>
@@ -6469,9 +6469,9 @@
                 <a:solidFill>
                   <a:srgbClr val="0B211A"/>
                 </a:solidFill>
-                <a:latin typeface="Helvetica Neue"/>
-                <a:ea typeface="Helvetica Neue"/>
-                <a:cs typeface="Helvetica Neue"/>
+                <a:latin typeface="Liberation Sans"/>
+                <a:ea typeface="Liberation Sans"/>
+                <a:cs typeface="Liberation Sans"/>
               </a:rPr>
               <a:t>Quality</a:t>
             </a:r>
@@ -6483,7 +6483,7 @@
           <p:cNvPr id="9" name="">
             <a:extLst xmlns:a="http://schemas.openxmlformats.org/drawingml/2006/main">
               <a:ext uri="{FF2B5EF4-FFF2-40B4-BE49-F238E27FC236}">
-                <a16:creationId xmlns:a16="http://schemas.microsoft.com/office/drawing/2014/main" id="{EB587D82-57D8-4303-AA18-F6D6B12E6EFD}"/>
+                <a16:creationId xmlns:a16="http://schemas.microsoft.com/office/drawing/2014/main" id="{2A84DD0F-DDAC-4A79-8E4C-3F8C08486B50}"/>
               </a:ext>
             </a:extLst>
           </p:cNvPr>
@@ -6516,9 +6516,9 @@
                 <a:solidFill>
                   <a:srgbClr val="667A72"/>
                 </a:solidFill>
-                <a:latin typeface="Helvetica Neue"/>
-                <a:ea typeface="Helvetica Neue"/>
-                <a:cs typeface="Helvetica Neue"/>
+                <a:latin typeface="Liberation Sans"/>
+                <a:ea typeface="Liberation Sans"/>
+                <a:cs typeface="Liberation Sans"/>
               </a:defRPr>
             </a:pPr>
             <a:r>
@@ -6526,9 +6526,9 @@
                 <a:solidFill>
                   <a:srgbClr val="667A72"/>
                 </a:solidFill>
-                <a:latin typeface="Helvetica Neue"/>
-                <a:ea typeface="Helvetica Neue"/>
-                <a:cs typeface="Helvetica Neue"/>
+                <a:latin typeface="Liberation Sans"/>
+                <a:ea typeface="Liberation Sans"/>
+                <a:cs typeface="Liberation Sans"/>
               </a:rPr>
               <a:t>forecast + response</a:t>
             </a:r>
@@ -6540,7 +6540,7 @@
           <p:cNvPr id="10" name="">
             <a:extLst xmlns:a="http://schemas.openxmlformats.org/drawingml/2006/main">
               <a:ext uri="{FF2B5EF4-FFF2-40B4-BE49-F238E27FC236}">
-                <a16:creationId xmlns:a16="http://schemas.microsoft.com/office/drawing/2014/main" id="{E611262C-4871-472B-9550-9369866733EA}"/>
+                <a16:creationId xmlns:a16="http://schemas.microsoft.com/office/drawing/2014/main" id="{64B45085-4513-4BED-B605-AC9821F1E270}"/>
               </a:ext>
             </a:extLst>
           </p:cNvPr>
@@ -6572,7 +6572,7 @@
           <p:cNvPr id="11" name="">
             <a:extLst xmlns:a="http://schemas.openxmlformats.org/drawingml/2006/main">
               <a:ext uri="{FF2B5EF4-FFF2-40B4-BE49-F238E27FC236}">
-                <a16:creationId xmlns:a16="http://schemas.microsoft.com/office/drawing/2014/main" id="{8B2508F9-2BCB-408A-96F1-0A6278AF458A}"/>
+                <a16:creationId xmlns:a16="http://schemas.microsoft.com/office/drawing/2014/main" id="{956D17F6-E6CA-4704-836E-504F761F8B97}"/>
               </a:ext>
             </a:extLst>
           </p:cNvPr>
@@ -6605,9 +6605,9 @@
                 <a:solidFill>
                   <a:srgbClr val="0B211A"/>
                 </a:solidFill>
-                <a:latin typeface="Helvetica Neue"/>
-                <a:ea typeface="Helvetica Neue"/>
-                <a:cs typeface="Helvetica Neue"/>
+                <a:latin typeface="Liberation Sans"/>
+                <a:ea typeface="Liberation Sans"/>
+                <a:cs typeface="Liberation Sans"/>
               </a:defRPr>
             </a:pPr>
             <a:r>
@@ -6615,9 +6615,9 @@
                 <a:solidFill>
                   <a:srgbClr val="0B211A"/>
                 </a:solidFill>
-                <a:latin typeface="Helvetica Neue"/>
-                <a:ea typeface="Helvetica Neue"/>
-                <a:cs typeface="Helvetica Neue"/>
+                <a:latin typeface="Liberation Sans"/>
+                <a:ea typeface="Liberation Sans"/>
+                <a:cs typeface="Liberation Sans"/>
               </a:rPr>
               <a:t>Reliability</a:t>
             </a:r>
@@ -6629,7 +6629,7 @@
           <p:cNvPr id="12" name="">
             <a:extLst xmlns:a="http://schemas.openxmlformats.org/drawingml/2006/main">
               <a:ext uri="{FF2B5EF4-FFF2-40B4-BE49-F238E27FC236}">
-                <a16:creationId xmlns:a16="http://schemas.microsoft.com/office/drawing/2014/main" id="{5EA03906-845C-4673-8C44-11C4BED30909}"/>
+                <a16:creationId xmlns:a16="http://schemas.microsoft.com/office/drawing/2014/main" id="{007A9125-B540-4944-8BF8-20B72668391E}"/>
               </a:ext>
             </a:extLst>
           </p:cNvPr>
@@ -6662,9 +6662,9 @@
                 <a:solidFill>
                   <a:srgbClr val="667A72"/>
                 </a:solidFill>
-                <a:latin typeface="Helvetica Neue"/>
-                <a:ea typeface="Helvetica Neue"/>
-                <a:cs typeface="Helvetica Neue"/>
+                <a:latin typeface="Liberation Sans"/>
+                <a:ea typeface="Liberation Sans"/>
+                <a:cs typeface="Liberation Sans"/>
               </a:defRPr>
             </a:pPr>
             <a:r>
@@ -6672,9 +6672,9 @@
                 <a:solidFill>
                   <a:srgbClr val="667A72"/>
                 </a:solidFill>
-                <a:latin typeface="Helvetica Neue"/>
-                <a:ea typeface="Helvetica Neue"/>
-                <a:cs typeface="Helvetica Neue"/>
+                <a:latin typeface="Liberation Sans"/>
+                <a:ea typeface="Liberation Sans"/>
+                <a:cs typeface="Liberation Sans"/>
               </a:rPr>
               <a:t>severity proxy</a:t>
             </a:r>
@@ -6686,7 +6686,7 @@
           <p:cNvPr id="13" name="">
             <a:extLst xmlns:a="http://schemas.openxmlformats.org/drawingml/2006/main">
               <a:ext uri="{FF2B5EF4-FFF2-40B4-BE49-F238E27FC236}">
-                <a16:creationId xmlns:a16="http://schemas.microsoft.com/office/drawing/2014/main" id="{692CBF4C-4310-4C51-B398-05EFC5659D45}"/>
+                <a16:creationId xmlns:a16="http://schemas.microsoft.com/office/drawing/2014/main" id="{BE7FF079-1791-4C2D-8734-4D51F38BE273}"/>
               </a:ext>
             </a:extLst>
           </p:cNvPr>
@@ -6718,7 +6718,7 @@
           <p:cNvPr id="14" name="">
             <a:extLst xmlns:a="http://schemas.openxmlformats.org/drawingml/2006/main">
               <a:ext uri="{FF2B5EF4-FFF2-40B4-BE49-F238E27FC236}">
-                <a16:creationId xmlns:a16="http://schemas.microsoft.com/office/drawing/2014/main" id="{1E34E8DB-E65F-4FA8-AF1C-96ACB879ABE2}"/>
+                <a16:creationId xmlns:a16="http://schemas.microsoft.com/office/drawing/2014/main" id="{7EDB5CC3-7189-4CB3-AAC1-B924C4BBF0EC}"/>
               </a:ext>
             </a:extLst>
           </p:cNvPr>
@@ -6751,9 +6751,9 @@
                 <a:solidFill>
                   <a:srgbClr val="FFFFFF"/>
                 </a:solidFill>
-                <a:latin typeface="Helvetica Neue"/>
-                <a:ea typeface="Helvetica Neue"/>
-                <a:cs typeface="Helvetica Neue"/>
+                <a:latin typeface="Liberation Sans"/>
+                <a:ea typeface="Liberation Sans"/>
+                <a:cs typeface="Liberation Sans"/>
               </a:defRPr>
             </a:pPr>
             <a:r>
@@ -6761,9 +6761,9 @@
                 <a:solidFill>
                   <a:srgbClr val="FFFFFF"/>
                 </a:solidFill>
-                <a:latin typeface="Helvetica Neue"/>
-                <a:ea typeface="Helvetica Neue"/>
-                <a:cs typeface="Helvetica Neue"/>
+                <a:latin typeface="Liberation Sans"/>
+                <a:ea typeface="Liberation Sans"/>
+                <a:cs typeface="Liberation Sans"/>
               </a:rPr>
               <a:t>Evaluator</a:t>
             </a:r>
@@ -6775,7 +6775,7 @@
           <p:cNvPr id="15" name="">
             <a:extLst xmlns:a="http://schemas.openxmlformats.org/drawingml/2006/main">
               <a:ext uri="{FF2B5EF4-FFF2-40B4-BE49-F238E27FC236}">
-                <a16:creationId xmlns:a16="http://schemas.microsoft.com/office/drawing/2014/main" id="{EA66157F-8081-448A-B4D1-FAB9BE650F63}"/>
+                <a16:creationId xmlns:a16="http://schemas.microsoft.com/office/drawing/2014/main" id="{37DEAE1C-D17B-4B53-B43B-D64373675DEA}"/>
               </a:ext>
             </a:extLst>
           </p:cNvPr>
@@ -6808,9 +6808,9 @@
                 <a:solidFill>
                   <a:srgbClr val="9DE8CA"/>
                 </a:solidFill>
-                <a:latin typeface="Helvetica Neue"/>
-                <a:ea typeface="Helvetica Neue"/>
-                <a:cs typeface="Helvetica Neue"/>
+                <a:latin typeface="Liberation Sans"/>
+                <a:ea typeface="Liberation Sans"/>
+                <a:cs typeface="Liberation Sans"/>
               </a:defRPr>
             </a:pPr>
             <a:r>
@@ -6818,9 +6818,9 @@
                 <a:solidFill>
                   <a:srgbClr val="9DE8CA"/>
                 </a:solidFill>
-                <a:latin typeface="Helvetica Neue"/>
-                <a:ea typeface="Helvetica Neue"/>
-                <a:cs typeface="Helvetica Neue"/>
+                <a:latin typeface="Liberation Sans"/>
+                <a:ea typeface="Liberation Sans"/>
+                <a:cs typeface="Liberation Sans"/>
               </a:rPr>
               <a:t>hard checks</a:t>
             </a:r>
@@ -6832,7 +6832,7 @@
           <p:cNvPr id="16" name="">
             <a:extLst xmlns:a="http://schemas.openxmlformats.org/drawingml/2006/main">
               <a:ext uri="{FF2B5EF4-FFF2-40B4-BE49-F238E27FC236}">
-                <a16:creationId xmlns:a16="http://schemas.microsoft.com/office/drawing/2014/main" id="{891A0D0E-4C73-4521-8F8A-98F945FF1BF0}"/>
+                <a16:creationId xmlns:a16="http://schemas.microsoft.com/office/drawing/2014/main" id="{B1EA00F8-24F6-46EC-901D-DDD3BE5656DA}"/>
               </a:ext>
             </a:extLst>
           </p:cNvPr>
@@ -6864,7 +6864,7 @@
           <p:cNvPr id="17" name="">
             <a:extLst xmlns:a="http://schemas.openxmlformats.org/drawingml/2006/main">
               <a:ext uri="{FF2B5EF4-FFF2-40B4-BE49-F238E27FC236}">
-                <a16:creationId xmlns:a16="http://schemas.microsoft.com/office/drawing/2014/main" id="{75020046-1B8F-40F6-99D5-6CF581787B3F}"/>
+                <a16:creationId xmlns:a16="http://schemas.microsoft.com/office/drawing/2014/main" id="{4A3E0921-B3D1-409C-9694-07BAE57F99B7}"/>
               </a:ext>
             </a:extLst>
           </p:cNvPr>
@@ -6897,9 +6897,9 @@
                 <a:solidFill>
                   <a:srgbClr val="0B211A"/>
                 </a:solidFill>
-                <a:latin typeface="Helvetica Neue"/>
-                <a:ea typeface="Helvetica Neue"/>
-                <a:cs typeface="Helvetica Neue"/>
+                <a:latin typeface="Liberation Sans"/>
+                <a:ea typeface="Liberation Sans"/>
+                <a:cs typeface="Liberation Sans"/>
               </a:defRPr>
             </a:pPr>
             <a:r>
@@ -6907,9 +6907,9 @@
                 <a:solidFill>
                   <a:srgbClr val="0B211A"/>
                 </a:solidFill>
-                <a:latin typeface="Helvetica Neue"/>
-                <a:ea typeface="Helvetica Neue"/>
-                <a:cs typeface="Helvetica Neue"/>
+                <a:latin typeface="Liberation Sans"/>
+                <a:ea typeface="Liberation Sans"/>
+                <a:cs typeface="Liberation Sans"/>
               </a:rPr>
               <a:t>Coordinator</a:t>
             </a:r>
@@ -6921,7 +6921,7 @@
           <p:cNvPr id="18" name="">
             <a:extLst xmlns:a="http://schemas.openxmlformats.org/drawingml/2006/main">
               <a:ext uri="{FF2B5EF4-FFF2-40B4-BE49-F238E27FC236}">
-                <a16:creationId xmlns:a16="http://schemas.microsoft.com/office/drawing/2014/main" id="{D77DE00C-EE73-44FF-A469-95E18811CBD7}"/>
+                <a16:creationId xmlns:a16="http://schemas.microsoft.com/office/drawing/2014/main" id="{393DCF02-FE16-4BDB-9E5E-86135ADEC9B1}"/>
               </a:ext>
             </a:extLst>
           </p:cNvPr>
@@ -6954,9 +6954,9 @@
                 <a:solidFill>
                   <a:srgbClr val="667A72"/>
                 </a:solidFill>
-                <a:latin typeface="Helvetica Neue"/>
-                <a:ea typeface="Helvetica Neue"/>
-                <a:cs typeface="Helvetica Neue"/>
+                <a:latin typeface="Liberation Sans"/>
+                <a:ea typeface="Liberation Sans"/>
+                <a:cs typeface="Liberation Sans"/>
               </a:defRPr>
             </a:pPr>
             <a:r>
@@ -6964,9 +6964,9 @@
                 <a:solidFill>
                   <a:srgbClr val="667A72"/>
                 </a:solidFill>
-                <a:latin typeface="Helvetica Neue"/>
-                <a:ea typeface="Helvetica Neue"/>
-                <a:cs typeface="Helvetica Neue"/>
+                <a:latin typeface="Liberation Sans"/>
+                <a:ea typeface="Liberation Sans"/>
+                <a:cs typeface="Liberation Sans"/>
               </a:rPr>
               <a:t>rank + explain</a:t>
             </a:r>
@@ -6978,7 +6978,7 @@
           <p:cNvPr id="19" name="">
             <a:extLst xmlns:a="http://schemas.openxmlformats.org/drawingml/2006/main">
               <a:ext uri="{FF2B5EF4-FFF2-40B4-BE49-F238E27FC236}">
-                <a16:creationId xmlns:a16="http://schemas.microsoft.com/office/drawing/2014/main" id="{439D3F45-4E4B-49ED-AEE5-1CEBE48D4649}"/>
+                <a16:creationId xmlns:a16="http://schemas.microsoft.com/office/drawing/2014/main" id="{3BFACF9D-2DCD-4C97-A214-2CB422458C96}"/>
               </a:ext>
             </a:extLst>
           </p:cNvPr>
@@ -7010,7 +7010,7 @@
           <p:cNvPr id="20" name="">
             <a:extLst xmlns:a="http://schemas.openxmlformats.org/drawingml/2006/main">
               <a:ext uri="{FF2B5EF4-FFF2-40B4-BE49-F238E27FC236}">
-                <a16:creationId xmlns:a16="http://schemas.microsoft.com/office/drawing/2014/main" id="{D36FF8C5-89E4-48E9-AA1C-EA863F78025E}"/>
+                <a16:creationId xmlns:a16="http://schemas.microsoft.com/office/drawing/2014/main" id="{6D81C0BF-043C-4923-87B5-B9F103FAF6AA}"/>
               </a:ext>
             </a:extLst>
           </p:cNvPr>
@@ -7043,9 +7043,9 @@
                 <a:solidFill>
                   <a:srgbClr val="0B211A"/>
                 </a:solidFill>
-                <a:latin typeface="Helvetica Neue"/>
-                <a:ea typeface="Helvetica Neue"/>
-                <a:cs typeface="Helvetica Neue"/>
+                <a:latin typeface="Liberation Sans"/>
+                <a:ea typeface="Liberation Sans"/>
+                <a:cs typeface="Liberation Sans"/>
               </a:defRPr>
             </a:pPr>
             <a:r>
@@ -7053,9 +7053,9 @@
                 <a:solidFill>
                   <a:srgbClr val="0B211A"/>
                 </a:solidFill>
-                <a:latin typeface="Helvetica Neue"/>
-                <a:ea typeface="Helvetica Neue"/>
-                <a:cs typeface="Helvetica Neue"/>
+                <a:latin typeface="Liberation Sans"/>
+                <a:ea typeface="Liberation Sans"/>
+                <a:cs typeface="Liberation Sans"/>
               </a:rPr>
               <a:t>React</a:t>
             </a:r>
@@ -7067,7 +7067,7 @@
           <p:cNvPr id="21" name="">
             <a:extLst xmlns:a="http://schemas.openxmlformats.org/drawingml/2006/main">
               <a:ext uri="{FF2B5EF4-FFF2-40B4-BE49-F238E27FC236}">
-                <a16:creationId xmlns:a16="http://schemas.microsoft.com/office/drawing/2014/main" id="{0C09BF6E-6294-4DCE-96AC-4F2657D6E780}"/>
+                <a16:creationId xmlns:a16="http://schemas.microsoft.com/office/drawing/2014/main" id="{CB83596D-5125-452C-8802-B2ADA8734A30}"/>
               </a:ext>
             </a:extLst>
           </p:cNvPr>
@@ -7100,9 +7100,9 @@
                 <a:solidFill>
                   <a:srgbClr val="667A72"/>
                 </a:solidFill>
-                <a:latin typeface="Helvetica Neue"/>
-                <a:ea typeface="Helvetica Neue"/>
-                <a:cs typeface="Helvetica Neue"/>
+                <a:latin typeface="Liberation Sans"/>
+                <a:ea typeface="Liberation Sans"/>
+                <a:cs typeface="Liberation Sans"/>
               </a:defRPr>
             </a:pPr>
             <a:r>
@@ -7110,9 +7110,9 @@
                 <a:solidFill>
                   <a:srgbClr val="667A72"/>
                 </a:solidFill>
-                <a:latin typeface="Helvetica Neue"/>
-                <a:ea typeface="Helvetica Neue"/>
-                <a:cs typeface="Helvetica Neue"/>
+                <a:latin typeface="Liberation Sans"/>
+                <a:ea typeface="Liberation Sans"/>
+                <a:cs typeface="Liberation Sans"/>
               </a:rPr>
               <a:t>compare</a:t>
             </a:r>
@@ -7124,7 +7124,7 @@
           <p:cNvPr id="22" name="">
             <a:extLst xmlns:a="http://schemas.openxmlformats.org/drawingml/2006/main">
               <a:ext uri="{FF2B5EF4-FFF2-40B4-BE49-F238E27FC236}">
-                <a16:creationId xmlns:a16="http://schemas.microsoft.com/office/drawing/2014/main" id="{6F7B1D07-A8A6-4D9C-8DCD-7F487867C9EF}"/>
+                <a16:creationId xmlns:a16="http://schemas.microsoft.com/office/drawing/2014/main" id="{889424B4-08C9-4CB2-8DFF-EBCB876E6BC4}"/>
               </a:ext>
             </a:extLst>
           </p:cNvPr>
@@ -7156,7 +7156,7 @@
           <p:cNvPr id="23" name="">
             <a:extLst xmlns:a="http://schemas.openxmlformats.org/drawingml/2006/main">
               <a:ext uri="{FF2B5EF4-FFF2-40B4-BE49-F238E27FC236}">
-                <a16:creationId xmlns:a16="http://schemas.microsoft.com/office/drawing/2014/main" id="{F7FC15B2-0278-4EBC-B027-54A04E091829}"/>
+                <a16:creationId xmlns:a16="http://schemas.microsoft.com/office/drawing/2014/main" id="{99B23C87-10CA-48D1-9E9F-1DB8AD85E625}"/>
               </a:ext>
             </a:extLst>
           </p:cNvPr>
@@ -7189,9 +7189,9 @@
                 <a:solidFill>
                   <a:srgbClr val="0B211A"/>
                 </a:solidFill>
-                <a:latin typeface="Helvetica Neue"/>
-                <a:ea typeface="Helvetica Neue"/>
-                <a:cs typeface="Helvetica Neue"/>
+                <a:latin typeface="Liberation Sans"/>
+                <a:ea typeface="Liberation Sans"/>
+                <a:cs typeface="Liberation Sans"/>
               </a:defRPr>
             </a:pPr>
             <a:r>
@@ -7199,9 +7199,9 @@
                 <a:solidFill>
                   <a:srgbClr val="0B211A"/>
                 </a:solidFill>
-                <a:latin typeface="Helvetica Neue"/>
-                <a:ea typeface="Helvetica Neue"/>
-                <a:cs typeface="Helvetica Neue"/>
+                <a:latin typeface="Liberation Sans"/>
+                <a:ea typeface="Liberation Sans"/>
+                <a:cs typeface="Liberation Sans"/>
               </a:rPr>
               <a:t>PostgreSQL</a:t>
             </a:r>
@@ -7213,7 +7213,7 @@
           <p:cNvPr id="24" name="">
             <a:extLst xmlns:a="http://schemas.openxmlformats.org/drawingml/2006/main">
               <a:ext uri="{FF2B5EF4-FFF2-40B4-BE49-F238E27FC236}">
-                <a16:creationId xmlns:a16="http://schemas.microsoft.com/office/drawing/2014/main" id="{E3083EEB-993D-44AD-AA61-574ADC9B9D50}"/>
+                <a16:creationId xmlns:a16="http://schemas.microsoft.com/office/drawing/2014/main" id="{CA4FABE0-7385-4737-B7F0-36710E53AF02}"/>
               </a:ext>
             </a:extLst>
           </p:cNvPr>
@@ -7246,9 +7246,9 @@
                 <a:solidFill>
                   <a:srgbClr val="667A72"/>
                 </a:solidFill>
-                <a:latin typeface="Helvetica Neue"/>
-                <a:ea typeface="Helvetica Neue"/>
-                <a:cs typeface="Helvetica Neue"/>
+                <a:latin typeface="Liberation Sans"/>
+                <a:ea typeface="Liberation Sans"/>
+                <a:cs typeface="Liberation Sans"/>
               </a:defRPr>
             </a:pPr>
             <a:r>
@@ -7256,9 +7256,9 @@
                 <a:solidFill>
                   <a:srgbClr val="667A72"/>
                 </a:solidFill>
-                <a:latin typeface="Helvetica Neue"/>
-                <a:ea typeface="Helvetica Neue"/>
-                <a:cs typeface="Helvetica Neue"/>
+                <a:latin typeface="Liberation Sans"/>
+                <a:ea typeface="Liberation Sans"/>
+                <a:cs typeface="Liberation Sans"/>
               </a:rPr>
               <a:t>audit</a:t>
             </a:r>
@@ -7270,7 +7270,7 @@
           <p:cNvPr id="25" name="">
             <a:extLst xmlns:a="http://schemas.openxmlformats.org/drawingml/2006/main">
               <a:ext uri="{FF2B5EF4-FFF2-40B4-BE49-F238E27FC236}">
-                <a16:creationId xmlns:a16="http://schemas.microsoft.com/office/drawing/2014/main" id="{77891047-C0FC-4F25-B7F1-1E4CEAC58E53}"/>
+                <a16:creationId xmlns:a16="http://schemas.microsoft.com/office/drawing/2014/main" id="{4080F21E-A9AC-485E-8F9D-B053BECC7DC3}"/>
               </a:ext>
             </a:extLst>
           </p:cNvPr>
@@ -7303,9 +7303,9 @@
                 <a:solidFill>
                   <a:srgbClr val="08775A"/>
                 </a:solidFill>
-                <a:latin typeface="Helvetica Neue"/>
-                <a:ea typeface="Helvetica Neue"/>
-                <a:cs typeface="Helvetica Neue"/>
+                <a:latin typeface="Liberation Sans"/>
+                <a:ea typeface="Liberation Sans"/>
+                <a:cs typeface="Liberation Sans"/>
               </a:defRPr>
             </a:pPr>
             <a:r>
@@ -7313,9 +7313,9 @@
                 <a:solidFill>
                   <a:srgbClr val="08775A"/>
                 </a:solidFill>
-                <a:latin typeface="Helvetica Neue"/>
-                <a:ea typeface="Helvetica Neue"/>
-                <a:cs typeface="Helvetica Neue"/>
+                <a:latin typeface="Liberation Sans"/>
+                <a:ea typeface="Liberation Sans"/>
+                <a:cs typeface="Liberation Sans"/>
               </a:rPr>
               <a:t>→</a:t>
             </a:r>
@@ -7327,7 +7327,7 @@
           <p:cNvPr id="26" name="">
             <a:extLst xmlns:a="http://schemas.openxmlformats.org/drawingml/2006/main">
               <a:ext uri="{FF2B5EF4-FFF2-40B4-BE49-F238E27FC236}">
-                <a16:creationId xmlns:a16="http://schemas.microsoft.com/office/drawing/2014/main" id="{9C97F37D-B500-4C11-9CD3-0E2D50815115}"/>
+                <a16:creationId xmlns:a16="http://schemas.microsoft.com/office/drawing/2014/main" id="{52E8410A-2C15-49D6-93A6-D428CAC5D885}"/>
               </a:ext>
             </a:extLst>
           </p:cNvPr>
@@ -7360,9 +7360,9 @@
                 <a:solidFill>
                   <a:srgbClr val="08775A"/>
                 </a:solidFill>
-                <a:latin typeface="Helvetica Neue"/>
-                <a:ea typeface="Helvetica Neue"/>
-                <a:cs typeface="Helvetica Neue"/>
+                <a:latin typeface="Liberation Sans"/>
+                <a:ea typeface="Liberation Sans"/>
+                <a:cs typeface="Liberation Sans"/>
               </a:defRPr>
             </a:pPr>
             <a:r>
@@ -7370,9 +7370,9 @@
                 <a:solidFill>
                   <a:srgbClr val="08775A"/>
                 </a:solidFill>
-                <a:latin typeface="Helvetica Neue"/>
-                <a:ea typeface="Helvetica Neue"/>
-                <a:cs typeface="Helvetica Neue"/>
+                <a:latin typeface="Liberation Sans"/>
+                <a:ea typeface="Liberation Sans"/>
+                <a:cs typeface="Liberation Sans"/>
               </a:rPr>
               <a:t>→</a:t>
             </a:r>
@@ -7384,7 +7384,7 @@
           <p:cNvPr id="27" name="">
             <a:extLst xmlns:a="http://schemas.openxmlformats.org/drawingml/2006/main">
               <a:ext uri="{FF2B5EF4-FFF2-40B4-BE49-F238E27FC236}">
-                <a16:creationId xmlns:a16="http://schemas.microsoft.com/office/drawing/2014/main" id="{AA6544AD-BDB4-4EC8-B55D-A3227B09AB07}"/>
+                <a16:creationId xmlns:a16="http://schemas.microsoft.com/office/drawing/2014/main" id="{D15ACBB8-03E1-41A9-A7DC-AC74465D6032}"/>
               </a:ext>
             </a:extLst>
           </p:cNvPr>
@@ -7417,9 +7417,9 @@
                 <a:solidFill>
                   <a:srgbClr val="08775A"/>
                 </a:solidFill>
-                <a:latin typeface="Helvetica Neue"/>
-                <a:ea typeface="Helvetica Neue"/>
-                <a:cs typeface="Helvetica Neue"/>
+                <a:latin typeface="Liberation Sans"/>
+                <a:ea typeface="Liberation Sans"/>
+                <a:cs typeface="Liberation Sans"/>
               </a:defRPr>
             </a:pPr>
             <a:r>
@@ -7427,9 +7427,9 @@
                 <a:solidFill>
                   <a:srgbClr val="08775A"/>
                 </a:solidFill>
-                <a:latin typeface="Helvetica Neue"/>
-                <a:ea typeface="Helvetica Neue"/>
-                <a:cs typeface="Helvetica Neue"/>
+                <a:latin typeface="Liberation Sans"/>
+                <a:ea typeface="Liberation Sans"/>
+                <a:cs typeface="Liberation Sans"/>
               </a:rPr>
               <a:t>→</a:t>
             </a:r>
@@ -7441,7 +7441,7 @@
           <p:cNvPr id="28" name="">
             <a:extLst xmlns:a="http://schemas.openxmlformats.org/drawingml/2006/main">
               <a:ext uri="{FF2B5EF4-FFF2-40B4-BE49-F238E27FC236}">
-                <a16:creationId xmlns:a16="http://schemas.microsoft.com/office/drawing/2014/main" id="{07ACD535-E666-4A4D-BE57-0A73EA9E6218}"/>
+                <a16:creationId xmlns:a16="http://schemas.microsoft.com/office/drawing/2014/main" id="{BDED08F0-E36E-4ACE-8432-342F87A6E160}"/>
               </a:ext>
             </a:extLst>
           </p:cNvPr>
@@ -7474,9 +7474,9 @@
                 <a:solidFill>
                   <a:srgbClr val="08775A"/>
                 </a:solidFill>
-                <a:latin typeface="Helvetica Neue"/>
-                <a:ea typeface="Helvetica Neue"/>
-                <a:cs typeface="Helvetica Neue"/>
+                <a:latin typeface="Liberation Sans"/>
+                <a:ea typeface="Liberation Sans"/>
+                <a:cs typeface="Liberation Sans"/>
               </a:defRPr>
             </a:pPr>
             <a:r>
@@ -7484,9 +7484,9 @@
                 <a:solidFill>
                   <a:srgbClr val="08775A"/>
                 </a:solidFill>
-                <a:latin typeface="Helvetica Neue"/>
-                <a:ea typeface="Helvetica Neue"/>
-                <a:cs typeface="Helvetica Neue"/>
+                <a:latin typeface="Liberation Sans"/>
+                <a:ea typeface="Liberation Sans"/>
+                <a:cs typeface="Liberation Sans"/>
               </a:rPr>
               <a:t>→</a:t>
             </a:r>
@@ -7498,7 +7498,7 @@
           <p:cNvPr id="29" name="">
             <a:extLst xmlns:a="http://schemas.openxmlformats.org/drawingml/2006/main">
               <a:ext uri="{FF2B5EF4-FFF2-40B4-BE49-F238E27FC236}">
-                <a16:creationId xmlns:a16="http://schemas.microsoft.com/office/drawing/2014/main" id="{812F74E7-F0E1-40A5-B65F-79FA76E2AB44}"/>
+                <a16:creationId xmlns:a16="http://schemas.microsoft.com/office/drawing/2014/main" id="{BD6B4622-E350-459F-9FD7-56D2D72128E8}"/>
               </a:ext>
             </a:extLst>
           </p:cNvPr>
@@ -7531,9 +7531,9 @@
                 <a:solidFill>
                   <a:srgbClr val="08775A"/>
                 </a:solidFill>
-                <a:latin typeface="Helvetica Neue"/>
-                <a:ea typeface="Helvetica Neue"/>
-                <a:cs typeface="Helvetica Neue"/>
+                <a:latin typeface="Liberation Sans"/>
+                <a:ea typeface="Liberation Sans"/>
+                <a:cs typeface="Liberation Sans"/>
               </a:defRPr>
             </a:pPr>
             <a:r>
@@ -7541,9 +7541,9 @@
                 <a:solidFill>
                   <a:srgbClr val="08775A"/>
                 </a:solidFill>
-                <a:latin typeface="Helvetica Neue"/>
-                <a:ea typeface="Helvetica Neue"/>
-                <a:cs typeface="Helvetica Neue"/>
+                <a:latin typeface="Liberation Sans"/>
+                <a:ea typeface="Liberation Sans"/>
+                <a:cs typeface="Liberation Sans"/>
               </a:rPr>
               <a:t>contracts.py</a:t>
             </a:r>
@@ -7555,7 +7555,7 @@
           <p:cNvPr id="30" name="">
             <a:extLst xmlns:a="http://schemas.openxmlformats.org/drawingml/2006/main">
               <a:ext uri="{FF2B5EF4-FFF2-40B4-BE49-F238E27FC236}">
-                <a16:creationId xmlns:a16="http://schemas.microsoft.com/office/drawing/2014/main" id="{10254A04-CCC4-4B89-82F3-DBEE8F0BD0BB}"/>
+                <a16:creationId xmlns:a16="http://schemas.microsoft.com/office/drawing/2014/main" id="{E206E4E6-2D1D-4D7A-BC73-E747B882F3FC}"/>
               </a:ext>
             </a:extLst>
           </p:cNvPr>
@@ -7588,9 +7588,9 @@
                 <a:solidFill>
                   <a:srgbClr val="667A72"/>
                 </a:solidFill>
-                <a:latin typeface="Helvetica Neue"/>
-                <a:ea typeface="Helvetica Neue"/>
-                <a:cs typeface="Helvetica Neue"/>
+                <a:latin typeface="Liberation Sans"/>
+                <a:ea typeface="Liberation Sans"/>
+                <a:cs typeface="Liberation Sans"/>
               </a:defRPr>
             </a:pPr>
             <a:r>
@@ -7598,9 +7598,9 @@
                 <a:solidFill>
                   <a:srgbClr val="667A72"/>
                 </a:solidFill>
-                <a:latin typeface="Helvetica Neue"/>
-                <a:ea typeface="Helvetica Neue"/>
-                <a:cs typeface="Helvetica Neue"/>
+                <a:latin typeface="Liberation Sans"/>
+                <a:ea typeface="Liberation Sans"/>
+                <a:cs typeface="Liberation Sans"/>
               </a:rPr>
               <a:t>единый DTO · OpenAPI · generated TypeScript</a:t>
             </a:r>
@@ -7610,7 +7610,7 @@
     </p:spTree>
     <p:extLst>
       <p:ext uri="{BB962C8B-B14F-4D97-AF65-F5344CB8AC3E}">
-        <p14:creationId xmlns:p14="http://schemas.microsoft.com/office/powerpoint/2010/main" val="482761916"/>
+        <p14:creationId xmlns:p14="http://schemas.microsoft.com/office/powerpoint/2010/main" val="1842621159"/>
       </p:ext>
     </p:extLst>
   </p:cSld>
@@ -7641,7 +7641,7 @@
           <p:cNvPr id="14" name="">
             <a:extLst xmlns:a="http://schemas.openxmlformats.org/drawingml/2006/main">
               <a:ext uri="{FF2B5EF4-FFF2-40B4-BE49-F238E27FC236}">
-                <a16:creationId xmlns:a16="http://schemas.microsoft.com/office/drawing/2014/main" id="{4FCDCEAA-0394-4B77-9E5C-007A0AFD54C0}"/>
+                <a16:creationId xmlns:a16="http://schemas.microsoft.com/office/drawing/2014/main" id="{9C328E74-248E-4355-9D61-8651B0E553F8}"/>
               </a:ext>
             </a:extLst>
           </p:cNvPr>
@@ -7674,9 +7674,9 @@
                 <a:solidFill>
                   <a:srgbClr val="08775A"/>
                 </a:solidFill>
-                <a:latin typeface="Helvetica Neue"/>
-                <a:ea typeface="Helvetica Neue"/>
-                <a:cs typeface="Helvetica Neue"/>
+                <a:latin typeface="Liberation Sans"/>
+                <a:ea typeface="Liberation Sans"/>
+                <a:cs typeface="Liberation Sans"/>
               </a:defRPr>
             </a:pPr>
             <a:r>
@@ -7684,9 +7684,9 @@
                 <a:solidFill>
                   <a:srgbClr val="08775A"/>
                 </a:solidFill>
-                <a:latin typeface="Helvetica Neue"/>
-                <a:ea typeface="Helvetica Neue"/>
-                <a:cs typeface="Helvetica Neue"/>
+                <a:latin typeface="Liberation Sans"/>
+                <a:ea typeface="Liberation Sans"/>
+                <a:cs typeface="Liberation Sans"/>
               </a:rPr>
               <a:t>КАЧЕСТВО HISTORICAL FORECAST</a:t>
             </a:r>
@@ -7698,7 +7698,7 @@
           <p:cNvPr id="2" name="">
             <a:extLst xmlns:a="http://schemas.openxmlformats.org/drawingml/2006/main">
               <a:ext uri="{FF2B5EF4-FFF2-40B4-BE49-F238E27FC236}">
-                <a16:creationId xmlns:a16="http://schemas.microsoft.com/office/drawing/2014/main" id="{6D8D11C1-5A30-4EF5-86B4-BC24A9C61957}"/>
+                <a16:creationId xmlns:a16="http://schemas.microsoft.com/office/drawing/2014/main" id="{49B521D5-7C45-4A99-ADC7-A9F240858171}"/>
               </a:ext>
             </a:extLst>
           </p:cNvPr>
@@ -7731,9 +7731,9 @@
                 <a:solidFill>
                   <a:srgbClr val="0B211A"/>
                 </a:solidFill>
-                <a:latin typeface="Helvetica Neue"/>
-                <a:ea typeface="Helvetica Neue"/>
-                <a:cs typeface="Helvetica Neue"/>
+                <a:latin typeface="Liberation Sans"/>
+                <a:ea typeface="Liberation Sans"/>
+                <a:cs typeface="Liberation Sans"/>
               </a:defRPr>
             </a:pPr>
             <a:r>
@@ -7741,9 +7741,9 @@
                 <a:solidFill>
                   <a:srgbClr val="0B211A"/>
                 </a:solidFill>
-                <a:latin typeface="Helvetica Neue"/>
-                <a:ea typeface="Helvetica Neue"/>
-                <a:cs typeface="Helvetica Neue"/>
+                <a:latin typeface="Liberation Sans"/>
+                <a:ea typeface="Liberation Sans"/>
+                <a:cs typeface="Liberation Sans"/>
               </a:rPr>
               <a:t>Простая модель победила — и мы это показали</a:t>
             </a:r>
@@ -7755,7 +7755,7 @@
           <p:cNvPr id="3" name="">
             <a:extLst xmlns:a="http://schemas.openxmlformats.org/drawingml/2006/main">
               <a:ext uri="{FF2B5EF4-FFF2-40B4-BE49-F238E27FC236}">
-                <a16:creationId xmlns:a16="http://schemas.microsoft.com/office/drawing/2014/main" id="{A03FF47B-5E6D-4E29-A22E-0D97F596B91B}"/>
+                <a16:creationId xmlns:a16="http://schemas.microsoft.com/office/drawing/2014/main" id="{C947AEED-4980-48AD-8AEB-C6A7FBB48B3B}"/>
               </a:ext>
             </a:extLst>
           </p:cNvPr>
@@ -7788,9 +7788,9 @@
                 <a:solidFill>
                   <a:srgbClr val="667A72"/>
                 </a:solidFill>
-                <a:latin typeface="Helvetica Neue"/>
-                <a:ea typeface="Helvetica Neue"/>
-                <a:cs typeface="Helvetica Neue"/>
+                <a:latin typeface="Liberation Sans"/>
+                <a:ea typeface="Liberation Sans"/>
+                <a:cs typeface="Liberation Sans"/>
               </a:defRPr>
             </a:pPr>
             <a:r>
@@ -7798,9 +7798,9 @@
                 <a:solidFill>
                   <a:srgbClr val="667A72"/>
                 </a:solidFill>
-                <a:latin typeface="Helvetica Neue"/>
-                <a:ea typeface="Helvetica Neue"/>
-                <a:cs typeface="Helvetica Neue"/>
+                <a:latin typeface="Liberation Sans"/>
+                <a:ea typeface="Liberation Sans"/>
+                <a:cs typeface="Liberation Sans"/>
               </a:rPr>
               <a:t>05</a:t>
             </a:r>
@@ -7819,7 +7819,7 @@
         </p:xfrm>
         <a:graphic xmlns:a="http://schemas.openxmlformats.org/drawingml/2006/main">
           <a:graphicData uri="http://schemas.openxmlformats.org/drawingml/2006/chart">
-            <c:chart xmlns:r="http://schemas.openxmlformats.org/officeDocument/2006/relationships" xmlns:c="http://schemas.openxmlformats.org/drawingml/2006/chart" r:id="Rf0da62b91da3444c"/>
+            <c:chart xmlns:r="http://schemas.openxmlformats.org/officeDocument/2006/relationships" xmlns:c="http://schemas.openxmlformats.org/drawingml/2006/chart" r:id="R235ff9d822e549c0"/>
           </a:graphicData>
         </a:graphic>
       </p:graphicFrame>
@@ -7828,7 +7828,7 @@
           <p:cNvPr id="5" name="">
             <a:extLst xmlns:a="http://schemas.openxmlformats.org/drawingml/2006/main">
               <a:ext uri="{FF2B5EF4-FFF2-40B4-BE49-F238E27FC236}">
-                <a16:creationId xmlns:a16="http://schemas.microsoft.com/office/drawing/2014/main" id="{D143AAC4-A667-4CC4-8097-C14DFEB02702}"/>
+                <a16:creationId xmlns:a16="http://schemas.microsoft.com/office/drawing/2014/main" id="{409F05E7-CC2D-48F3-AF15-4ABCD006AD0E}"/>
               </a:ext>
             </a:extLst>
           </p:cNvPr>
@@ -7861,9 +7861,9 @@
                 <a:solidFill>
                   <a:srgbClr val="667A72"/>
                 </a:solidFill>
-                <a:latin typeface="Helvetica Neue"/>
-                <a:ea typeface="Helvetica Neue"/>
-                <a:cs typeface="Helvetica Neue"/>
+                <a:latin typeface="Liberation Sans"/>
+                <a:ea typeface="Liberation Sans"/>
+                <a:cs typeface="Liberation Sans"/>
               </a:defRPr>
             </a:pPr>
             <a:r>
@@ -7871,9 +7871,9 @@
                 <a:solidFill>
                   <a:srgbClr val="667A72"/>
                 </a:solidFill>
-                <a:latin typeface="Helvetica Neue"/>
-                <a:ea typeface="Helvetica Neue"/>
-                <a:cs typeface="Helvetica Neue"/>
+                <a:latin typeface="Liberation Sans"/>
+                <a:ea typeface="Liberation Sans"/>
+                <a:cs typeface="Liberation Sans"/>
               </a:rPr>
               <a:t>MAE, мг/кг</a:t>
             </a:r>
@@ -7885,7 +7885,7 @@
           <p:cNvPr id="6" name="">
             <a:extLst xmlns:a="http://schemas.openxmlformats.org/drawingml/2006/main">
               <a:ext uri="{FF2B5EF4-FFF2-40B4-BE49-F238E27FC236}">
-                <a16:creationId xmlns:a16="http://schemas.microsoft.com/office/drawing/2014/main" id="{4ABD9777-2F46-41C8-9B02-7D4BDE39DD4B}"/>
+                <a16:creationId xmlns:a16="http://schemas.microsoft.com/office/drawing/2014/main" id="{70394DAB-E179-468B-AE8E-677CD0B3D256}"/>
               </a:ext>
             </a:extLst>
           </p:cNvPr>
@@ -7917,7 +7917,7 @@
           <p:cNvPr id="7" name="">
             <a:extLst xmlns:a="http://schemas.openxmlformats.org/drawingml/2006/main">
               <a:ext uri="{FF2B5EF4-FFF2-40B4-BE49-F238E27FC236}">
-                <a16:creationId xmlns:a16="http://schemas.microsoft.com/office/drawing/2014/main" id="{9CB9EDD3-E17F-46D8-9A58-0E736CD9E9F1}"/>
+                <a16:creationId xmlns:a16="http://schemas.microsoft.com/office/drawing/2014/main" id="{6F5F019F-A8BE-4F64-A241-B2C8679AF435}"/>
               </a:ext>
             </a:extLst>
           </p:cNvPr>
@@ -7950,9 +7950,9 @@
                 <a:solidFill>
                   <a:srgbClr val="9DE8CA"/>
                 </a:solidFill>
-                <a:latin typeface="Helvetica Neue"/>
-                <a:ea typeface="Helvetica Neue"/>
-                <a:cs typeface="Helvetica Neue"/>
+                <a:latin typeface="Liberation Sans"/>
+                <a:ea typeface="Liberation Sans"/>
+                <a:cs typeface="Liberation Sans"/>
               </a:defRPr>
             </a:pPr>
             <a:r>
@@ -7960,9 +7960,9 @@
                 <a:solidFill>
                   <a:srgbClr val="9DE8CA"/>
                 </a:solidFill>
-                <a:latin typeface="Helvetica Neue"/>
-                <a:ea typeface="Helvetica Neue"/>
-                <a:cs typeface="Helvetica Neue"/>
+                <a:latin typeface="Liberation Sans"/>
+                <a:ea typeface="Liberation Sans"/>
+                <a:cs typeface="Liberation Sans"/>
               </a:rPr>
               <a:t>0,706</a:t>
             </a:r>
@@ -7974,7 +7974,7 @@
           <p:cNvPr id="8" name="">
             <a:extLst xmlns:a="http://schemas.openxmlformats.org/drawingml/2006/main">
               <a:ext uri="{FF2B5EF4-FFF2-40B4-BE49-F238E27FC236}">
-                <a16:creationId xmlns:a16="http://schemas.microsoft.com/office/drawing/2014/main" id="{4D9158BE-211E-4926-92BB-9E4406FF31FF}"/>
+                <a16:creationId xmlns:a16="http://schemas.microsoft.com/office/drawing/2014/main" id="{DF3B685C-1069-420E-B562-7F6CE57A06F1}"/>
               </a:ext>
             </a:extLst>
           </p:cNvPr>
@@ -8007,9 +8007,9 @@
                 <a:solidFill>
                   <a:srgbClr val="FFFFFF"/>
                 </a:solidFill>
-                <a:latin typeface="Helvetica Neue"/>
-                <a:ea typeface="Helvetica Neue"/>
-                <a:cs typeface="Helvetica Neue"/>
+                <a:latin typeface="Liberation Sans"/>
+                <a:ea typeface="Liberation Sans"/>
+                <a:cs typeface="Liberation Sans"/>
               </a:defRPr>
             </a:pPr>
             <a:r>
@@ -8017,9 +8017,9 @@
                 <a:solidFill>
                   <a:srgbClr val="FFFFFF"/>
                 </a:solidFill>
-                <a:latin typeface="Helvetica Neue"/>
-                <a:ea typeface="Helvetica Neue"/>
-                <a:cs typeface="Helvetica Neue"/>
+                <a:latin typeface="Liberation Sans"/>
+                <a:ea typeface="Liberation Sans"/>
+                <a:cs typeface="Liberation Sans"/>
               </a:rPr>
               <a:t>test MAE · n=28 447</a:t>
             </a:r>
@@ -8031,7 +8031,7 @@
           <p:cNvPr id="9" name="">
             <a:extLst xmlns:a="http://schemas.openxmlformats.org/drawingml/2006/main">
               <a:ext uri="{FF2B5EF4-FFF2-40B4-BE49-F238E27FC236}">
-                <a16:creationId xmlns:a16="http://schemas.microsoft.com/office/drawing/2014/main" id="{3B1E521B-CB51-412C-9B94-48D54490DF60}"/>
+                <a16:creationId xmlns:a16="http://schemas.microsoft.com/office/drawing/2014/main" id="{56F71C80-56FC-49C3-ACAD-BBABCB3B6886}"/>
               </a:ext>
             </a:extLst>
           </p:cNvPr>
@@ -8063,7 +8063,7 @@
           <p:cNvPr id="10" name="">
             <a:extLst xmlns:a="http://schemas.openxmlformats.org/drawingml/2006/main">
               <a:ext uri="{FF2B5EF4-FFF2-40B4-BE49-F238E27FC236}">
-                <a16:creationId xmlns:a16="http://schemas.microsoft.com/office/drawing/2014/main" id="{7E5709FE-C626-471D-9CB5-975584BB9547}"/>
+                <a16:creationId xmlns:a16="http://schemas.microsoft.com/office/drawing/2014/main" id="{BEF11873-59F0-407A-B69B-E4FABF60D197}"/>
               </a:ext>
             </a:extLst>
           </p:cNvPr>
@@ -8096,9 +8096,9 @@
                 <a:solidFill>
                   <a:srgbClr val="08775A"/>
                 </a:solidFill>
-                <a:latin typeface="Helvetica Neue"/>
-                <a:ea typeface="Helvetica Neue"/>
-                <a:cs typeface="Helvetica Neue"/>
+                <a:latin typeface="Liberation Sans"/>
+                <a:ea typeface="Liberation Sans"/>
+                <a:cs typeface="Liberation Sans"/>
               </a:defRPr>
             </a:pPr>
             <a:r>
@@ -8106,9 +8106,9 @@
                 <a:solidFill>
                   <a:srgbClr val="08775A"/>
                 </a:solidFill>
-                <a:latin typeface="Helvetica Neue"/>
-                <a:ea typeface="Helvetica Neue"/>
-                <a:cs typeface="Helvetica Neue"/>
+                <a:latin typeface="Liberation Sans"/>
+                <a:ea typeface="Liberation Sans"/>
+                <a:cs typeface="Liberation Sans"/>
               </a:rPr>
               <a:t>81,9%</a:t>
             </a:r>
@@ -8120,7 +8120,7 @@
           <p:cNvPr id="11" name="">
             <a:extLst xmlns:a="http://schemas.openxmlformats.org/drawingml/2006/main">
               <a:ext uri="{FF2B5EF4-FFF2-40B4-BE49-F238E27FC236}">
-                <a16:creationId xmlns:a16="http://schemas.microsoft.com/office/drawing/2014/main" id="{2AAACAB7-09CF-48AC-AFBB-2A02B79FA9AD}"/>
+                <a16:creationId xmlns:a16="http://schemas.microsoft.com/office/drawing/2014/main" id="{33D07EE8-EB25-431D-9CB4-4A131F17BF37}"/>
               </a:ext>
             </a:extLst>
           </p:cNvPr>
@@ -8153,9 +8153,9 @@
                 <a:solidFill>
                   <a:srgbClr val="0B211A"/>
                 </a:solidFill>
-                <a:latin typeface="Helvetica Neue"/>
-                <a:ea typeface="Helvetica Neue"/>
-                <a:cs typeface="Helvetica Neue"/>
+                <a:latin typeface="Liberation Sans"/>
+                <a:ea typeface="Liberation Sans"/>
+                <a:cs typeface="Liberation Sans"/>
               </a:defRPr>
             </a:pPr>
             <a:r>
@@ -8163,9 +8163,9 @@
                 <a:solidFill>
                   <a:srgbClr val="0B211A"/>
                 </a:solidFill>
-                <a:latin typeface="Helvetica Neue"/>
-                <a:ea typeface="Helvetica Neue"/>
-                <a:cs typeface="Helvetica Neue"/>
+                <a:latin typeface="Liberation Sans"/>
+                <a:ea typeface="Liberation Sans"/>
+                <a:cs typeface="Liberation Sans"/>
               </a:rPr>
               <a:t>test coverage q90</a:t>
             </a:r>
@@ -8177,7 +8177,7 @@
           <p:cNvPr id="12" name="">
             <a:extLst xmlns:a="http://schemas.openxmlformats.org/drawingml/2006/main">
               <a:ext uri="{FF2B5EF4-FFF2-40B4-BE49-F238E27FC236}">
-                <a16:creationId xmlns:a16="http://schemas.microsoft.com/office/drawing/2014/main" id="{5F2D7C00-3B05-4842-BCDF-2CF02BD1F255}"/>
+                <a16:creationId xmlns:a16="http://schemas.microsoft.com/office/drawing/2014/main" id="{A350C4CC-5629-498A-8360-2EAB32AA940D}"/>
               </a:ext>
             </a:extLst>
           </p:cNvPr>
@@ -8210,9 +8210,9 @@
                 <a:solidFill>
                   <a:srgbClr val="667A72"/>
                 </a:solidFill>
-                <a:latin typeface="Helvetica Neue"/>
-                <a:ea typeface="Helvetica Neue"/>
-                <a:cs typeface="Helvetica Neue"/>
+                <a:latin typeface="Liberation Sans"/>
+                <a:ea typeface="Liberation Sans"/>
+                <a:cs typeface="Liberation Sans"/>
               </a:defRPr>
             </a:pPr>
             <a:r>
@@ -8220,9 +8220,9 @@
                 <a:solidFill>
                   <a:srgbClr val="667A72"/>
                 </a:solidFill>
-                <a:latin typeface="Helvetica Neue"/>
-                <a:ea typeface="Helvetica Neue"/>
-                <a:cs typeface="Helvetica Neue"/>
+                <a:latin typeface="Liberation Sans"/>
+                <a:ea typeface="Liberation Sans"/>
+                <a:cs typeface="Liberation Sans"/>
               </a:rPr>
               <a:t>Интервал откалиброван на validation; на test только измерен.</a:t>
             </a:r>
@@ -8234,7 +8234,7 @@
           <p:cNvPr id="13" name="">
             <a:extLst xmlns:a="http://schemas.openxmlformats.org/drawingml/2006/main">
               <a:ext uri="{FF2B5EF4-FFF2-40B4-BE49-F238E27FC236}">
-                <a16:creationId xmlns:a16="http://schemas.microsoft.com/office/drawing/2014/main" id="{52B14AE3-BC37-4190-980E-ADEFA55758FB}"/>
+                <a16:creationId xmlns:a16="http://schemas.microsoft.com/office/drawing/2014/main" id="{1BB30E0B-8928-4CAF-B201-A27F0C840CB7}"/>
               </a:ext>
             </a:extLst>
           </p:cNvPr>
@@ -8267,9 +8267,9 @@
                 <a:solidFill>
                   <a:srgbClr val="B34A40"/>
                 </a:solidFill>
-                <a:latin typeface="Helvetica Neue"/>
-                <a:ea typeface="Helvetica Neue"/>
-                <a:cs typeface="Helvetica Neue"/>
+                <a:latin typeface="Liberation Sans"/>
+                <a:ea typeface="Liberation Sans"/>
+                <a:cs typeface="Liberation Sans"/>
               </a:defRPr>
             </a:pPr>
             <a:r>
@@ -8277,9 +8277,9 @@
                 <a:solidFill>
                   <a:srgbClr val="B34A40"/>
                 </a:solidFill>
-                <a:latin typeface="Helvetica Neue"/>
-                <a:ea typeface="Helvetica Neue"/>
-                <a:cs typeface="Helvetica Neue"/>
+                <a:latin typeface="Liberation Sans"/>
+                <a:ea typeface="Liberation Sans"/>
+                <a:cs typeface="Liberation Sans"/>
               </a:rPr>
               <a:t>Это прогноз продолжения процесса, не доказательство эффекта действия.</a:t>
             </a:r>
@@ -8289,7 +8289,7 @@
     </p:spTree>
     <p:extLst>
       <p:ext uri="{BB962C8B-B14F-4D97-AF65-F5344CB8AC3E}">
-        <p14:creationId xmlns:p14="http://schemas.microsoft.com/office/powerpoint/2010/main" val="722803133"/>
+        <p14:creationId xmlns:p14="http://schemas.microsoft.com/office/powerpoint/2010/main" val="2096621698"/>
       </p:ext>
     </p:extLst>
   </p:cSld>
@@ -8320,7 +8320,7 @@
           <p:cNvPr id="17" name="">
             <a:extLst xmlns:a="http://schemas.openxmlformats.org/drawingml/2006/main">
               <a:ext uri="{FF2B5EF4-FFF2-40B4-BE49-F238E27FC236}">
-                <a16:creationId xmlns:a16="http://schemas.microsoft.com/office/drawing/2014/main" id="{15383B32-D1CC-456F-A502-943B680ED0FD}"/>
+                <a16:creationId xmlns:a16="http://schemas.microsoft.com/office/drawing/2014/main" id="{492DA942-A5AE-4E02-9120-AB0B4E7F17DE}"/>
               </a:ext>
             </a:extLst>
           </p:cNvPr>
@@ -8353,9 +8353,9 @@
                 <a:solidFill>
                   <a:srgbClr val="08775A"/>
                 </a:solidFill>
-                <a:latin typeface="Helvetica Neue"/>
-                <a:ea typeface="Helvetica Neue"/>
-                <a:cs typeface="Helvetica Neue"/>
+                <a:latin typeface="Liberation Sans"/>
+                <a:ea typeface="Liberation Sans"/>
+                <a:cs typeface="Liberation Sans"/>
               </a:defRPr>
             </a:pPr>
             <a:r>
@@ -8363,9 +8363,9 @@
                 <a:solidFill>
                   <a:srgbClr val="08775A"/>
                 </a:solidFill>
-                <a:latin typeface="Helvetica Neue"/>
-                <a:ea typeface="Helvetica Neue"/>
-                <a:cs typeface="Helvetica Neue"/>
+                <a:latin typeface="Liberation Sans"/>
+                <a:ea typeface="Liberation Sans"/>
+                <a:cs typeface="Liberation Sans"/>
               </a:rPr>
               <a:t>МОДЕЛЬ ПОЛНОЙ ЦЕПОЧКИ</a:t>
             </a:r>
@@ -8377,7 +8377,7 @@
           <p:cNvPr id="2" name="">
             <a:extLst xmlns:a="http://schemas.openxmlformats.org/drawingml/2006/main">
               <a:ext uri="{FF2B5EF4-FFF2-40B4-BE49-F238E27FC236}">
-                <a16:creationId xmlns:a16="http://schemas.microsoft.com/office/drawing/2014/main" id="{1899B6BF-241B-4C74-8853-2DD636045B0D}"/>
+                <a16:creationId xmlns:a16="http://schemas.microsoft.com/office/drawing/2014/main" id="{AE76857A-7DF8-43E7-8638-E037AF91BD52}"/>
               </a:ext>
             </a:extLst>
           </p:cNvPr>
@@ -8410,9 +8410,9 @@
                 <a:solidFill>
                   <a:srgbClr val="0B211A"/>
                 </a:solidFill>
-                <a:latin typeface="Helvetica Neue"/>
-                <a:ea typeface="Helvetica Neue"/>
-                <a:cs typeface="Helvetica Neue"/>
+                <a:latin typeface="Liberation Sans"/>
+                <a:ea typeface="Liberation Sans"/>
+                <a:cs typeface="Liberation Sans"/>
               </a:defRPr>
             </a:pPr>
             <a:r>
@@ -8420,9 +8420,9 @@
                 <a:solidFill>
                   <a:srgbClr val="0B211A"/>
                 </a:solidFill>
-                <a:latin typeface="Helvetica Neue"/>
-                <a:ea typeface="Helvetica Neue"/>
-                <a:cs typeface="Helvetica Neue"/>
+                <a:latin typeface="Liberation Sans"/>
+                <a:ea typeface="Liberation Sans"/>
+                <a:cs typeface="Liberation Sans"/>
               </a:rPr>
               <a:t>Полная цепочка собрана из проверяемых стадий</a:t>
             </a:r>
@@ -8434,7 +8434,7 @@
           <p:cNvPr id="3" name="">
             <a:extLst xmlns:a="http://schemas.openxmlformats.org/drawingml/2006/main">
               <a:ext uri="{FF2B5EF4-FFF2-40B4-BE49-F238E27FC236}">
-                <a16:creationId xmlns:a16="http://schemas.microsoft.com/office/drawing/2014/main" id="{C62C293B-641E-430F-A364-73F5567B3A95}"/>
+                <a16:creationId xmlns:a16="http://schemas.microsoft.com/office/drawing/2014/main" id="{665C6765-1035-4799-8541-85C2477BEC6D}"/>
               </a:ext>
             </a:extLst>
           </p:cNvPr>
@@ -8467,9 +8467,9 @@
                 <a:solidFill>
                   <a:srgbClr val="667A72"/>
                 </a:solidFill>
-                <a:latin typeface="Helvetica Neue"/>
-                <a:ea typeface="Helvetica Neue"/>
-                <a:cs typeface="Helvetica Neue"/>
+                <a:latin typeface="Liberation Sans"/>
+                <a:ea typeface="Liberation Sans"/>
+                <a:cs typeface="Liberation Sans"/>
               </a:defRPr>
             </a:pPr>
             <a:r>
@@ -8477,9 +8477,9 @@
                 <a:solidFill>
                   <a:srgbClr val="667A72"/>
                 </a:solidFill>
-                <a:latin typeface="Helvetica Neue"/>
-                <a:ea typeface="Helvetica Neue"/>
-                <a:cs typeface="Helvetica Neue"/>
+                <a:latin typeface="Liberation Sans"/>
+                <a:ea typeface="Liberation Sans"/>
+                <a:cs typeface="Liberation Sans"/>
               </a:rPr>
               <a:t>06</a:t>
             </a:r>
@@ -8495,7 +8495,7 @@
           <p:nvPr/>
         </p:nvPicPr>
         <p:blipFill>
-          <a:blip xmlns:r="http://schemas.openxmlformats.org/officeDocument/2006/relationships" xmlns:a="http://schemas.openxmlformats.org/drawingml/2006/main" r:embed="Ra486bfef05f648ea"/>
+          <a:blip xmlns:r="http://schemas.openxmlformats.org/officeDocument/2006/relationships" xmlns:a="http://schemas.openxmlformats.org/drawingml/2006/main" r:embed="R63dccc38c0114666"/>
           <a:stretch xmlns:a="http://schemas.openxmlformats.org/drawingml/2006/main"/>
         </p:blipFill>
         <p:spPr>
@@ -8515,7 +8515,7 @@
           <p:cNvPr id="5" name="">
             <a:extLst xmlns:a="http://schemas.openxmlformats.org/drawingml/2006/main">
               <a:ext uri="{FF2B5EF4-FFF2-40B4-BE49-F238E27FC236}">
-                <a16:creationId xmlns:a16="http://schemas.microsoft.com/office/drawing/2014/main" id="{363557CA-F0ED-4811-A83F-D65AF69C4DF8}"/>
+                <a16:creationId xmlns:a16="http://schemas.microsoft.com/office/drawing/2014/main" id="{C0A66189-51C9-4F9F-8B6A-68D4CA55D418}"/>
               </a:ext>
             </a:extLst>
           </p:cNvPr>
@@ -8547,7 +8547,7 @@
           <p:cNvPr id="6" name="">
             <a:extLst xmlns:a="http://schemas.openxmlformats.org/drawingml/2006/main">
               <a:ext uri="{FF2B5EF4-FFF2-40B4-BE49-F238E27FC236}">
-                <a16:creationId xmlns:a16="http://schemas.microsoft.com/office/drawing/2014/main" id="{DD3F2BD3-316E-4B96-9F15-17AA8332B3E5}"/>
+                <a16:creationId xmlns:a16="http://schemas.microsoft.com/office/drawing/2014/main" id="{D58184C5-54E4-415C-8FA0-67FFE5E34308}"/>
               </a:ext>
             </a:extLst>
           </p:cNvPr>
@@ -8580,9 +8580,9 @@
                 <a:solidFill>
                   <a:srgbClr val="0B211A"/>
                 </a:solidFill>
-                <a:latin typeface="Helvetica Neue"/>
-                <a:ea typeface="Helvetica Neue"/>
-                <a:cs typeface="Helvetica Neue"/>
+                <a:latin typeface="Liberation Sans"/>
+                <a:ea typeface="Liberation Sans"/>
+                <a:cs typeface="Liberation Sans"/>
               </a:defRPr>
             </a:pPr>
             <a:r>
@@ -8590,9 +8590,9 @@
                 <a:solidFill>
                   <a:srgbClr val="0B211A"/>
                 </a:solidFill>
-                <a:latin typeface="Helvetica Neue"/>
-                <a:ea typeface="Helvetica Neue"/>
-                <a:cs typeface="Helvetica Neue"/>
+                <a:latin typeface="Liberation Sans"/>
+                <a:ea typeface="Liberation Sans"/>
+                <a:cs typeface="Liberation Sans"/>
               </a:rPr>
               <a:t>АВТ</a:t>
             </a:r>
@@ -8604,7 +8604,7 @@
           <p:cNvPr id="7" name="">
             <a:extLst xmlns:a="http://schemas.openxmlformats.org/drawingml/2006/main">
               <a:ext uri="{FF2B5EF4-FFF2-40B4-BE49-F238E27FC236}">
-                <a16:creationId xmlns:a16="http://schemas.microsoft.com/office/drawing/2014/main" id="{D170B40A-A519-4C51-B8EC-1B67D74627DD}"/>
+                <a16:creationId xmlns:a16="http://schemas.microsoft.com/office/drawing/2014/main" id="{4F3B1BE1-99A6-4014-9D33-852DDFE4D619}"/>
               </a:ext>
             </a:extLst>
           </p:cNvPr>
@@ -8637,9 +8637,9 @@
                 <a:solidFill>
                   <a:srgbClr val="667A72"/>
                 </a:solidFill>
-                <a:latin typeface="Helvetica Neue"/>
-                <a:ea typeface="Helvetica Neue"/>
-                <a:cs typeface="Helvetica Neue"/>
+                <a:latin typeface="Liberation Sans"/>
+                <a:ea typeface="Liberation Sans"/>
+                <a:cs typeface="Liberation Sans"/>
               </a:defRPr>
             </a:pPr>
             <a:r>
@@ -8647,9 +8647,9 @@
                 <a:solidFill>
                   <a:srgbClr val="667A72"/>
                 </a:solidFill>
-                <a:latin typeface="Helvetica Neue"/>
-                <a:ea typeface="Helvetica Neue"/>
-                <a:cs typeface="Helvetica Neue"/>
+                <a:latin typeface="Liberation Sans"/>
+                <a:ea typeface="Liberation Sans"/>
+                <a:cs typeface="Liberation Sans"/>
               </a:rPr>
               <a:t>VAK: T50/T90/T95</a:t>
             </a:r>
@@ -8660,9 +8660,9 @@
                 <a:solidFill>
                   <a:srgbClr val="667A72"/>
                 </a:solidFill>
-                <a:latin typeface="Helvetica Neue"/>
-                <a:ea typeface="Helvetica Neue"/>
-                <a:cs typeface="Helvetica Neue"/>
+                <a:latin typeface="Liberation Sans"/>
+                <a:ea typeface="Liberation Sans"/>
+                <a:cs typeface="Liberation Sans"/>
               </a:defRPr>
             </a:pPr>
             <a:r>
@@ -8670,9 +8670,9 @@
                 <a:solidFill>
                   <a:srgbClr val="667A72"/>
                 </a:solidFill>
-                <a:latin typeface="Helvetica Neue"/>
-                <a:ea typeface="Helvetica Neue"/>
-                <a:cs typeface="Helvetica Neue"/>
+                <a:latin typeface="Liberation Sans"/>
+                <a:ea typeface="Liberation Sans"/>
+                <a:cs typeface="Liberation Sans"/>
               </a:rPr>
               <a:t>CloudPoint / CFPP</a:t>
             </a:r>
@@ -8684,7 +8684,7 @@
           <p:cNvPr id="8" name="">
             <a:extLst xmlns:a="http://schemas.openxmlformats.org/drawingml/2006/main">
               <a:ext uri="{FF2B5EF4-FFF2-40B4-BE49-F238E27FC236}">
-                <a16:creationId xmlns:a16="http://schemas.microsoft.com/office/drawing/2014/main" id="{21E200BC-EC41-422B-8D8D-160294586CB6}"/>
+                <a16:creationId xmlns:a16="http://schemas.microsoft.com/office/drawing/2014/main" id="{6E4B9D59-833F-450E-95F2-9DF7CE412662}"/>
               </a:ext>
             </a:extLst>
           </p:cNvPr>
@@ -8717,9 +8717,9 @@
                 <a:solidFill>
                   <a:srgbClr val="08775A"/>
                 </a:solidFill>
-                <a:latin typeface="Helvetica Neue"/>
-                <a:ea typeface="Helvetica Neue"/>
-                <a:cs typeface="Helvetica Neue"/>
+                <a:latin typeface="Liberation Sans"/>
+                <a:ea typeface="Liberation Sans"/>
+                <a:cs typeface="Liberation Sans"/>
               </a:defRPr>
             </a:pPr>
             <a:r>
@@ -8727,9 +8727,9 @@
                 <a:solidFill>
                   <a:srgbClr val="08775A"/>
                 </a:solidFill>
-                <a:latin typeface="Helvetica Neue"/>
-                <a:ea typeface="Helvetica Neue"/>
-                <a:cs typeface="Helvetica Neue"/>
+                <a:latin typeface="Liberation Sans"/>
+                <a:ea typeface="Liberation Sans"/>
+                <a:cs typeface="Liberation Sans"/>
               </a:rPr>
               <a:t>↓</a:t>
             </a:r>
@@ -8741,7 +8741,7 @@
           <p:cNvPr id="9" name="">
             <a:extLst xmlns:a="http://schemas.openxmlformats.org/drawingml/2006/main">
               <a:ext uri="{FF2B5EF4-FFF2-40B4-BE49-F238E27FC236}">
-                <a16:creationId xmlns:a16="http://schemas.microsoft.com/office/drawing/2014/main" id="{6D61D7E0-DFF8-4637-A025-F88F75171FAA}"/>
+                <a16:creationId xmlns:a16="http://schemas.microsoft.com/office/drawing/2014/main" id="{39DA4DEF-71D8-478D-919D-855036393D0E}"/>
               </a:ext>
             </a:extLst>
           </p:cNvPr>
@@ -8773,7 +8773,7 @@
           <p:cNvPr id="10" name="">
             <a:extLst xmlns:a="http://schemas.openxmlformats.org/drawingml/2006/main">
               <a:ext uri="{FF2B5EF4-FFF2-40B4-BE49-F238E27FC236}">
-                <a16:creationId xmlns:a16="http://schemas.microsoft.com/office/drawing/2014/main" id="{A717D572-D85C-4CFF-8870-E82E250D0FE3}"/>
+                <a16:creationId xmlns:a16="http://schemas.microsoft.com/office/drawing/2014/main" id="{7FACEFF3-5358-4CF4-B4FF-F9C7C411233E}"/>
               </a:ext>
             </a:extLst>
           </p:cNvPr>
@@ -8806,9 +8806,9 @@
                 <a:solidFill>
                   <a:srgbClr val="FFFFFF"/>
                 </a:solidFill>
-                <a:latin typeface="Helvetica Neue"/>
-                <a:ea typeface="Helvetica Neue"/>
-                <a:cs typeface="Helvetica Neue"/>
+                <a:latin typeface="Liberation Sans"/>
+                <a:ea typeface="Liberation Sans"/>
+                <a:cs typeface="Liberation Sans"/>
               </a:defRPr>
             </a:pPr>
             <a:r>
@@ -8816,9 +8816,9 @@
                 <a:solidFill>
                   <a:srgbClr val="FFFFFF"/>
                 </a:solidFill>
-                <a:latin typeface="Helvetica Neue"/>
-                <a:ea typeface="Helvetica Neue"/>
-                <a:cs typeface="Helvetica Neue"/>
+                <a:latin typeface="Liberation Sans"/>
+                <a:ea typeface="Liberation Sans"/>
+                <a:cs typeface="Liberation Sans"/>
               </a:rPr>
               <a:t>Гидроочистка</a:t>
             </a:r>
@@ -8830,7 +8830,7 @@
           <p:cNvPr id="11" name="">
             <a:extLst xmlns:a="http://schemas.openxmlformats.org/drawingml/2006/main">
               <a:ext uri="{FF2B5EF4-FFF2-40B4-BE49-F238E27FC236}">
-                <a16:creationId xmlns:a16="http://schemas.microsoft.com/office/drawing/2014/main" id="{E9B723F7-5A42-4355-8B41-EF553C0AEA0B}"/>
+                <a16:creationId xmlns:a16="http://schemas.microsoft.com/office/drawing/2014/main" id="{77BDDEA9-36D9-474E-96D9-FC3E96B43CCB}"/>
               </a:ext>
             </a:extLst>
           </p:cNvPr>
@@ -8863,9 +8863,9 @@
                 <a:solidFill>
                   <a:srgbClr val="9DE8CA"/>
                 </a:solidFill>
-                <a:latin typeface="Helvetica Neue"/>
-                <a:ea typeface="Helvetica Neue"/>
-                <a:cs typeface="Helvetica Neue"/>
+                <a:latin typeface="Liberation Sans"/>
+                <a:ea typeface="Liberation Sans"/>
+                <a:cs typeface="Liberation Sans"/>
               </a:defRPr>
             </a:pPr>
             <a:r>
@@ -8873,9 +8873,9 @@
                 <a:solidFill>
                   <a:srgbClr val="9DE8CA"/>
                 </a:solidFill>
-                <a:latin typeface="Helvetica Neue"/>
-                <a:ea typeface="Helvetica Neue"/>
-                <a:cs typeface="Helvetica Neue"/>
+                <a:latin typeface="Liberation Sans"/>
+                <a:ea typeface="Liberation Sans"/>
+                <a:cs typeface="Liberation Sans"/>
               </a:rPr>
               <a:t>P8 · T11 · F19</a:t>
             </a:r>
@@ -8886,9 +8886,9 @@
                 <a:solidFill>
                   <a:srgbClr val="9DE8CA"/>
                 </a:solidFill>
-                <a:latin typeface="Helvetica Neue"/>
-                <a:ea typeface="Helvetica Neue"/>
-                <a:cs typeface="Helvetica Neue"/>
+                <a:latin typeface="Liberation Sans"/>
+                <a:ea typeface="Liberation Sans"/>
+                <a:cs typeface="Liberation Sans"/>
               </a:defRPr>
             </a:pPr>
             <a:r>
@@ -8896,9 +8896,9 @@
                 <a:solidFill>
                   <a:srgbClr val="9DE8CA"/>
                 </a:solidFill>
-                <a:latin typeface="Helvetica Neue"/>
-                <a:ea typeface="Helvetica Neue"/>
-                <a:cs typeface="Helvetica Neue"/>
+                <a:latin typeface="Liberation Sans"/>
+                <a:ea typeface="Liberation Sans"/>
+                <a:cs typeface="Liberation Sans"/>
               </a:rPr>
               <a:t>response + q90</a:t>
             </a:r>
@@ -8910,7 +8910,7 @@
           <p:cNvPr id="12" name="">
             <a:extLst xmlns:a="http://schemas.openxmlformats.org/drawingml/2006/main">
               <a:ext uri="{FF2B5EF4-FFF2-40B4-BE49-F238E27FC236}">
-                <a16:creationId xmlns:a16="http://schemas.microsoft.com/office/drawing/2014/main" id="{4B945916-2BFD-44A8-8BEC-721A2AC1A43D}"/>
+                <a16:creationId xmlns:a16="http://schemas.microsoft.com/office/drawing/2014/main" id="{379DEEE0-2291-4705-9244-306FE132527B}"/>
               </a:ext>
             </a:extLst>
           </p:cNvPr>
@@ -8943,9 +8943,9 @@
                 <a:solidFill>
                   <a:srgbClr val="08775A"/>
                 </a:solidFill>
-                <a:latin typeface="Helvetica Neue"/>
-                <a:ea typeface="Helvetica Neue"/>
-                <a:cs typeface="Helvetica Neue"/>
+                <a:latin typeface="Liberation Sans"/>
+                <a:ea typeface="Liberation Sans"/>
+                <a:cs typeface="Liberation Sans"/>
               </a:defRPr>
             </a:pPr>
             <a:r>
@@ -8953,9 +8953,9 @@
                 <a:solidFill>
                   <a:srgbClr val="08775A"/>
                 </a:solidFill>
-                <a:latin typeface="Helvetica Neue"/>
-                <a:ea typeface="Helvetica Neue"/>
-                <a:cs typeface="Helvetica Neue"/>
+                <a:latin typeface="Liberation Sans"/>
+                <a:ea typeface="Liberation Sans"/>
+                <a:cs typeface="Liberation Sans"/>
               </a:rPr>
               <a:t>↓</a:t>
             </a:r>
@@ -8967,7 +8967,7 @@
           <p:cNvPr id="13" name="">
             <a:extLst xmlns:a="http://schemas.openxmlformats.org/drawingml/2006/main">
               <a:ext uri="{FF2B5EF4-FFF2-40B4-BE49-F238E27FC236}">
-                <a16:creationId xmlns:a16="http://schemas.microsoft.com/office/drawing/2014/main" id="{DD7C54FF-C003-4A35-9436-322421ED14AF}"/>
+                <a16:creationId xmlns:a16="http://schemas.microsoft.com/office/drawing/2014/main" id="{7B8D783E-AA9E-4506-853A-3CEFA252A8D1}"/>
               </a:ext>
             </a:extLst>
           </p:cNvPr>
@@ -8999,7 +8999,7 @@
           <p:cNvPr id="14" name="">
             <a:extLst xmlns:a="http://schemas.openxmlformats.org/drawingml/2006/main">
               <a:ext uri="{FF2B5EF4-FFF2-40B4-BE49-F238E27FC236}">
-                <a16:creationId xmlns:a16="http://schemas.microsoft.com/office/drawing/2014/main" id="{34BB77B6-8C62-4944-B691-5ADF237ADC87}"/>
+                <a16:creationId xmlns:a16="http://schemas.microsoft.com/office/drawing/2014/main" id="{A00771A5-D829-4313-ACD9-38F21C7FCFEC}"/>
               </a:ext>
             </a:extLst>
           </p:cNvPr>
@@ -9032,9 +9032,9 @@
                 <a:solidFill>
                   <a:srgbClr val="0B211A"/>
                 </a:solidFill>
-                <a:latin typeface="Helvetica Neue"/>
-                <a:ea typeface="Helvetica Neue"/>
-                <a:cs typeface="Helvetica Neue"/>
+                <a:latin typeface="Liberation Sans"/>
+                <a:ea typeface="Liberation Sans"/>
+                <a:cs typeface="Liberation Sans"/>
               </a:defRPr>
             </a:pPr>
             <a:r>
@@ -9042,9 +9042,9 @@
                 <a:solidFill>
                   <a:srgbClr val="0B211A"/>
                 </a:solidFill>
-                <a:latin typeface="Helvetica Neue"/>
-                <a:ea typeface="Helvetica Neue"/>
-                <a:cs typeface="Helvetica Neue"/>
+                <a:latin typeface="Liberation Sans"/>
+                <a:ea typeface="Liberation Sans"/>
+                <a:cs typeface="Liberation Sans"/>
               </a:rPr>
               <a:t>Блендинг</a:t>
             </a:r>
@@ -9056,7 +9056,7 @@
           <p:cNvPr id="15" name="">
             <a:extLst xmlns:a="http://schemas.openxmlformats.org/drawingml/2006/main">
               <a:ext uri="{FF2B5EF4-FFF2-40B4-BE49-F238E27FC236}">
-                <a16:creationId xmlns:a16="http://schemas.microsoft.com/office/drawing/2014/main" id="{B4CC5B69-7DFF-4B4D-BCDD-5E92E5BE2829}"/>
+                <a16:creationId xmlns:a16="http://schemas.microsoft.com/office/drawing/2014/main" id="{D8763406-3EBE-4BFC-B2CE-97FA1EAD2F3F}"/>
               </a:ext>
             </a:extLst>
           </p:cNvPr>
@@ -9089,9 +9089,9 @@
                 <a:solidFill>
                   <a:srgbClr val="667A72"/>
                 </a:solidFill>
-                <a:latin typeface="Helvetica Neue"/>
-                <a:ea typeface="Helvetica Neue"/>
-                <a:cs typeface="Helvetica Neue"/>
+                <a:latin typeface="Liberation Sans"/>
+                <a:ea typeface="Liberation Sans"/>
+                <a:cs typeface="Liberation Sans"/>
               </a:defRPr>
             </a:pPr>
             <a:r>
@@ -9099,9 +9099,9 @@
                 <a:solidFill>
                   <a:srgbClr val="667A72"/>
                 </a:solidFill>
-                <a:latin typeface="Helvetica Neue"/>
-                <a:ea typeface="Helvetica Neue"/>
-                <a:cs typeface="Helvetica Neue"/>
+                <a:latin typeface="Liberation Sans"/>
+                <a:ea typeface="Liberation Sans"/>
+                <a:cs typeface="Liberation Sans"/>
               </a:rPr>
               <a:t>S / T95 / ЦЧ</a:t>
             </a:r>
@@ -9112,9 +9112,9 @@
                 <a:solidFill>
                   <a:srgbClr val="667A72"/>
                 </a:solidFill>
-                <a:latin typeface="Helvetica Neue"/>
-                <a:ea typeface="Helvetica Neue"/>
-                <a:cs typeface="Helvetica Neue"/>
+                <a:latin typeface="Liberation Sans"/>
+                <a:ea typeface="Liberation Sans"/>
+                <a:cs typeface="Liberation Sans"/>
               </a:defRPr>
             </a:pPr>
             <a:r>
@@ -9122,9 +9122,9 @@
                 <a:solidFill>
                   <a:srgbClr val="667A72"/>
                 </a:solidFill>
-                <a:latin typeface="Helvetica Neue"/>
-                <a:ea typeface="Helvetica Neue"/>
-                <a:cs typeface="Helvetica Neue"/>
+                <a:latin typeface="Liberation Sans"/>
+                <a:ea typeface="Liberation Sans"/>
+                <a:cs typeface="Liberation Sans"/>
               </a:rPr>
               <a:t>2-EHN + cost proxy</a:t>
             </a:r>
@@ -9136,7 +9136,7 @@
           <p:cNvPr id="16" name="">
             <a:extLst xmlns:a="http://schemas.openxmlformats.org/drawingml/2006/main">
               <a:ext uri="{FF2B5EF4-FFF2-40B4-BE49-F238E27FC236}">
-                <a16:creationId xmlns:a16="http://schemas.microsoft.com/office/drawing/2014/main" id="{94A024B4-42D4-429A-90DD-9E1A68C5AF76}"/>
+                <a16:creationId xmlns:a16="http://schemas.microsoft.com/office/drawing/2014/main" id="{27559BB9-71AF-4DD1-91C1-CB05A54E5DC2}"/>
               </a:ext>
             </a:extLst>
           </p:cNvPr>
@@ -9169,9 +9169,9 @@
                 <a:solidFill>
                   <a:srgbClr val="08775A"/>
                 </a:solidFill>
-                <a:latin typeface="Helvetica Neue"/>
-                <a:ea typeface="Helvetica Neue"/>
-                <a:cs typeface="Helvetica Neue"/>
+                <a:latin typeface="Liberation Sans"/>
+                <a:ea typeface="Liberation Sans"/>
+                <a:cs typeface="Liberation Sans"/>
               </a:defRPr>
             </a:pPr>
             <a:r>
@@ -9179,9 +9179,9 @@
                 <a:solidFill>
                   <a:srgbClr val="08775A"/>
                 </a:solidFill>
-                <a:latin typeface="Helvetica Neue"/>
-                <a:ea typeface="Helvetica Neue"/>
-                <a:cs typeface="Helvetica Neue"/>
+                <a:latin typeface="Liberation Sans"/>
+                <a:ea typeface="Liberation Sans"/>
+                <a:cs typeface="Liberation Sans"/>
               </a:rPr>
               <a:t>VAK проверяет missing и division-by-zero</a:t>
             </a:r>
@@ -9191,7 +9191,7 @@
     </p:spTree>
     <p:extLst>
       <p:ext uri="{BB962C8B-B14F-4D97-AF65-F5344CB8AC3E}">
-        <p14:creationId xmlns:p14="http://schemas.microsoft.com/office/powerpoint/2010/main" val="617260325"/>
+        <p14:creationId xmlns:p14="http://schemas.microsoft.com/office/powerpoint/2010/main" val="56888356"/>
       </p:ext>
     </p:extLst>
   </p:cSld>
@@ -9222,7 +9222,7 @@
           <p:cNvPr id="16" name="">
             <a:extLst xmlns:a="http://schemas.openxmlformats.org/drawingml/2006/main">
               <a:ext uri="{FF2B5EF4-FFF2-40B4-BE49-F238E27FC236}">
-                <a16:creationId xmlns:a16="http://schemas.microsoft.com/office/drawing/2014/main" id="{E9960296-420B-4A8F-8008-72E54446E9D0}"/>
+                <a16:creationId xmlns:a16="http://schemas.microsoft.com/office/drawing/2014/main" id="{5F22E241-25ED-4651-96C4-253C9B7FA7AF}"/>
               </a:ext>
             </a:extLst>
           </p:cNvPr>
@@ -9255,9 +9255,9 @@
                 <a:solidFill>
                   <a:srgbClr val="08775A"/>
                 </a:solidFill>
-                <a:latin typeface="Helvetica Neue"/>
-                <a:ea typeface="Helvetica Neue"/>
-                <a:cs typeface="Helvetica Neue"/>
+                <a:latin typeface="Liberation Sans"/>
+                <a:ea typeface="Liberation Sans"/>
+                <a:cs typeface="Liberation Sans"/>
               </a:defRPr>
             </a:pPr>
             <a:r>
@@ -9265,9 +9265,9 @@
                 <a:solidFill>
                   <a:srgbClr val="08775A"/>
                 </a:solidFill>
-                <a:latin typeface="Helvetica Neue"/>
-                <a:ea typeface="Helvetica Neue"/>
-                <a:cs typeface="Helvetica Neue"/>
+                <a:latin typeface="Liberation Sans"/>
+                <a:ea typeface="Liberation Sans"/>
+                <a:cs typeface="Liberation Sans"/>
               </a:rPr>
               <a:t>СЦЕНАРИЙ РОСТА СЕРЫ</a:t>
             </a:r>
@@ -9279,7 +9279,7 @@
           <p:cNvPr id="2" name="">
             <a:extLst xmlns:a="http://schemas.openxmlformats.org/drawingml/2006/main">
               <a:ext uri="{FF2B5EF4-FFF2-40B4-BE49-F238E27FC236}">
-                <a16:creationId xmlns:a16="http://schemas.microsoft.com/office/drawing/2014/main" id="{4FBBBC65-E6D4-4196-83D4-D011957E3A79}"/>
+                <a16:creationId xmlns:a16="http://schemas.microsoft.com/office/drawing/2014/main" id="{A5E5153D-D7E0-4348-BB16-71CDBA3AC7D4}"/>
               </a:ext>
             </a:extLst>
           </p:cNvPr>
@@ -9312,9 +9312,9 @@
                 <a:solidFill>
                   <a:srgbClr val="0B211A"/>
                 </a:solidFill>
-                <a:latin typeface="Helvetica Neue"/>
-                <a:ea typeface="Helvetica Neue"/>
-                <a:cs typeface="Helvetica Neue"/>
+                <a:latin typeface="Liberation Sans"/>
+                <a:ea typeface="Liberation Sans"/>
+                <a:cs typeface="Liberation Sans"/>
               </a:defRPr>
             </a:pPr>
             <a:r>
@@ -9322,9 +9322,9 @@
                 <a:solidFill>
                   <a:srgbClr val="0B211A"/>
                 </a:solidFill>
-                <a:latin typeface="Helvetica Neue"/>
-                <a:ea typeface="Helvetica Neue"/>
-                <a:cs typeface="Helvetica Neue"/>
+                <a:latin typeface="Liberation Sans"/>
+                <a:ea typeface="Liberation Sans"/>
+                <a:cs typeface="Liberation Sans"/>
               </a:rPr>
               <a:t>Рост серы превращается в объяснимый план</a:t>
             </a:r>
@@ -9336,7 +9336,7 @@
           <p:cNvPr id="3" name="">
             <a:extLst xmlns:a="http://schemas.openxmlformats.org/drawingml/2006/main">
               <a:ext uri="{FF2B5EF4-FFF2-40B4-BE49-F238E27FC236}">
-                <a16:creationId xmlns:a16="http://schemas.microsoft.com/office/drawing/2014/main" id="{07770A71-F8E4-4B46-8914-4F8040B53D91}"/>
+                <a16:creationId xmlns:a16="http://schemas.microsoft.com/office/drawing/2014/main" id="{1B43F834-2ED2-4A0E-B2BE-6EDCDE80881A}"/>
               </a:ext>
             </a:extLst>
           </p:cNvPr>
@@ -9369,9 +9369,9 @@
                 <a:solidFill>
                   <a:srgbClr val="667A72"/>
                 </a:solidFill>
-                <a:latin typeface="Helvetica Neue"/>
-                <a:ea typeface="Helvetica Neue"/>
-                <a:cs typeface="Helvetica Neue"/>
+                <a:latin typeface="Liberation Sans"/>
+                <a:ea typeface="Liberation Sans"/>
+                <a:cs typeface="Liberation Sans"/>
               </a:defRPr>
             </a:pPr>
             <a:r>
@@ -9379,9 +9379,9 @@
                 <a:solidFill>
                   <a:srgbClr val="667A72"/>
                 </a:solidFill>
-                <a:latin typeface="Helvetica Neue"/>
-                <a:ea typeface="Helvetica Neue"/>
-                <a:cs typeface="Helvetica Neue"/>
+                <a:latin typeface="Liberation Sans"/>
+                <a:ea typeface="Liberation Sans"/>
+                <a:cs typeface="Liberation Sans"/>
               </a:rPr>
               <a:t>07</a:t>
             </a:r>
@@ -9397,8 +9397,8 @@
           <p:nvPr/>
         </p:nvPicPr>
         <p:blipFill>
-          <a:blip xmlns:r="http://schemas.openxmlformats.org/officeDocument/2006/relationships" xmlns:a="http://schemas.openxmlformats.org/drawingml/2006/main" r:embed="R6adc37f0c40d45d4"/>
-          <a:srcRect xmlns:a="http://schemas.openxmlformats.org/drawingml/2006/main" l="0" t="23639" r="0" b="23639"/>
+          <a:blip xmlns:r="http://schemas.openxmlformats.org/officeDocument/2006/relationships" xmlns:a="http://schemas.openxmlformats.org/drawingml/2006/main" r:embed="Rbbf3107e2379472d"/>
+          <a:srcRect xmlns:a="http://schemas.openxmlformats.org/drawingml/2006/main" l="0" t="24454" r="0" b="24454"/>
           <a:stretch xmlns:a="http://schemas.openxmlformats.org/drawingml/2006/main">
             <a:fillRect l="0" t="0" r="0" b="0"/>
           </a:stretch>
@@ -9420,7 +9420,7 @@
           <p:cNvPr id="5" name="">
             <a:extLst xmlns:a="http://schemas.openxmlformats.org/drawingml/2006/main">
               <a:ext uri="{FF2B5EF4-FFF2-40B4-BE49-F238E27FC236}">
-                <a16:creationId xmlns:a16="http://schemas.microsoft.com/office/drawing/2014/main" id="{0D0FE599-F59A-4301-AE0B-C4CB917FF228}"/>
+                <a16:creationId xmlns:a16="http://schemas.microsoft.com/office/drawing/2014/main" id="{D05FBF62-6307-4C84-BC98-BCA845ABBBC2}"/>
               </a:ext>
             </a:extLst>
           </p:cNvPr>
@@ -9452,7 +9452,7 @@
           <p:cNvPr id="6" name="">
             <a:extLst xmlns:a="http://schemas.openxmlformats.org/drawingml/2006/main">
               <a:ext uri="{FF2B5EF4-FFF2-40B4-BE49-F238E27FC236}">
-                <a16:creationId xmlns:a16="http://schemas.microsoft.com/office/drawing/2014/main" id="{3BC71367-881F-4291-B314-E8A23F9EC0D6}"/>
+                <a16:creationId xmlns:a16="http://schemas.microsoft.com/office/drawing/2014/main" id="{61BE56F6-E8A9-4878-864D-64348EFFBABB}"/>
               </a:ext>
             </a:extLst>
           </p:cNvPr>
@@ -9485,9 +9485,9 @@
                 <a:solidFill>
                   <a:srgbClr val="08775A"/>
                 </a:solidFill>
-                <a:latin typeface="Helvetica Neue"/>
-                <a:ea typeface="Helvetica Neue"/>
-                <a:cs typeface="Helvetica Neue"/>
+                <a:latin typeface="Liberation Sans"/>
+                <a:ea typeface="Liberation Sans"/>
+                <a:cs typeface="Liberation Sans"/>
               </a:defRPr>
             </a:pPr>
             <a:r>
@@ -9495,9 +9495,9 @@
                 <a:solidFill>
                   <a:srgbClr val="08775A"/>
                 </a:solidFill>
-                <a:latin typeface="Helvetica Neue"/>
-                <a:ea typeface="Helvetica Neue"/>
-                <a:cs typeface="Helvetica Neue"/>
+                <a:latin typeface="Liberation Sans"/>
+                <a:ea typeface="Liberation Sans"/>
+                <a:cs typeface="Liberation Sans"/>
               </a:rPr>
               <a:t>ПРИЧИНА</a:t>
             </a:r>
@@ -9509,7 +9509,7 @@
           <p:cNvPr id="7" name="">
             <a:extLst xmlns:a="http://schemas.openxmlformats.org/drawingml/2006/main">
               <a:ext uri="{FF2B5EF4-FFF2-40B4-BE49-F238E27FC236}">
-                <a16:creationId xmlns:a16="http://schemas.microsoft.com/office/drawing/2014/main" id="{EBADE576-6A96-41F4-931C-4DFDE77FB1C0}"/>
+                <a16:creationId xmlns:a16="http://schemas.microsoft.com/office/drawing/2014/main" id="{DDAC069B-F49B-428A-802F-F8A22F73D25C}"/>
               </a:ext>
             </a:extLst>
           </p:cNvPr>
@@ -9542,9 +9542,9 @@
                 <a:solidFill>
                   <a:srgbClr val="0B211A"/>
                 </a:solidFill>
-                <a:latin typeface="Helvetica Neue"/>
-                <a:ea typeface="Helvetica Neue"/>
-                <a:cs typeface="Helvetica Neue"/>
+                <a:latin typeface="Liberation Sans"/>
+                <a:ea typeface="Liberation Sans"/>
+                <a:cs typeface="Liberation Sans"/>
               </a:defRPr>
             </a:pPr>
             <a:r>
@@ -9552,9 +9552,9 @@
                 <a:solidFill>
                   <a:srgbClr val="0B211A"/>
                 </a:solidFill>
-                <a:latin typeface="Helvetica Neue"/>
-                <a:ea typeface="Helvetica Neue"/>
-                <a:cs typeface="Helvetica Neue"/>
+                <a:latin typeface="Liberation Sans"/>
+                <a:ea typeface="Liberation Sans"/>
+                <a:cs typeface="Liberation Sans"/>
               </a:rPr>
               <a:t>0,90 → 1,08% масс.</a:t>
             </a:r>
@@ -9566,7 +9566,7 @@
           <p:cNvPr id="8" name="">
             <a:extLst xmlns:a="http://schemas.openxmlformats.org/drawingml/2006/main">
               <a:ext uri="{FF2B5EF4-FFF2-40B4-BE49-F238E27FC236}">
-                <a16:creationId xmlns:a16="http://schemas.microsoft.com/office/drawing/2014/main" id="{2F93C003-E2B2-44A1-8F8F-0A672ACD6792}"/>
+                <a16:creationId xmlns:a16="http://schemas.microsoft.com/office/drawing/2014/main" id="{D0ED9C3B-98B0-44E4-820E-B54E55A6BB98}"/>
               </a:ext>
             </a:extLst>
           </p:cNvPr>
@@ -9598,7 +9598,7 @@
           <p:cNvPr id="9" name="">
             <a:extLst xmlns:a="http://schemas.openxmlformats.org/drawingml/2006/main">
               <a:ext uri="{FF2B5EF4-FFF2-40B4-BE49-F238E27FC236}">
-                <a16:creationId xmlns:a16="http://schemas.microsoft.com/office/drawing/2014/main" id="{D674BCAF-10A7-4219-B819-614E1216F294}"/>
+                <a16:creationId xmlns:a16="http://schemas.microsoft.com/office/drawing/2014/main" id="{7E8BAAF2-334A-43E1-B3BA-5923C5E332DE}"/>
               </a:ext>
             </a:extLst>
           </p:cNvPr>
@@ -9631,9 +9631,9 @@
                 <a:solidFill>
                   <a:srgbClr val="0B211A"/>
                 </a:solidFill>
-                <a:latin typeface="Helvetica Neue"/>
-                <a:ea typeface="Helvetica Neue"/>
-                <a:cs typeface="Helvetica Neue"/>
+                <a:latin typeface="Liberation Sans"/>
+                <a:ea typeface="Liberation Sans"/>
+                <a:cs typeface="Liberation Sans"/>
               </a:defRPr>
             </a:pPr>
             <a:r>
@@ -9641,9 +9641,9 @@
                 <a:solidFill>
                   <a:srgbClr val="0B211A"/>
                 </a:solidFill>
-                <a:latin typeface="Helvetica Neue"/>
-                <a:ea typeface="Helvetica Neue"/>
-                <a:cs typeface="Helvetica Neue"/>
+                <a:latin typeface="Liberation Sans"/>
+                <a:ea typeface="Liberation Sans"/>
+                <a:cs typeface="Liberation Sans"/>
               </a:rPr>
               <a:t>BASELINE</a:t>
             </a:r>
@@ -9655,7 +9655,7 @@
           <p:cNvPr id="10" name="">
             <a:extLst xmlns:a="http://schemas.openxmlformats.org/drawingml/2006/main">
               <a:ext uri="{FF2B5EF4-FFF2-40B4-BE49-F238E27FC236}">
-                <a16:creationId xmlns:a16="http://schemas.microsoft.com/office/drawing/2014/main" id="{3634806B-1EFC-461A-8250-2CD6867D6BC2}"/>
+                <a16:creationId xmlns:a16="http://schemas.microsoft.com/office/drawing/2014/main" id="{9B9BD8C4-CE7C-441E-9536-90214303DAF4}"/>
               </a:ext>
             </a:extLst>
           </p:cNvPr>
@@ -9688,9 +9688,9 @@
                 <a:solidFill>
                   <a:srgbClr val="B34A40"/>
                 </a:solidFill>
-                <a:latin typeface="Helvetica Neue"/>
-                <a:ea typeface="Helvetica Neue"/>
-                <a:cs typeface="Helvetica Neue"/>
+                <a:latin typeface="Liberation Sans"/>
+                <a:ea typeface="Liberation Sans"/>
+                <a:cs typeface="Liberation Sans"/>
               </a:defRPr>
             </a:pPr>
             <a:r>
@@ -9698,9 +9698,9 @@
                 <a:solidFill>
                   <a:srgbClr val="B34A40"/>
                 </a:solidFill>
-                <a:latin typeface="Helvetica Neue"/>
-                <a:ea typeface="Helvetica Neue"/>
-                <a:cs typeface="Helvetica Neue"/>
+                <a:latin typeface="Liberation Sans"/>
+                <a:ea typeface="Liberation Sans"/>
+                <a:cs typeface="Liberation Sans"/>
               </a:rPr>
               <a:t>10,25 мг/кг S</a:t>
             </a:r>
@@ -9712,7 +9712,7 @@
           <p:cNvPr id="11" name="">
             <a:extLst xmlns:a="http://schemas.openxmlformats.org/drawingml/2006/main">
               <a:ext uri="{FF2B5EF4-FFF2-40B4-BE49-F238E27FC236}">
-                <a16:creationId xmlns:a16="http://schemas.microsoft.com/office/drawing/2014/main" id="{697682C9-90B6-4ED5-8871-AF2B6131DC13}"/>
+                <a16:creationId xmlns:a16="http://schemas.microsoft.com/office/drawing/2014/main" id="{88420B3F-9E2B-4358-B91D-1DDBDAFD00C5}"/>
               </a:ext>
             </a:extLst>
           </p:cNvPr>
@@ -9744,7 +9744,7 @@
           <p:cNvPr id="12" name="">
             <a:extLst xmlns:a="http://schemas.openxmlformats.org/drawingml/2006/main">
               <a:ext uri="{FF2B5EF4-FFF2-40B4-BE49-F238E27FC236}">
-                <a16:creationId xmlns:a16="http://schemas.microsoft.com/office/drawing/2014/main" id="{66884B9D-118E-49A1-BA6E-B9075CC31692}"/>
+                <a16:creationId xmlns:a16="http://schemas.microsoft.com/office/drawing/2014/main" id="{6AD82F02-2C4B-43B9-94A6-A8FD2EF12398}"/>
               </a:ext>
             </a:extLst>
           </p:cNvPr>
@@ -9777,9 +9777,9 @@
                 <a:solidFill>
                   <a:srgbClr val="0B211A"/>
                 </a:solidFill>
-                <a:latin typeface="Helvetica Neue"/>
-                <a:ea typeface="Helvetica Neue"/>
-                <a:cs typeface="Helvetica Neue"/>
+                <a:latin typeface="Liberation Sans"/>
+                <a:ea typeface="Liberation Sans"/>
+                <a:cs typeface="Liberation Sans"/>
               </a:defRPr>
             </a:pPr>
             <a:r>
@@ -9787,9 +9787,9 @@
                 <a:solidFill>
                   <a:srgbClr val="0B211A"/>
                 </a:solidFill>
-                <a:latin typeface="Helvetica Neue"/>
-                <a:ea typeface="Helvetica Neue"/>
-                <a:cs typeface="Helvetica Neue"/>
+                <a:latin typeface="Liberation Sans"/>
+                <a:ea typeface="Liberation Sans"/>
+                <a:cs typeface="Liberation Sans"/>
               </a:rPr>
               <a:t>РЕКОМЕНДАЦИЯ</a:t>
             </a:r>
@@ -9801,7 +9801,7 @@
           <p:cNvPr id="13" name="">
             <a:extLst xmlns:a="http://schemas.openxmlformats.org/drawingml/2006/main">
               <a:ext uri="{FF2B5EF4-FFF2-40B4-BE49-F238E27FC236}">
-                <a16:creationId xmlns:a16="http://schemas.microsoft.com/office/drawing/2014/main" id="{AA913288-C1D1-484D-AAF8-268CB9F86C9E}"/>
+                <a16:creationId xmlns:a16="http://schemas.microsoft.com/office/drawing/2014/main" id="{AA2BD326-D108-4C70-B8BF-E0F3FA40AEBF}"/>
               </a:ext>
             </a:extLst>
           </p:cNvPr>
@@ -9834,9 +9834,9 @@
                 <a:solidFill>
                   <a:srgbClr val="08775A"/>
                 </a:solidFill>
-                <a:latin typeface="Helvetica Neue"/>
-                <a:ea typeface="Helvetica Neue"/>
-                <a:cs typeface="Helvetica Neue"/>
+                <a:latin typeface="Liberation Sans"/>
+                <a:ea typeface="Liberation Sans"/>
+                <a:cs typeface="Liberation Sans"/>
               </a:defRPr>
             </a:pPr>
             <a:r>
@@ -9844,9 +9844,9 @@
                 <a:solidFill>
                   <a:srgbClr val="08775A"/>
                 </a:solidFill>
-                <a:latin typeface="Helvetica Neue"/>
-                <a:ea typeface="Helvetica Neue"/>
-                <a:cs typeface="Helvetica Neue"/>
+                <a:latin typeface="Liberation Sans"/>
+                <a:ea typeface="Liberation Sans"/>
+                <a:cs typeface="Liberation Sans"/>
               </a:rPr>
               <a:t>9,30 мг/кг S</a:t>
             </a:r>
@@ -9858,7 +9858,7 @@
           <p:cNvPr id="14" name="">
             <a:extLst xmlns:a="http://schemas.openxmlformats.org/drawingml/2006/main">
               <a:ext uri="{FF2B5EF4-FFF2-40B4-BE49-F238E27FC236}">
-                <a16:creationId xmlns:a16="http://schemas.microsoft.com/office/drawing/2014/main" id="{6EF722BC-9F6D-4396-9BB9-66E7F5A8E2A0}"/>
+                <a16:creationId xmlns:a16="http://schemas.microsoft.com/office/drawing/2014/main" id="{C49A8905-E100-4EF2-BF9D-7EB55A82813A}"/>
               </a:ext>
             </a:extLst>
           </p:cNvPr>
@@ -9891,9 +9891,9 @@
                 <a:solidFill>
                   <a:srgbClr val="0B211A"/>
                 </a:solidFill>
-                <a:latin typeface="Helvetica Neue"/>
-                <a:ea typeface="Helvetica Neue"/>
-                <a:cs typeface="Helvetica Neue"/>
+                <a:latin typeface="Liberation Sans"/>
+                <a:ea typeface="Liberation Sans"/>
+                <a:cs typeface="Liberation Sans"/>
               </a:defRPr>
             </a:pPr>
             <a:r>
@@ -9901,9 +9901,9 @@
                 <a:solidFill>
                   <a:srgbClr val="0B211A"/>
                 </a:solidFill>
-                <a:latin typeface="Helvetica Neue"/>
-                <a:ea typeface="Helvetica Neue"/>
-                <a:cs typeface="Helvetica Neue"/>
+                <a:latin typeface="Liberation Sans"/>
+                <a:ea typeface="Liberation Sans"/>
+                <a:cs typeface="Liberation Sans"/>
               </a:rPr>
               <a:t>Hard constraints → затем proxy-ранжирование</a:t>
             </a:r>
@@ -9915,7 +9915,7 @@
           <p:cNvPr id="15" name="">
             <a:extLst xmlns:a="http://schemas.openxmlformats.org/drawingml/2006/main">
               <a:ext uri="{FF2B5EF4-FFF2-40B4-BE49-F238E27FC236}">
-                <a16:creationId xmlns:a16="http://schemas.microsoft.com/office/drawing/2014/main" id="{00015ED7-0A58-4185-99A1-82C2814E328B}"/>
+                <a16:creationId xmlns:a16="http://schemas.microsoft.com/office/drawing/2014/main" id="{8BA301DC-5795-4144-8FB2-7C7BC1F8FF02}"/>
               </a:ext>
             </a:extLst>
           </p:cNvPr>
@@ -9948,9 +9948,9 @@
                 <a:solidFill>
                   <a:srgbClr val="667A72"/>
                 </a:solidFill>
-                <a:latin typeface="Helvetica Neue"/>
-                <a:ea typeface="Helvetica Neue"/>
-                <a:cs typeface="Helvetica Neue"/>
+                <a:latin typeface="Liberation Sans"/>
+                <a:ea typeface="Liberation Sans"/>
+                <a:cs typeface="Liberation Sans"/>
               </a:defRPr>
             </a:pPr>
             <a:r>
@@ -9958,9 +9958,9 @@
                 <a:solidFill>
                   <a:srgbClr val="667A72"/>
                 </a:solidFill>
-                <a:latin typeface="Helvetica Neue"/>
-                <a:ea typeface="Helvetica Neue"/>
-                <a:cs typeface="Helvetica Neue"/>
+                <a:latin typeface="Liberation Sans"/>
+                <a:ea typeface="Liberation Sans"/>
+                <a:cs typeface="Liberation Sans"/>
               </a:rPr>
               <a:t>Переход и физические единицы требуют инженерной проверки.</a:t>
             </a:r>
@@ -9970,7 +9970,7 @@
     </p:spTree>
     <p:extLst>
       <p:ext uri="{BB962C8B-B14F-4D97-AF65-F5344CB8AC3E}">
-        <p14:creationId xmlns:p14="http://schemas.microsoft.com/office/powerpoint/2010/main" val="188142601"/>
+        <p14:creationId xmlns:p14="http://schemas.microsoft.com/office/powerpoint/2010/main" val="593319353"/>
       </p:ext>
     </p:extLst>
   </p:cSld>
@@ -10001,7 +10001,7 @@
           <p:cNvPr id="24" name="">
             <a:extLst xmlns:a="http://schemas.openxmlformats.org/drawingml/2006/main">
               <a:ext uri="{FF2B5EF4-FFF2-40B4-BE49-F238E27FC236}">
-                <a16:creationId xmlns:a16="http://schemas.microsoft.com/office/drawing/2014/main" id="{95853846-CFA8-43A8-B61C-0B85EE3555E6}"/>
+                <a16:creationId xmlns:a16="http://schemas.microsoft.com/office/drawing/2014/main" id="{1E534F23-4787-4B6C-8E48-410EFD68D27B}"/>
               </a:ext>
             </a:extLst>
           </p:cNvPr>
@@ -10034,9 +10034,9 @@
                 <a:solidFill>
                   <a:srgbClr val="08775A"/>
                 </a:solidFill>
-                <a:latin typeface="Helvetica Neue"/>
-                <a:ea typeface="Helvetica Neue"/>
-                <a:cs typeface="Helvetica Neue"/>
+                <a:latin typeface="Liberation Sans"/>
+                <a:ea typeface="Liberation Sans"/>
+                <a:cs typeface="Liberation Sans"/>
               </a:defRPr>
             </a:pPr>
             <a:r>
@@ -10044,9 +10044,9 @@
                 <a:solidFill>
                   <a:srgbClr val="08775A"/>
                 </a:solidFill>
-                <a:latin typeface="Helvetica Neue"/>
-                <a:ea typeface="Helvetica Neue"/>
-                <a:cs typeface="Helvetica Neue"/>
+                <a:latin typeface="Liberation Sans"/>
+                <a:ea typeface="Liberation Sans"/>
+                <a:cs typeface="Liberation Sans"/>
               </a:rPr>
               <a:t>ОПТИМИЗАЦИЯ БЛЕНДИНГА</a:t>
             </a:r>
@@ -10058,7 +10058,7 @@
           <p:cNvPr id="2" name="">
             <a:extLst xmlns:a="http://schemas.openxmlformats.org/drawingml/2006/main">
               <a:ext uri="{FF2B5EF4-FFF2-40B4-BE49-F238E27FC236}">
-                <a16:creationId xmlns:a16="http://schemas.microsoft.com/office/drawing/2014/main" id="{12FC9198-8636-4940-A5FF-E8815C732E93}"/>
+                <a16:creationId xmlns:a16="http://schemas.microsoft.com/office/drawing/2014/main" id="{DF9E661D-B112-430F-B76B-C90CFDF82004}"/>
               </a:ext>
             </a:extLst>
           </p:cNvPr>
@@ -10091,9 +10091,9 @@
                 <a:solidFill>
                   <a:srgbClr val="0B211A"/>
                 </a:solidFill>
-                <a:latin typeface="Helvetica Neue"/>
-                <a:ea typeface="Helvetica Neue"/>
-                <a:cs typeface="Helvetica Neue"/>
+                <a:latin typeface="Liberation Sans"/>
+                <a:ea typeface="Liberation Sans"/>
+                <a:cs typeface="Liberation Sans"/>
               </a:defRPr>
             </a:pPr>
             <a:r>
@@ -10101,9 +10101,9 @@
                 <a:solidFill>
                   <a:srgbClr val="0B211A"/>
                 </a:solidFill>
-                <a:latin typeface="Helvetica Neue"/>
-                <a:ea typeface="Helvetica Neue"/>
-                <a:cs typeface="Helvetica Neue"/>
+                <a:latin typeface="Liberation Sans"/>
+                <a:ea typeface="Liberation Sans"/>
+                <a:cs typeface="Liberation Sans"/>
               </a:rPr>
               <a:t>Блендинг решает качество до оценки стоимости</a:t>
             </a:r>
@@ -10115,7 +10115,7 @@
           <p:cNvPr id="3" name="">
             <a:extLst xmlns:a="http://schemas.openxmlformats.org/drawingml/2006/main">
               <a:ext uri="{FF2B5EF4-FFF2-40B4-BE49-F238E27FC236}">
-                <a16:creationId xmlns:a16="http://schemas.microsoft.com/office/drawing/2014/main" id="{9DDB3188-2983-4A44-B070-93E490CDC518}"/>
+                <a16:creationId xmlns:a16="http://schemas.microsoft.com/office/drawing/2014/main" id="{A00C8403-9857-4E1C-BAB3-12AE4C4C66C9}"/>
               </a:ext>
             </a:extLst>
           </p:cNvPr>
@@ -10148,9 +10148,9 @@
                 <a:solidFill>
                   <a:srgbClr val="667A72"/>
                 </a:solidFill>
-                <a:latin typeface="Helvetica Neue"/>
-                <a:ea typeface="Helvetica Neue"/>
-                <a:cs typeface="Helvetica Neue"/>
+                <a:latin typeface="Liberation Sans"/>
+                <a:ea typeface="Liberation Sans"/>
+                <a:cs typeface="Liberation Sans"/>
               </a:defRPr>
             </a:pPr>
             <a:r>
@@ -10158,9 +10158,9 @@
                 <a:solidFill>
                   <a:srgbClr val="667A72"/>
                 </a:solidFill>
-                <a:latin typeface="Helvetica Neue"/>
-                <a:ea typeface="Helvetica Neue"/>
-                <a:cs typeface="Helvetica Neue"/>
+                <a:latin typeface="Liberation Sans"/>
+                <a:ea typeface="Liberation Sans"/>
+                <a:cs typeface="Liberation Sans"/>
               </a:rPr>
               <a:t>08</a:t>
             </a:r>
@@ -10172,7 +10172,7 @@
           <p:cNvPr id="4" name="">
             <a:extLst xmlns:a="http://schemas.openxmlformats.org/drawingml/2006/main">
               <a:ext uri="{FF2B5EF4-FFF2-40B4-BE49-F238E27FC236}">
-                <a16:creationId xmlns:a16="http://schemas.microsoft.com/office/drawing/2014/main" id="{E2BD7C05-0964-48F3-8570-51AE2834C2F5}"/>
+                <a16:creationId xmlns:a16="http://schemas.microsoft.com/office/drawing/2014/main" id="{5A62777A-0802-4140-967A-D9F1EB1D7C2E}"/>
               </a:ext>
             </a:extLst>
           </p:cNvPr>
@@ -10204,7 +10204,7 @@
           <p:cNvPr id="5" name="">
             <a:extLst xmlns:a="http://schemas.openxmlformats.org/drawingml/2006/main">
               <a:ext uri="{FF2B5EF4-FFF2-40B4-BE49-F238E27FC236}">
-                <a16:creationId xmlns:a16="http://schemas.microsoft.com/office/drawing/2014/main" id="{B97B4E8D-094D-46F4-B631-F9AF464A8758}"/>
+                <a16:creationId xmlns:a16="http://schemas.microsoft.com/office/drawing/2014/main" id="{8D8E84E1-2565-47BF-A6FF-9B5F7556E5B1}"/>
               </a:ext>
             </a:extLst>
           </p:cNvPr>
@@ -10237,9 +10237,9 @@
                 <a:solidFill>
                   <a:srgbClr val="08775A"/>
                 </a:solidFill>
-                <a:latin typeface="Helvetica Neue"/>
-                <a:ea typeface="Helvetica Neue"/>
-                <a:cs typeface="Helvetica Neue"/>
+                <a:latin typeface="Liberation Sans"/>
+                <a:ea typeface="Liberation Sans"/>
+                <a:cs typeface="Liberation Sans"/>
               </a:defRPr>
             </a:pPr>
             <a:r>
@@ -10247,9 +10247,9 @@
                 <a:solidFill>
                   <a:srgbClr val="08775A"/>
                 </a:solidFill>
-                <a:latin typeface="Helvetica Neue"/>
-                <a:ea typeface="Helvetica Neue"/>
-                <a:cs typeface="Helvetica Neue"/>
+                <a:latin typeface="Liberation Sans"/>
+                <a:ea typeface="Liberation Sans"/>
+                <a:cs typeface="Liberation Sans"/>
               </a:rPr>
               <a:t>◯</a:t>
             </a:r>
@@ -10261,7 +10261,7 @@
           <p:cNvPr id="6" name="">
             <a:extLst xmlns:a="http://schemas.openxmlformats.org/drawingml/2006/main">
               <a:ext uri="{FF2B5EF4-FFF2-40B4-BE49-F238E27FC236}">
-                <a16:creationId xmlns:a16="http://schemas.microsoft.com/office/drawing/2014/main" id="{0B244B36-E6DF-400F-ABC6-2141B0DCE38B}"/>
+                <a16:creationId xmlns:a16="http://schemas.microsoft.com/office/drawing/2014/main" id="{A95CD98D-AC8C-4586-92BC-9B2B10F5F3A7}"/>
               </a:ext>
             </a:extLst>
           </p:cNvPr>
@@ -10294,9 +10294,9 @@
                 <a:solidFill>
                   <a:srgbClr val="0B211A"/>
                 </a:solidFill>
-                <a:latin typeface="Helvetica Neue"/>
-                <a:ea typeface="Helvetica Neue"/>
-                <a:cs typeface="Helvetica Neue"/>
+                <a:latin typeface="Liberation Sans"/>
+                <a:ea typeface="Liberation Sans"/>
+                <a:cs typeface="Liberation Sans"/>
               </a:defRPr>
             </a:pPr>
             <a:r>
@@ -10304,9 +10304,9 @@
                 <a:solidFill>
                   <a:srgbClr val="0B211A"/>
                 </a:solidFill>
-                <a:latin typeface="Helvetica Neue"/>
-                <a:ea typeface="Helvetica Neue"/>
-                <a:cs typeface="Helvetica Neue"/>
+                <a:latin typeface="Liberation Sans"/>
+                <a:ea typeface="Liberation Sans"/>
+                <a:cs typeface="Liberation Sans"/>
               </a:rPr>
               <a:t>Резервуар A</a:t>
             </a:r>
@@ -10318,7 +10318,7 @@
           <p:cNvPr id="7" name="">
             <a:extLst xmlns:a="http://schemas.openxmlformats.org/drawingml/2006/main">
               <a:ext uri="{FF2B5EF4-FFF2-40B4-BE49-F238E27FC236}">
-                <a16:creationId xmlns:a16="http://schemas.microsoft.com/office/drawing/2014/main" id="{4A64833D-0721-469A-AF9F-562E16303E61}"/>
+                <a16:creationId xmlns:a16="http://schemas.microsoft.com/office/drawing/2014/main" id="{7D9F778B-6D8D-4285-8D99-74ADE49656FE}"/>
               </a:ext>
             </a:extLst>
           </p:cNvPr>
@@ -10351,9 +10351,9 @@
                 <a:solidFill>
                   <a:srgbClr val="667A72"/>
                 </a:solidFill>
-                <a:latin typeface="Helvetica Neue"/>
-                <a:ea typeface="Helvetica Neue"/>
-                <a:cs typeface="Helvetica Neue"/>
+                <a:latin typeface="Liberation Sans"/>
+                <a:ea typeface="Liberation Sans"/>
+                <a:cs typeface="Liberation Sans"/>
               </a:defRPr>
             </a:pPr>
             <a:r>
@@ -10361,9 +10361,9 @@
                 <a:solidFill>
                   <a:srgbClr val="667A72"/>
                 </a:solidFill>
-                <a:latin typeface="Helvetica Neue"/>
-                <a:ea typeface="Helvetica Neue"/>
-                <a:cs typeface="Helvetica Neue"/>
+                <a:latin typeface="Liberation Sans"/>
+                <a:ea typeface="Liberation Sans"/>
+                <a:cs typeface="Liberation Sans"/>
               </a:rPr>
               <a:t>S 8,3 · T95 342 · ЦЧ 46</a:t>
             </a:r>
@@ -10375,7 +10375,7 @@
           <p:cNvPr id="8" name="">
             <a:extLst xmlns:a="http://schemas.openxmlformats.org/drawingml/2006/main">
               <a:ext uri="{FF2B5EF4-FFF2-40B4-BE49-F238E27FC236}">
-                <a16:creationId xmlns:a16="http://schemas.microsoft.com/office/drawing/2014/main" id="{85766002-9033-4968-8885-1E955DFD7EB4}"/>
+                <a16:creationId xmlns:a16="http://schemas.microsoft.com/office/drawing/2014/main" id="{43EF1FE4-9EA5-4258-A4E0-52F56B23CEF4}"/>
               </a:ext>
             </a:extLst>
           </p:cNvPr>
@@ -10407,7 +10407,7 @@
           <p:cNvPr id="9" name="">
             <a:extLst xmlns:a="http://schemas.openxmlformats.org/drawingml/2006/main">
               <a:ext uri="{FF2B5EF4-FFF2-40B4-BE49-F238E27FC236}">
-                <a16:creationId xmlns:a16="http://schemas.microsoft.com/office/drawing/2014/main" id="{4B266C2D-A871-4C60-A81D-A4ABE53ADD1B}"/>
+                <a16:creationId xmlns:a16="http://schemas.microsoft.com/office/drawing/2014/main" id="{0FCD837D-706B-4D0F-AA10-D112F7E6A5D3}"/>
               </a:ext>
             </a:extLst>
           </p:cNvPr>
@@ -10440,9 +10440,9 @@
                 <a:solidFill>
                   <a:srgbClr val="08775A"/>
                 </a:solidFill>
-                <a:latin typeface="Helvetica Neue"/>
-                <a:ea typeface="Helvetica Neue"/>
-                <a:cs typeface="Helvetica Neue"/>
+                <a:latin typeface="Liberation Sans"/>
+                <a:ea typeface="Liberation Sans"/>
+                <a:cs typeface="Liberation Sans"/>
               </a:defRPr>
             </a:pPr>
             <a:r>
@@ -10450,9 +10450,9 @@
                 <a:solidFill>
                   <a:srgbClr val="08775A"/>
                 </a:solidFill>
-                <a:latin typeface="Helvetica Neue"/>
-                <a:ea typeface="Helvetica Neue"/>
-                <a:cs typeface="Helvetica Neue"/>
+                <a:latin typeface="Liberation Sans"/>
+                <a:ea typeface="Liberation Sans"/>
+                <a:cs typeface="Liberation Sans"/>
               </a:rPr>
               <a:t>◯</a:t>
             </a:r>
@@ -10464,7 +10464,7 @@
           <p:cNvPr id="10" name="">
             <a:extLst xmlns:a="http://schemas.openxmlformats.org/drawingml/2006/main">
               <a:ext uri="{FF2B5EF4-FFF2-40B4-BE49-F238E27FC236}">
-                <a16:creationId xmlns:a16="http://schemas.microsoft.com/office/drawing/2014/main" id="{A21BD41C-213F-4DDC-B9AF-103A88FBD7FB}"/>
+                <a16:creationId xmlns:a16="http://schemas.microsoft.com/office/drawing/2014/main" id="{6D76086A-DBD4-4BEE-A09C-7113E8394287}"/>
               </a:ext>
             </a:extLst>
           </p:cNvPr>
@@ -10497,9 +10497,9 @@
                 <a:solidFill>
                   <a:srgbClr val="0B211A"/>
                 </a:solidFill>
-                <a:latin typeface="Helvetica Neue"/>
-                <a:ea typeface="Helvetica Neue"/>
-                <a:cs typeface="Helvetica Neue"/>
+                <a:latin typeface="Liberation Sans"/>
+                <a:ea typeface="Liberation Sans"/>
+                <a:cs typeface="Liberation Sans"/>
               </a:defRPr>
             </a:pPr>
             <a:r>
@@ -10507,9 +10507,9 @@
                 <a:solidFill>
                   <a:srgbClr val="0B211A"/>
                 </a:solidFill>
-                <a:latin typeface="Helvetica Neue"/>
-                <a:ea typeface="Helvetica Neue"/>
-                <a:cs typeface="Helvetica Neue"/>
+                <a:latin typeface="Liberation Sans"/>
+                <a:ea typeface="Liberation Sans"/>
+                <a:cs typeface="Liberation Sans"/>
               </a:rPr>
               <a:t>Резервуар B</a:t>
             </a:r>
@@ -10521,7 +10521,7 @@
           <p:cNvPr id="11" name="">
             <a:extLst xmlns:a="http://schemas.openxmlformats.org/drawingml/2006/main">
               <a:ext uri="{FF2B5EF4-FFF2-40B4-BE49-F238E27FC236}">
-                <a16:creationId xmlns:a16="http://schemas.microsoft.com/office/drawing/2014/main" id="{48091A88-E785-4577-AEA4-952586F2AE93}"/>
+                <a16:creationId xmlns:a16="http://schemas.microsoft.com/office/drawing/2014/main" id="{ABA22081-1AB4-4176-825B-83D7F88E4732}"/>
               </a:ext>
             </a:extLst>
           </p:cNvPr>
@@ -10554,9 +10554,9 @@
                 <a:solidFill>
                   <a:srgbClr val="667A72"/>
                 </a:solidFill>
-                <a:latin typeface="Helvetica Neue"/>
-                <a:ea typeface="Helvetica Neue"/>
-                <a:cs typeface="Helvetica Neue"/>
+                <a:latin typeface="Liberation Sans"/>
+                <a:ea typeface="Liberation Sans"/>
+                <a:cs typeface="Liberation Sans"/>
               </a:defRPr>
             </a:pPr>
             <a:r>
@@ -10564,9 +10564,9 @@
                 <a:solidFill>
                   <a:srgbClr val="667A72"/>
                 </a:solidFill>
-                <a:latin typeface="Helvetica Neue"/>
-                <a:ea typeface="Helvetica Neue"/>
-                <a:cs typeface="Helvetica Neue"/>
+                <a:latin typeface="Liberation Sans"/>
+                <a:ea typeface="Liberation Sans"/>
+                <a:cs typeface="Liberation Sans"/>
               </a:rPr>
               <a:t>S 6 · T95 342 · ЦЧ 52</a:t>
             </a:r>
@@ -10578,7 +10578,7 @@
           <p:cNvPr id="12" name="">
             <a:extLst xmlns:a="http://schemas.openxmlformats.org/drawingml/2006/main">
               <a:ext uri="{FF2B5EF4-FFF2-40B4-BE49-F238E27FC236}">
-                <a16:creationId xmlns:a16="http://schemas.microsoft.com/office/drawing/2014/main" id="{B1DD5B5F-3E11-429D-9AEB-2FD693E87FF1}"/>
+                <a16:creationId xmlns:a16="http://schemas.microsoft.com/office/drawing/2014/main" id="{2E567EC3-9192-4B4A-BDE4-C9C79A032FAA}"/>
               </a:ext>
             </a:extLst>
           </p:cNvPr>
@@ -10611,9 +10611,9 @@
                 <a:solidFill>
                   <a:srgbClr val="08775A"/>
                 </a:solidFill>
-                <a:latin typeface="Helvetica Neue"/>
-                <a:ea typeface="Helvetica Neue"/>
-                <a:cs typeface="Helvetica Neue"/>
+                <a:latin typeface="Liberation Sans"/>
+                <a:ea typeface="Liberation Sans"/>
+                <a:cs typeface="Liberation Sans"/>
               </a:defRPr>
             </a:pPr>
             <a:r>
@@ -10621,9 +10621,9 @@
                 <a:solidFill>
                   <a:srgbClr val="08775A"/>
                 </a:solidFill>
-                <a:latin typeface="Helvetica Neue"/>
-                <a:ea typeface="Helvetica Neue"/>
-                <a:cs typeface="Helvetica Neue"/>
+                <a:latin typeface="Liberation Sans"/>
+                <a:ea typeface="Liberation Sans"/>
+                <a:cs typeface="Liberation Sans"/>
               </a:rPr>
               <a:t>→</a:t>
             </a:r>
@@ -10635,7 +10635,7 @@
           <p:cNvPr id="13" name="">
             <a:extLst xmlns:a="http://schemas.openxmlformats.org/drawingml/2006/main">
               <a:ext uri="{FF2B5EF4-FFF2-40B4-BE49-F238E27FC236}">
-                <a16:creationId xmlns:a16="http://schemas.microsoft.com/office/drawing/2014/main" id="{1210C550-16E1-49A6-8E58-8B6F5392108E}"/>
+                <a16:creationId xmlns:a16="http://schemas.microsoft.com/office/drawing/2014/main" id="{3414BAD0-F55D-4D8D-95FD-E17E5E0F6912}"/>
               </a:ext>
             </a:extLst>
           </p:cNvPr>
@@ -10667,7 +10667,7 @@
           <p:cNvPr id="14" name="">
             <a:extLst xmlns:a="http://schemas.openxmlformats.org/drawingml/2006/main">
               <a:ext uri="{FF2B5EF4-FFF2-40B4-BE49-F238E27FC236}">
-                <a16:creationId xmlns:a16="http://schemas.microsoft.com/office/drawing/2014/main" id="{F54E4651-C527-422A-9DB1-82C924128153}"/>
+                <a16:creationId xmlns:a16="http://schemas.microsoft.com/office/drawing/2014/main" id="{1DFBD313-60E9-44F9-B0E7-2A803FB624FA}"/>
               </a:ext>
             </a:extLst>
           </p:cNvPr>
@@ -10700,9 +10700,9 @@
                 <a:solidFill>
                   <a:srgbClr val="9DE8CA"/>
                 </a:solidFill>
-                <a:latin typeface="Helvetica Neue"/>
-                <a:ea typeface="Helvetica Neue"/>
-                <a:cs typeface="Helvetica Neue"/>
+                <a:latin typeface="Liberation Sans"/>
+                <a:ea typeface="Liberation Sans"/>
+                <a:cs typeface="Liberation Sans"/>
               </a:defRPr>
             </a:pPr>
             <a:r>
@@ -10710,9 +10710,9 @@
                 <a:solidFill>
                   <a:srgbClr val="9DE8CA"/>
                 </a:solidFill>
-                <a:latin typeface="Helvetica Neue"/>
-                <a:ea typeface="Helvetica Neue"/>
-                <a:cs typeface="Helvetica Neue"/>
+                <a:latin typeface="Liberation Sans"/>
+                <a:ea typeface="Liberation Sans"/>
+                <a:cs typeface="Liberation Sans"/>
               </a:rPr>
               <a:t>Σ долей = 100%</a:t>
             </a:r>
@@ -10724,7 +10724,7 @@
           <p:cNvPr id="15" name="">
             <a:extLst xmlns:a="http://schemas.openxmlformats.org/drawingml/2006/main">
               <a:ext uri="{FF2B5EF4-FFF2-40B4-BE49-F238E27FC236}">
-                <a16:creationId xmlns:a16="http://schemas.microsoft.com/office/drawing/2014/main" id="{FA3FA3F3-4B2F-4CD2-A5E6-3ABBE01AA60D}"/>
+                <a16:creationId xmlns:a16="http://schemas.microsoft.com/office/drawing/2014/main" id="{F9162BCD-EBD2-4CD7-8E29-7D356E9B3E90}"/>
               </a:ext>
             </a:extLst>
           </p:cNvPr>
@@ -10757,9 +10757,9 @@
                 <a:solidFill>
                   <a:srgbClr val="FFFFFF"/>
                 </a:solidFill>
-                <a:latin typeface="Helvetica Neue"/>
-                <a:ea typeface="Helvetica Neue"/>
-                <a:cs typeface="Helvetica Neue"/>
+                <a:latin typeface="Liberation Sans"/>
+                <a:ea typeface="Liberation Sans"/>
+                <a:cs typeface="Liberation Sans"/>
               </a:defRPr>
             </a:pPr>
             <a:r>
@@ -10767,9 +10767,9 @@
                 <a:solidFill>
                   <a:srgbClr val="FFFFFF"/>
                 </a:solidFill>
-                <a:latin typeface="Helvetica Neue"/>
-                <a:ea typeface="Helvetica Neue"/>
-                <a:cs typeface="Helvetica Neue"/>
+                <a:latin typeface="Liberation Sans"/>
+                <a:ea typeface="Liberation Sans"/>
+                <a:cs typeface="Liberation Sans"/>
               </a:rPr>
               <a:t>S и ЦЧ — массовый баланс</a:t>
             </a:r>
@@ -10780,9 +10780,9 @@
                 <a:solidFill>
                   <a:srgbClr val="FFFFFF"/>
                 </a:solidFill>
-                <a:latin typeface="Helvetica Neue"/>
-                <a:ea typeface="Helvetica Neue"/>
-                <a:cs typeface="Helvetica Neue"/>
+                <a:latin typeface="Liberation Sans"/>
+                <a:ea typeface="Liberation Sans"/>
+                <a:cs typeface="Liberation Sans"/>
               </a:defRPr>
             </a:pPr>
             <a:r>
@@ -10790,9 +10790,9 @@
                 <a:solidFill>
                   <a:srgbClr val="FFFFFF"/>
                 </a:solidFill>
-                <a:latin typeface="Helvetica Neue"/>
-                <a:ea typeface="Helvetica Neue"/>
-                <a:cs typeface="Helvetica Neue"/>
+                <a:latin typeface="Liberation Sans"/>
+                <a:ea typeface="Liberation Sans"/>
+                <a:cs typeface="Liberation Sans"/>
               </a:rPr>
               <a:t>T95 — linear proxy</a:t>
             </a:r>
@@ -10803,9 +10803,9 @@
                 <a:solidFill>
                   <a:srgbClr val="FFFFFF"/>
                 </a:solidFill>
-                <a:latin typeface="Helvetica Neue"/>
-                <a:ea typeface="Helvetica Neue"/>
-                <a:cs typeface="Helvetica Neue"/>
+                <a:latin typeface="Liberation Sans"/>
+                <a:ea typeface="Liberation Sans"/>
+                <a:cs typeface="Liberation Sans"/>
               </a:defRPr>
             </a:pPr>
             <a:r>
@@ -10813,9 +10813,9 @@
                 <a:solidFill>
                   <a:srgbClr val="FFFFFF"/>
                 </a:solidFill>
-                <a:latin typeface="Helvetica Neue"/>
-                <a:ea typeface="Helvetica Neue"/>
-                <a:cs typeface="Helvetica Neue"/>
+                <a:latin typeface="Liberation Sans"/>
+                <a:ea typeface="Liberation Sans"/>
+                <a:cs typeface="Liberation Sans"/>
               </a:rPr>
               <a:t>сетка рецепта 5%</a:t>
             </a:r>
@@ -10827,7 +10827,7 @@
           <p:cNvPr id="16" name="">
             <a:extLst xmlns:a="http://schemas.openxmlformats.org/drawingml/2006/main">
               <a:ext uri="{FF2B5EF4-FFF2-40B4-BE49-F238E27FC236}">
-                <a16:creationId xmlns:a16="http://schemas.microsoft.com/office/drawing/2014/main" id="{DAF0C332-341A-43B2-AED7-E982F08D45C0}"/>
+                <a16:creationId xmlns:a16="http://schemas.microsoft.com/office/drawing/2014/main" id="{EAB18B4C-1737-475C-9CC3-B6B606508665}"/>
               </a:ext>
             </a:extLst>
           </p:cNvPr>
@@ -10860,9 +10860,9 @@
                 <a:solidFill>
                   <a:srgbClr val="08775A"/>
                 </a:solidFill>
-                <a:latin typeface="Helvetica Neue"/>
-                <a:ea typeface="Helvetica Neue"/>
-                <a:cs typeface="Helvetica Neue"/>
+                <a:latin typeface="Liberation Sans"/>
+                <a:ea typeface="Liberation Sans"/>
+                <a:cs typeface="Liberation Sans"/>
               </a:defRPr>
             </a:pPr>
             <a:r>
@@ -10870,9 +10870,9 @@
                 <a:solidFill>
                   <a:srgbClr val="08775A"/>
                 </a:solidFill>
-                <a:latin typeface="Helvetica Neue"/>
-                <a:ea typeface="Helvetica Neue"/>
-                <a:cs typeface="Helvetica Neue"/>
+                <a:latin typeface="Liberation Sans"/>
+                <a:ea typeface="Liberation Sans"/>
+                <a:cs typeface="Liberation Sans"/>
               </a:rPr>
               <a:t>→</a:t>
             </a:r>
@@ -10884,7 +10884,7 @@
           <p:cNvPr id="17" name="">
             <a:extLst xmlns:a="http://schemas.openxmlformats.org/drawingml/2006/main">
               <a:ext uri="{FF2B5EF4-FFF2-40B4-BE49-F238E27FC236}">
-                <a16:creationId xmlns:a16="http://schemas.microsoft.com/office/drawing/2014/main" id="{AA22049E-D83A-4BFB-B43F-AA7E06562011}"/>
+                <a16:creationId xmlns:a16="http://schemas.microsoft.com/office/drawing/2014/main" id="{BC8A82E5-DFEC-40DB-9044-16939F219600}"/>
               </a:ext>
             </a:extLst>
           </p:cNvPr>
@@ -10916,7 +10916,7 @@
           <p:cNvPr id="18" name="">
             <a:extLst xmlns:a="http://schemas.openxmlformats.org/drawingml/2006/main">
               <a:ext uri="{FF2B5EF4-FFF2-40B4-BE49-F238E27FC236}">
-                <a16:creationId xmlns:a16="http://schemas.microsoft.com/office/drawing/2014/main" id="{656B49F9-FD0D-43A1-A3BB-9859EEBC283A}"/>
+                <a16:creationId xmlns:a16="http://schemas.microsoft.com/office/drawing/2014/main" id="{C3B10193-FB29-4D3D-A294-D03FF49CC4FA}"/>
               </a:ext>
             </a:extLst>
           </p:cNvPr>
@@ -10949,9 +10949,9 @@
                 <a:solidFill>
                   <a:srgbClr val="FFFFFF"/>
                 </a:solidFill>
-                <a:latin typeface="Helvetica Neue"/>
-                <a:ea typeface="Helvetica Neue"/>
-                <a:cs typeface="Helvetica Neue"/>
+                <a:latin typeface="Liberation Sans"/>
+                <a:ea typeface="Liberation Sans"/>
+                <a:cs typeface="Liberation Sans"/>
               </a:defRPr>
             </a:pPr>
             <a:r>
@@ -10959,9 +10959,9 @@
                 <a:solidFill>
                   <a:srgbClr val="FFFFFF"/>
                 </a:solidFill>
-                <a:latin typeface="Helvetica Neue"/>
-                <a:ea typeface="Helvetica Neue"/>
-                <a:cs typeface="Helvetica Neue"/>
+                <a:latin typeface="Liberation Sans"/>
+                <a:ea typeface="Liberation Sans"/>
+                <a:cs typeface="Liberation Sans"/>
               </a:rPr>
               <a:t>K5</a:t>
             </a:r>
@@ -10973,7 +10973,7 @@
           <p:cNvPr id="19" name="">
             <a:extLst xmlns:a="http://schemas.openxmlformats.org/drawingml/2006/main">
               <a:ext uri="{FF2B5EF4-FFF2-40B4-BE49-F238E27FC236}">
-                <a16:creationId xmlns:a16="http://schemas.microsoft.com/office/drawing/2014/main" id="{8F15744B-103F-43FC-8129-EC7C90E40C02}"/>
+                <a16:creationId xmlns:a16="http://schemas.microsoft.com/office/drawing/2014/main" id="{E9844E43-B65D-43AB-A738-6BCC42CB3FF6}"/>
               </a:ext>
             </a:extLst>
           </p:cNvPr>
@@ -11006,9 +11006,9 @@
                 <a:solidFill>
                   <a:srgbClr val="9DE8CA"/>
                 </a:solidFill>
-                <a:latin typeface="Helvetica Neue"/>
-                <a:ea typeface="Helvetica Neue"/>
-                <a:cs typeface="Helvetica Neue"/>
+                <a:latin typeface="Liberation Sans"/>
+                <a:ea typeface="Liberation Sans"/>
+                <a:cs typeface="Liberation Sans"/>
               </a:defRPr>
             </a:pPr>
             <a:r>
@@ -11016,9 +11016,9 @@
                 <a:solidFill>
                   <a:srgbClr val="9DE8CA"/>
                 </a:solidFill>
-                <a:latin typeface="Helvetica Neue"/>
-                <a:ea typeface="Helvetica Neue"/>
-                <a:cs typeface="Helvetica Neue"/>
+                <a:latin typeface="Liberation Sans"/>
+                <a:ea typeface="Liberation Sans"/>
+                <a:cs typeface="Liberation Sans"/>
               </a:rPr>
               <a:t>S ≤10 · T95 ≤360</a:t>
             </a:r>
@@ -11029,9 +11029,9 @@
                 <a:solidFill>
                   <a:srgbClr val="9DE8CA"/>
                 </a:solidFill>
-                <a:latin typeface="Helvetica Neue"/>
-                <a:ea typeface="Helvetica Neue"/>
-                <a:cs typeface="Helvetica Neue"/>
+                <a:latin typeface="Liberation Sans"/>
+                <a:ea typeface="Liberation Sans"/>
+                <a:cs typeface="Liberation Sans"/>
               </a:defRPr>
             </a:pPr>
             <a:r>
@@ -11039,9 +11039,9 @@
                 <a:solidFill>
                   <a:srgbClr val="9DE8CA"/>
                 </a:solidFill>
-                <a:latin typeface="Helvetica Neue"/>
-                <a:ea typeface="Helvetica Neue"/>
-                <a:cs typeface="Helvetica Neue"/>
+                <a:latin typeface="Liberation Sans"/>
+                <a:ea typeface="Liberation Sans"/>
+                <a:cs typeface="Liberation Sans"/>
               </a:rPr>
               <a:t>ЦЧ ≥51 / ≥47</a:t>
             </a:r>
@@ -11053,7 +11053,7 @@
           <p:cNvPr id="20" name="">
             <a:extLst xmlns:a="http://schemas.openxmlformats.org/drawingml/2006/main">
               <a:ext uri="{FF2B5EF4-FFF2-40B4-BE49-F238E27FC236}">
-                <a16:creationId xmlns:a16="http://schemas.microsoft.com/office/drawing/2014/main" id="{CB434D75-D865-469C-A30A-196D1A11A620}"/>
+                <a16:creationId xmlns:a16="http://schemas.microsoft.com/office/drawing/2014/main" id="{73BF02D9-C2D7-458B-B536-0C4B0245080D}"/>
               </a:ext>
             </a:extLst>
           </p:cNvPr>
@@ -11085,7 +11085,7 @@
           <p:cNvPr id="21" name="">
             <a:extLst xmlns:a="http://schemas.openxmlformats.org/drawingml/2006/main">
               <a:ext uri="{FF2B5EF4-FFF2-40B4-BE49-F238E27FC236}">
-                <a16:creationId xmlns:a16="http://schemas.microsoft.com/office/drawing/2014/main" id="{70180AA1-A010-4025-9AB9-1F32E7EBC2EF}"/>
+                <a16:creationId xmlns:a16="http://schemas.microsoft.com/office/drawing/2014/main" id="{90241F55-8CCF-4675-A6AC-197280C77903}"/>
               </a:ext>
             </a:extLst>
           </p:cNvPr>
@@ -11118,9 +11118,9 @@
                 <a:solidFill>
                   <a:srgbClr val="0B211A"/>
                 </a:solidFill>
-                <a:latin typeface="Helvetica Neue"/>
-                <a:ea typeface="Helvetica Neue"/>
-                <a:cs typeface="Helvetica Neue"/>
+                <a:latin typeface="Liberation Sans"/>
+                <a:ea typeface="Liberation Sans"/>
+                <a:cs typeface="Liberation Sans"/>
               </a:defRPr>
             </a:pPr>
             <a:r>
@@ -11128,9 +11128,9 @@
                 <a:solidFill>
                   <a:srgbClr val="0B211A"/>
                 </a:solidFill>
-                <a:latin typeface="Helvetica Neue"/>
-                <a:ea typeface="Helvetica Neue"/>
-                <a:cs typeface="Helvetica Neue"/>
+                <a:latin typeface="Liberation Sans"/>
+                <a:ea typeface="Liberation Sans"/>
+                <a:cs typeface="Liberation Sans"/>
               </a:rPr>
               <a:t>2-EHN</a:t>
             </a:r>
@@ -11142,7 +11142,7 @@
           <p:cNvPr id="22" name="">
             <a:extLst xmlns:a="http://schemas.openxmlformats.org/drawingml/2006/main">
               <a:ext uri="{FF2B5EF4-FFF2-40B4-BE49-F238E27FC236}">
-                <a16:creationId xmlns:a16="http://schemas.microsoft.com/office/drawing/2014/main" id="{B11B81CA-FC58-4E1E-9789-C5E2B2899BE2}"/>
+                <a16:creationId xmlns:a16="http://schemas.microsoft.com/office/drawing/2014/main" id="{5A267B58-59B3-4075-B486-36F5E4F6A283}"/>
               </a:ext>
             </a:extLst>
           </p:cNvPr>
@@ -11175,9 +11175,9 @@
                 <a:solidFill>
                   <a:srgbClr val="667A72"/>
                 </a:solidFill>
-                <a:latin typeface="Helvetica Neue"/>
-                <a:ea typeface="Helvetica Neue"/>
-                <a:cs typeface="Helvetica Neue"/>
+                <a:latin typeface="Liberation Sans"/>
+                <a:ea typeface="Liberation Sans"/>
+                <a:cs typeface="Liberation Sans"/>
               </a:defRPr>
             </a:pPr>
             <a:r>
@@ -11185,9 +11185,9 @@
                 <a:solidFill>
                   <a:srgbClr val="667A72"/>
                 </a:solidFill>
-                <a:latin typeface="Helvetica Neue"/>
-                <a:ea typeface="Helvetica Neue"/>
-                <a:cs typeface="Helvetica Neue"/>
+                <a:latin typeface="Liberation Sans"/>
+                <a:ea typeface="Liberation Sans"/>
+                <a:cs typeface="Liberation Sans"/>
               </a:rPr>
               <a:t>200–3000 ppm</a:t>
             </a:r>
@@ -11198,9 +11198,9 @@
                 <a:solidFill>
                   <a:srgbClr val="667A72"/>
                 </a:solidFill>
-                <a:latin typeface="Helvetica Neue"/>
-                <a:ea typeface="Helvetica Neue"/>
-                <a:cs typeface="Helvetica Neue"/>
+                <a:latin typeface="Liberation Sans"/>
+                <a:ea typeface="Liberation Sans"/>
+                <a:cs typeface="Liberation Sans"/>
               </a:defRPr>
             </a:pPr>
             <a:r>
@@ -11208,9 +11208,9 @@
                 <a:solidFill>
                   <a:srgbClr val="667A72"/>
                 </a:solidFill>
-                <a:latin typeface="Helvetica Neue"/>
-                <a:ea typeface="Helvetica Neue"/>
-                <a:cs typeface="Helvetica Neue"/>
+                <a:latin typeface="Liberation Sans"/>
+                <a:ea typeface="Liberation Sans"/>
+                <a:cs typeface="Liberation Sans"/>
               </a:rPr>
               <a:t>hard effect +4 / 1000 ppm</a:t>
             </a:r>
@@ -11222,7 +11222,7 @@
           <p:cNvPr id="23" name="">
             <a:extLst xmlns:a="http://schemas.openxmlformats.org/drawingml/2006/main">
               <a:ext uri="{FF2B5EF4-FFF2-40B4-BE49-F238E27FC236}">
-                <a16:creationId xmlns:a16="http://schemas.microsoft.com/office/drawing/2014/main" id="{B1908717-BF4E-41C8-8D13-25866B203DA2}"/>
+                <a16:creationId xmlns:a16="http://schemas.microsoft.com/office/drawing/2014/main" id="{E308FBBA-016B-4E40-BFF8-9F10797E0601}"/>
               </a:ext>
             </a:extLst>
           </p:cNvPr>
@@ -11255,9 +11255,9 @@
                 <a:solidFill>
                   <a:srgbClr val="B34A40"/>
                 </a:solidFill>
-                <a:latin typeface="Helvetica Neue"/>
-                <a:ea typeface="Helvetica Neue"/>
-                <a:cs typeface="Helvetica Neue"/>
+                <a:latin typeface="Liberation Sans"/>
+                <a:ea typeface="Liberation Sans"/>
+                <a:cs typeface="Liberation Sans"/>
               </a:defRPr>
             </a:pPr>
             <a:r>
@@ -11265,9 +11265,9 @@
                 <a:solidFill>
                   <a:srgbClr val="B34A40"/>
                 </a:solidFill>
-                <a:latin typeface="Helvetica Neue"/>
-                <a:ea typeface="Helvetica Neue"/>
-                <a:cs typeface="Helvetica Neue"/>
+                <a:latin typeface="Liberation Sans"/>
+                <a:ea typeface="Liberation Sans"/>
+                <a:cs typeface="Liberation Sans"/>
               </a:rPr>
               <a:t>1 т присадки = 100 т ДТ</a:t>
             </a:r>
@@ -11277,7 +11277,7 @@
     </p:spTree>
     <p:extLst>
       <p:ext uri="{BB962C8B-B14F-4D97-AF65-F5344CB8AC3E}">
-        <p14:creationId xmlns:p14="http://schemas.microsoft.com/office/powerpoint/2010/main" val="1023810597"/>
+        <p14:creationId xmlns:p14="http://schemas.microsoft.com/office/powerpoint/2010/main" val="404441456"/>
       </p:ext>
     </p:extLst>
   </p:cSld>
@@ -11308,7 +11308,7 @@
           <p:cNvPr id="38" name="">
             <a:extLst xmlns:a="http://schemas.openxmlformats.org/drawingml/2006/main">
               <a:ext uri="{FF2B5EF4-FFF2-40B4-BE49-F238E27FC236}">
-                <a16:creationId xmlns:a16="http://schemas.microsoft.com/office/drawing/2014/main" id="{1A7C1113-83AE-4194-AC9D-1FB974A57474}"/>
+                <a16:creationId xmlns:a16="http://schemas.microsoft.com/office/drawing/2014/main" id="{291D4DDC-078F-479C-921A-73F32718A59D}"/>
               </a:ext>
             </a:extLst>
           </p:cNvPr>
@@ -11341,9 +11341,9 @@
                 <a:solidFill>
                   <a:srgbClr val="08775A"/>
                 </a:solidFill>
-                <a:latin typeface="Helvetica Neue"/>
-                <a:ea typeface="Helvetica Neue"/>
-                <a:cs typeface="Helvetica Neue"/>
+                <a:latin typeface="Liberation Sans"/>
+                <a:ea typeface="Liberation Sans"/>
+                <a:cs typeface="Liberation Sans"/>
               </a:defRPr>
             </a:pPr>
             <a:r>
@@ -11351,9 +11351,9 @@
                 <a:solidFill>
                   <a:srgbClr val="08775A"/>
                 </a:solidFill>
-                <a:latin typeface="Helvetica Neue"/>
-                <a:ea typeface="Helvetica Neue"/>
-                <a:cs typeface="Helvetica Neue"/>
+                <a:latin typeface="Liberation Sans"/>
+                <a:ea typeface="Liberation Sans"/>
+                <a:cs typeface="Liberation Sans"/>
               </a:rPr>
               <a:t>ВОСПРОИЗВОДИМОСТЬ И БЕЗОПАСНОСТЬ</a:t>
             </a:r>
@@ -11365,7 +11365,7 @@
           <p:cNvPr id="2" name="">
             <a:extLst xmlns:a="http://schemas.openxmlformats.org/drawingml/2006/main">
               <a:ext uri="{FF2B5EF4-FFF2-40B4-BE49-F238E27FC236}">
-                <a16:creationId xmlns:a16="http://schemas.microsoft.com/office/drawing/2014/main" id="{A213E09A-D501-4BE0-9418-5932977B7C5A}"/>
+                <a16:creationId xmlns:a16="http://schemas.microsoft.com/office/drawing/2014/main" id="{538AA009-29FD-4720-9D18-E31D159CECA0}"/>
               </a:ext>
             </a:extLst>
           </p:cNvPr>
@@ -11398,9 +11398,9 @@
                 <a:solidFill>
                   <a:srgbClr val="0B211A"/>
                 </a:solidFill>
-                <a:latin typeface="Helvetica Neue"/>
-                <a:ea typeface="Helvetica Neue"/>
-                <a:cs typeface="Helvetica Neue"/>
+                <a:latin typeface="Liberation Sans"/>
+                <a:ea typeface="Liberation Sans"/>
+                <a:cs typeface="Liberation Sans"/>
               </a:defRPr>
             </a:pPr>
             <a:r>
@@ -11408,9 +11408,9 @@
                 <a:solidFill>
                   <a:srgbClr val="0B211A"/>
                 </a:solidFill>
-                <a:latin typeface="Helvetica Neue"/>
-                <a:ea typeface="Helvetica Neue"/>
-                <a:cs typeface="Helvetica Neue"/>
+                <a:latin typeface="Liberation Sans"/>
+                <a:ea typeface="Liberation Sans"/>
+                <a:cs typeface="Liberation Sans"/>
               </a:rPr>
               <a:t>Эксперт получает работающий продукт одной командой</a:t>
             </a:r>
@@ -11422,7 +11422,7 @@
           <p:cNvPr id="3" name="">
             <a:extLst xmlns:a="http://schemas.openxmlformats.org/drawingml/2006/main">
               <a:ext uri="{FF2B5EF4-FFF2-40B4-BE49-F238E27FC236}">
-                <a16:creationId xmlns:a16="http://schemas.microsoft.com/office/drawing/2014/main" id="{AFBE61D6-DA42-4292-A0CB-048BEBDF215E}"/>
+                <a16:creationId xmlns:a16="http://schemas.microsoft.com/office/drawing/2014/main" id="{ECA8001F-B91D-452A-9E19-2A45BD8637DF}"/>
               </a:ext>
             </a:extLst>
           </p:cNvPr>
@@ -11455,9 +11455,9 @@
                 <a:solidFill>
                   <a:srgbClr val="667A72"/>
                 </a:solidFill>
-                <a:latin typeface="Helvetica Neue"/>
-                <a:ea typeface="Helvetica Neue"/>
-                <a:cs typeface="Helvetica Neue"/>
+                <a:latin typeface="Liberation Sans"/>
+                <a:ea typeface="Liberation Sans"/>
+                <a:cs typeface="Liberation Sans"/>
               </a:defRPr>
             </a:pPr>
             <a:r>
@@ -11465,9 +11465,9 @@
                 <a:solidFill>
                   <a:srgbClr val="667A72"/>
                 </a:solidFill>
-                <a:latin typeface="Helvetica Neue"/>
-                <a:ea typeface="Helvetica Neue"/>
-                <a:cs typeface="Helvetica Neue"/>
+                <a:latin typeface="Liberation Sans"/>
+                <a:ea typeface="Liberation Sans"/>
+                <a:cs typeface="Liberation Sans"/>
               </a:rPr>
               <a:t>09</a:t>
             </a:r>
@@ -11479,7 +11479,7 @@
           <p:cNvPr id="4" name="">
             <a:extLst xmlns:a="http://schemas.openxmlformats.org/drawingml/2006/main">
               <a:ext uri="{FF2B5EF4-FFF2-40B4-BE49-F238E27FC236}">
-                <a16:creationId xmlns:a16="http://schemas.microsoft.com/office/drawing/2014/main" id="{5F6DE143-6069-44AF-AF8B-D3D55958DA71}"/>
+                <a16:creationId xmlns:a16="http://schemas.microsoft.com/office/drawing/2014/main" id="{82F7526B-279F-4C20-92BF-83176A6D9995}"/>
               </a:ext>
             </a:extLst>
           </p:cNvPr>
@@ -11512,9 +11512,9 @@
                 <a:solidFill>
                   <a:srgbClr val="08775A"/>
                 </a:solidFill>
-                <a:latin typeface="Helvetica Neue"/>
-                <a:ea typeface="Helvetica Neue"/>
-                <a:cs typeface="Helvetica Neue"/>
+                <a:latin typeface="Liberation Sans"/>
+                <a:ea typeface="Liberation Sans"/>
+                <a:cs typeface="Liberation Sans"/>
               </a:defRPr>
             </a:pPr>
             <a:r>
@@ -11522,9 +11522,9 @@
                 <a:solidFill>
                   <a:srgbClr val="08775A"/>
                 </a:solidFill>
-                <a:latin typeface="Helvetica Neue"/>
-                <a:ea typeface="Helvetica Neue"/>
-                <a:cs typeface="Helvetica Neue"/>
+                <a:latin typeface="Liberation Sans"/>
+                <a:ea typeface="Liberation Sans"/>
+                <a:cs typeface="Liberation Sans"/>
               </a:rPr>
               <a:t>./scripts/demo.sh up</a:t>
             </a:r>
@@ -11536,7 +11536,7 @@
           <p:cNvPr id="5" name="">
             <a:extLst xmlns:a="http://schemas.openxmlformats.org/drawingml/2006/main">
               <a:ext uri="{FF2B5EF4-FFF2-40B4-BE49-F238E27FC236}">
-                <a16:creationId xmlns:a16="http://schemas.microsoft.com/office/drawing/2014/main" id="{2DCCECA0-57A3-45F0-A75C-0D66301EF91C}"/>
+                <a16:creationId xmlns:a16="http://schemas.microsoft.com/office/drawing/2014/main" id="{0BBD05EF-3FB3-494B-9318-963138A41FF2}"/>
               </a:ext>
             </a:extLst>
           </p:cNvPr>
@@ -11568,7 +11568,7 @@
           <p:cNvPr id="6" name="">
             <a:extLst xmlns:a="http://schemas.openxmlformats.org/drawingml/2006/main">
               <a:ext uri="{FF2B5EF4-FFF2-40B4-BE49-F238E27FC236}">
-                <a16:creationId xmlns:a16="http://schemas.microsoft.com/office/drawing/2014/main" id="{5EFD73C7-2BF1-4B14-91A8-DA02B64E9809}"/>
+                <a16:creationId xmlns:a16="http://schemas.microsoft.com/office/drawing/2014/main" id="{728B593B-B411-4CDE-BA1D-80EFCF5AC97E}"/>
               </a:ext>
             </a:extLst>
           </p:cNvPr>
@@ -11601,9 +11601,9 @@
                 <a:solidFill>
                   <a:srgbClr val="0B211A"/>
                 </a:solidFill>
-                <a:latin typeface="Helvetica Neue"/>
-                <a:ea typeface="Helvetica Neue"/>
-                <a:cs typeface="Helvetica Neue"/>
+                <a:latin typeface="Liberation Sans"/>
+                <a:ea typeface="Liberation Sans"/>
+                <a:cs typeface="Liberation Sans"/>
               </a:defRPr>
             </a:pPr>
             <a:r>
@@ -11611,9 +11611,9 @@
                 <a:solidFill>
                   <a:srgbClr val="0B211A"/>
                 </a:solidFill>
-                <a:latin typeface="Helvetica Neue"/>
-                <a:ea typeface="Helvetica Neue"/>
-                <a:cs typeface="Helvetica Neue"/>
+                <a:latin typeface="Liberation Sans"/>
+                <a:ea typeface="Liberation Sans"/>
+                <a:cs typeface="Liberation Sans"/>
               </a:rPr>
               <a:t>prepare</a:t>
             </a:r>
@@ -11625,7 +11625,7 @@
           <p:cNvPr id="7" name="">
             <a:extLst xmlns:a="http://schemas.openxmlformats.org/drawingml/2006/main">
               <a:ext uri="{FF2B5EF4-FFF2-40B4-BE49-F238E27FC236}">
-                <a16:creationId xmlns:a16="http://schemas.microsoft.com/office/drawing/2014/main" id="{F2828E64-A4F1-49BB-998C-8C8EBF32E731}"/>
+                <a16:creationId xmlns:a16="http://schemas.microsoft.com/office/drawing/2014/main" id="{FFE6F59C-2F92-4580-96F3-4D4F3591BB50}"/>
               </a:ext>
             </a:extLst>
           </p:cNvPr>
@@ -11658,9 +11658,9 @@
                 <a:solidFill>
                   <a:srgbClr val="667A72"/>
                 </a:solidFill>
-                <a:latin typeface="Helvetica Neue"/>
-                <a:ea typeface="Helvetica Neue"/>
-                <a:cs typeface="Helvetica Neue"/>
+                <a:latin typeface="Liberation Sans"/>
+                <a:ea typeface="Liberation Sans"/>
+                <a:cs typeface="Liberation Sans"/>
               </a:defRPr>
             </a:pPr>
             <a:r>
@@ -11668,9 +11668,9 @@
                 <a:solidFill>
                   <a:srgbClr val="667A72"/>
                 </a:solidFill>
-                <a:latin typeface="Helvetica Neue"/>
-                <a:ea typeface="Helvetica Neue"/>
-                <a:cs typeface="Helvetica Neue"/>
+                <a:latin typeface="Liberation Sans"/>
+                <a:ea typeface="Liberation Sans"/>
+                <a:cs typeface="Liberation Sans"/>
               </a:rPr>
               <a:t>18,3 млн строк</a:t>
             </a:r>
@@ -11682,7 +11682,7 @@
           <p:cNvPr id="8" name="">
             <a:extLst xmlns:a="http://schemas.openxmlformats.org/drawingml/2006/main">
               <a:ext uri="{FF2B5EF4-FFF2-40B4-BE49-F238E27FC236}">
-                <a16:creationId xmlns:a16="http://schemas.microsoft.com/office/drawing/2014/main" id="{D27B0D6A-BBE9-410C-A1C3-16B9687154A6}"/>
+                <a16:creationId xmlns:a16="http://schemas.microsoft.com/office/drawing/2014/main" id="{04F75967-1BFE-4BA1-924C-9EB8F8871DDD}"/>
               </a:ext>
             </a:extLst>
           </p:cNvPr>
@@ -11715,9 +11715,9 @@
                 <a:solidFill>
                   <a:srgbClr val="08775A"/>
                 </a:solidFill>
-                <a:latin typeface="Helvetica Neue"/>
-                <a:ea typeface="Helvetica Neue"/>
-                <a:cs typeface="Helvetica Neue"/>
+                <a:latin typeface="Liberation Sans"/>
+                <a:ea typeface="Liberation Sans"/>
+                <a:cs typeface="Liberation Sans"/>
               </a:defRPr>
             </a:pPr>
             <a:r>
@@ -11725,9 +11725,9 @@
                 <a:solidFill>
                   <a:srgbClr val="08775A"/>
                 </a:solidFill>
-                <a:latin typeface="Helvetica Neue"/>
-                <a:ea typeface="Helvetica Neue"/>
-                <a:cs typeface="Helvetica Neue"/>
+                <a:latin typeface="Liberation Sans"/>
+                <a:ea typeface="Liberation Sans"/>
+                <a:cs typeface="Liberation Sans"/>
               </a:rPr>
               <a:t>→</a:t>
             </a:r>
@@ -11739,7 +11739,7 @@
           <p:cNvPr id="9" name="">
             <a:extLst xmlns:a="http://schemas.openxmlformats.org/drawingml/2006/main">
               <a:ext uri="{FF2B5EF4-FFF2-40B4-BE49-F238E27FC236}">
-                <a16:creationId xmlns:a16="http://schemas.microsoft.com/office/drawing/2014/main" id="{3F1FF4BA-E006-4C63-B665-CDD058AD8845}"/>
+                <a16:creationId xmlns:a16="http://schemas.microsoft.com/office/drawing/2014/main" id="{08022BCD-2A2D-4CE5-84CC-362184EF8913}"/>
               </a:ext>
             </a:extLst>
           </p:cNvPr>
@@ -11771,7 +11771,7 @@
           <p:cNvPr id="10" name="">
             <a:extLst xmlns:a="http://schemas.openxmlformats.org/drawingml/2006/main">
               <a:ext uri="{FF2B5EF4-FFF2-40B4-BE49-F238E27FC236}">
-                <a16:creationId xmlns:a16="http://schemas.microsoft.com/office/drawing/2014/main" id="{E9EC6D2E-A450-4A45-BEF9-4501030D5CD2}"/>
+                <a16:creationId xmlns:a16="http://schemas.microsoft.com/office/drawing/2014/main" id="{C4681269-526D-4A92-89C8-31FACBD6FBAB}"/>
               </a:ext>
             </a:extLst>
           </p:cNvPr>
@@ -11804,9 +11804,9 @@
                 <a:solidFill>
                   <a:srgbClr val="0B211A"/>
                 </a:solidFill>
-                <a:latin typeface="Helvetica Neue"/>
-                <a:ea typeface="Helvetica Neue"/>
-                <a:cs typeface="Helvetica Neue"/>
+                <a:latin typeface="Liberation Sans"/>
+                <a:ea typeface="Liberation Sans"/>
+                <a:cs typeface="Liberation Sans"/>
               </a:defRPr>
             </a:pPr>
             <a:r>
@@ -11814,9 +11814,9 @@
                 <a:solidFill>
                   <a:srgbClr val="0B211A"/>
                 </a:solidFill>
-                <a:latin typeface="Helvetica Neue"/>
-                <a:ea typeface="Helvetica Neue"/>
-                <a:cs typeface="Helvetica Neue"/>
+                <a:latin typeface="Liberation Sans"/>
+                <a:ea typeface="Liberation Sans"/>
+                <a:cs typeface="Liberation Sans"/>
               </a:rPr>
               <a:t>train</a:t>
             </a:r>
@@ -11828,7 +11828,7 @@
           <p:cNvPr id="11" name="">
             <a:extLst xmlns:a="http://schemas.openxmlformats.org/drawingml/2006/main">
               <a:ext uri="{FF2B5EF4-FFF2-40B4-BE49-F238E27FC236}">
-                <a16:creationId xmlns:a16="http://schemas.microsoft.com/office/drawing/2014/main" id="{819892E9-2A50-4E76-8107-DAF0849FBD71}"/>
+                <a16:creationId xmlns:a16="http://schemas.microsoft.com/office/drawing/2014/main" id="{79CD03C0-00FC-4141-BA93-527A1DC2FB81}"/>
               </a:ext>
             </a:extLst>
           </p:cNvPr>
@@ -11861,9 +11861,9 @@
                 <a:solidFill>
                   <a:srgbClr val="667A72"/>
                 </a:solidFill>
-                <a:latin typeface="Helvetica Neue"/>
-                <a:ea typeface="Helvetica Neue"/>
-                <a:cs typeface="Helvetica Neue"/>
+                <a:latin typeface="Liberation Sans"/>
+                <a:ea typeface="Liberation Sans"/>
+                <a:cs typeface="Liberation Sans"/>
               </a:defRPr>
             </a:pPr>
             <a:r>
@@ -11871,9 +11871,9 @@
                 <a:solidFill>
                   <a:srgbClr val="667A72"/>
                 </a:solidFill>
-                <a:latin typeface="Helvetica Neue"/>
-                <a:ea typeface="Helvetica Neue"/>
-                <a:cs typeface="Helvetica Neue"/>
+                <a:latin typeface="Liberation Sans"/>
+                <a:ea typeface="Liberation Sans"/>
+                <a:cs typeface="Liberation Sans"/>
               </a:rPr>
               <a:t>forecast</a:t>
             </a:r>
@@ -11885,7 +11885,7 @@
           <p:cNvPr id="12" name="">
             <a:extLst xmlns:a="http://schemas.openxmlformats.org/drawingml/2006/main">
               <a:ext uri="{FF2B5EF4-FFF2-40B4-BE49-F238E27FC236}">
-                <a16:creationId xmlns:a16="http://schemas.microsoft.com/office/drawing/2014/main" id="{2ADF32A5-4586-4810-9D0F-78BC14698693}"/>
+                <a16:creationId xmlns:a16="http://schemas.microsoft.com/office/drawing/2014/main" id="{55F28DED-0160-4776-B28C-A805E58421B0}"/>
               </a:ext>
             </a:extLst>
           </p:cNvPr>
@@ -11918,9 +11918,9 @@
                 <a:solidFill>
                   <a:srgbClr val="08775A"/>
                 </a:solidFill>
-                <a:latin typeface="Helvetica Neue"/>
-                <a:ea typeface="Helvetica Neue"/>
-                <a:cs typeface="Helvetica Neue"/>
+                <a:latin typeface="Liberation Sans"/>
+                <a:ea typeface="Liberation Sans"/>
+                <a:cs typeface="Liberation Sans"/>
               </a:defRPr>
             </a:pPr>
             <a:r>
@@ -11928,9 +11928,9 @@
                 <a:solidFill>
                   <a:srgbClr val="08775A"/>
                 </a:solidFill>
-                <a:latin typeface="Helvetica Neue"/>
-                <a:ea typeface="Helvetica Neue"/>
-                <a:cs typeface="Helvetica Neue"/>
+                <a:latin typeface="Liberation Sans"/>
+                <a:ea typeface="Liberation Sans"/>
+                <a:cs typeface="Liberation Sans"/>
               </a:rPr>
               <a:t>→</a:t>
             </a:r>
@@ -11942,7 +11942,7 @@
           <p:cNvPr id="13" name="">
             <a:extLst xmlns:a="http://schemas.openxmlformats.org/drawingml/2006/main">
               <a:ext uri="{FF2B5EF4-FFF2-40B4-BE49-F238E27FC236}">
-                <a16:creationId xmlns:a16="http://schemas.microsoft.com/office/drawing/2014/main" id="{60D94C89-0437-4CFD-BEBA-FF605BE85717}"/>
+                <a16:creationId xmlns:a16="http://schemas.microsoft.com/office/drawing/2014/main" id="{53974A32-D2DE-450D-A83A-ECB46FB7F4C3}"/>
               </a:ext>
             </a:extLst>
           </p:cNvPr>
@@ -11974,7 +11974,7 @@
           <p:cNvPr id="14" name="">
             <a:extLst xmlns:a="http://schemas.openxmlformats.org/drawingml/2006/main">
               <a:ext uri="{FF2B5EF4-FFF2-40B4-BE49-F238E27FC236}">
-                <a16:creationId xmlns:a16="http://schemas.microsoft.com/office/drawing/2014/main" id="{DAB07704-B9F1-4A42-A8D8-CA19E295777F}"/>
+                <a16:creationId xmlns:a16="http://schemas.microsoft.com/office/drawing/2014/main" id="{CBB62265-19A7-4559-AA18-CB111F4076A9}"/>
               </a:ext>
             </a:extLst>
           </p:cNvPr>
@@ -12007,9 +12007,9 @@
                 <a:solidFill>
                   <a:srgbClr val="0B211A"/>
                 </a:solidFill>
-                <a:latin typeface="Helvetica Neue"/>
-                <a:ea typeface="Helvetica Neue"/>
-                <a:cs typeface="Helvetica Neue"/>
+                <a:latin typeface="Liberation Sans"/>
+                <a:ea typeface="Liberation Sans"/>
+                <a:cs typeface="Liberation Sans"/>
               </a:defRPr>
             </a:pPr>
             <a:r>
@@ -12017,9 +12017,9 @@
                 <a:solidFill>
                   <a:srgbClr val="0B211A"/>
                 </a:solidFill>
-                <a:latin typeface="Helvetica Neue"/>
-                <a:ea typeface="Helvetica Neue"/>
-                <a:cs typeface="Helvetica Neue"/>
+                <a:latin typeface="Liberation Sans"/>
+                <a:ea typeface="Liberation Sans"/>
+                <a:cs typeface="Liberation Sans"/>
               </a:rPr>
               <a:t>modelled-train</a:t>
             </a:r>
@@ -12031,7 +12031,7 @@
           <p:cNvPr id="15" name="">
             <a:extLst xmlns:a="http://schemas.openxmlformats.org/drawingml/2006/main">
               <a:ext uri="{FF2B5EF4-FFF2-40B4-BE49-F238E27FC236}">
-                <a16:creationId xmlns:a16="http://schemas.microsoft.com/office/drawing/2014/main" id="{518F4EAF-2091-4F06-AB10-4F4FAABA165A}"/>
+                <a16:creationId xmlns:a16="http://schemas.microsoft.com/office/drawing/2014/main" id="{FAF4B302-AD44-4DE9-B8EF-32A0D539646E}"/>
               </a:ext>
             </a:extLst>
           </p:cNvPr>
@@ -12064,9 +12064,9 @@
                 <a:solidFill>
                   <a:srgbClr val="667A72"/>
                 </a:solidFill>
-                <a:latin typeface="Helvetica Neue"/>
-                <a:ea typeface="Helvetica Neue"/>
-                <a:cs typeface="Helvetica Neue"/>
+                <a:latin typeface="Liberation Sans"/>
+                <a:ea typeface="Liberation Sans"/>
+                <a:cs typeface="Liberation Sans"/>
               </a:defRPr>
             </a:pPr>
             <a:r>
@@ -12074,9 +12074,9 @@
                 <a:solidFill>
                   <a:srgbClr val="667A72"/>
                 </a:solidFill>
-                <a:latin typeface="Helvetica Neue"/>
-                <a:ea typeface="Helvetica Neue"/>
-                <a:cs typeface="Helvetica Neue"/>
+                <a:latin typeface="Liberation Sans"/>
+                <a:ea typeface="Liberation Sans"/>
+                <a:cs typeface="Liberation Sans"/>
               </a:rPr>
               <a:t>response audit</a:t>
             </a:r>
@@ -12088,7 +12088,7 @@
           <p:cNvPr id="16" name="">
             <a:extLst xmlns:a="http://schemas.openxmlformats.org/drawingml/2006/main">
               <a:ext uri="{FF2B5EF4-FFF2-40B4-BE49-F238E27FC236}">
-                <a16:creationId xmlns:a16="http://schemas.microsoft.com/office/drawing/2014/main" id="{C9424CBD-1B0A-41D5-A95C-71C083A9D272}"/>
+                <a16:creationId xmlns:a16="http://schemas.microsoft.com/office/drawing/2014/main" id="{5B272368-7A65-45E0-89A2-C80BCE608C0D}"/>
               </a:ext>
             </a:extLst>
           </p:cNvPr>
@@ -12121,9 +12121,9 @@
                 <a:solidFill>
                   <a:srgbClr val="08775A"/>
                 </a:solidFill>
-                <a:latin typeface="Helvetica Neue"/>
-                <a:ea typeface="Helvetica Neue"/>
-                <a:cs typeface="Helvetica Neue"/>
+                <a:latin typeface="Liberation Sans"/>
+                <a:ea typeface="Liberation Sans"/>
+                <a:cs typeface="Liberation Sans"/>
               </a:defRPr>
             </a:pPr>
             <a:r>
@@ -12131,9 +12131,9 @@
                 <a:solidFill>
                   <a:srgbClr val="08775A"/>
                 </a:solidFill>
-                <a:latin typeface="Helvetica Neue"/>
-                <a:ea typeface="Helvetica Neue"/>
-                <a:cs typeface="Helvetica Neue"/>
+                <a:latin typeface="Liberation Sans"/>
+                <a:ea typeface="Liberation Sans"/>
+                <a:cs typeface="Liberation Sans"/>
               </a:rPr>
               <a:t>→</a:t>
             </a:r>
@@ -12145,7 +12145,7 @@
           <p:cNvPr id="17" name="">
             <a:extLst xmlns:a="http://schemas.openxmlformats.org/drawingml/2006/main">
               <a:ext uri="{FF2B5EF4-FFF2-40B4-BE49-F238E27FC236}">
-                <a16:creationId xmlns:a16="http://schemas.microsoft.com/office/drawing/2014/main" id="{EF68C823-8518-4CF2-9BE5-57296DFE5447}"/>
+                <a16:creationId xmlns:a16="http://schemas.microsoft.com/office/drawing/2014/main" id="{F8FA96FB-BBA1-42FF-B9E3-CACACC157979}"/>
               </a:ext>
             </a:extLst>
           </p:cNvPr>
@@ -12177,7 +12177,7 @@
           <p:cNvPr id="18" name="">
             <a:extLst xmlns:a="http://schemas.openxmlformats.org/drawingml/2006/main">
               <a:ext uri="{FF2B5EF4-FFF2-40B4-BE49-F238E27FC236}">
-                <a16:creationId xmlns:a16="http://schemas.microsoft.com/office/drawing/2014/main" id="{EBB3CB47-00CF-4B4E-A50E-2336EEE2DDF6}"/>
+                <a16:creationId xmlns:a16="http://schemas.microsoft.com/office/drawing/2014/main" id="{DB39C1CA-DCB8-4926-A44A-7FDA33F7321C}"/>
               </a:ext>
             </a:extLst>
           </p:cNvPr>
@@ -12210,9 +12210,9 @@
                 <a:solidFill>
                   <a:srgbClr val="0B211A"/>
                 </a:solidFill>
-                <a:latin typeface="Helvetica Neue"/>
-                <a:ea typeface="Helvetica Neue"/>
-                <a:cs typeface="Helvetica Neue"/>
+                <a:latin typeface="Liberation Sans"/>
+                <a:ea typeface="Liberation Sans"/>
+                <a:cs typeface="Liberation Sans"/>
               </a:defRPr>
             </a:pPr>
             <a:r>
@@ -12220,9 +12220,9 @@
                 <a:solidFill>
                   <a:srgbClr val="0B211A"/>
                 </a:solidFill>
-                <a:latin typeface="Helvetica Neue"/>
-                <a:ea typeface="Helvetica Neue"/>
-                <a:cs typeface="Helvetica Neue"/>
+                <a:latin typeface="Liberation Sans"/>
+                <a:ea typeface="Liberation Sans"/>
+                <a:cs typeface="Liberation Sans"/>
               </a:rPr>
               <a:t>migrate</a:t>
             </a:r>
@@ -12234,7 +12234,7 @@
           <p:cNvPr id="19" name="">
             <a:extLst xmlns:a="http://schemas.openxmlformats.org/drawingml/2006/main">
               <a:ext uri="{FF2B5EF4-FFF2-40B4-BE49-F238E27FC236}">
-                <a16:creationId xmlns:a16="http://schemas.microsoft.com/office/drawing/2014/main" id="{D80C0BA9-2FA2-46B9-B851-F8CC81140F94}"/>
+                <a16:creationId xmlns:a16="http://schemas.microsoft.com/office/drawing/2014/main" id="{E71133AF-FC4F-4C71-94D0-06F671FFBE6F}"/>
               </a:ext>
             </a:extLst>
           </p:cNvPr>
@@ -12267,9 +12267,9 @@
                 <a:solidFill>
                   <a:srgbClr val="667A72"/>
                 </a:solidFill>
-                <a:latin typeface="Helvetica Neue"/>
-                <a:ea typeface="Helvetica Neue"/>
-                <a:cs typeface="Helvetica Neue"/>
+                <a:latin typeface="Liberation Sans"/>
+                <a:ea typeface="Liberation Sans"/>
+                <a:cs typeface="Liberation Sans"/>
               </a:defRPr>
             </a:pPr>
             <a:r>
@@ -12277,9 +12277,9 @@
                 <a:solidFill>
                   <a:srgbClr val="667A72"/>
                 </a:solidFill>
-                <a:latin typeface="Helvetica Neue"/>
-                <a:ea typeface="Helvetica Neue"/>
-                <a:cs typeface="Helvetica Neue"/>
+                <a:latin typeface="Liberation Sans"/>
+                <a:ea typeface="Liberation Sans"/>
+                <a:cs typeface="Liberation Sans"/>
               </a:rPr>
               <a:t>PostgreSQL</a:t>
             </a:r>
@@ -12291,7 +12291,7 @@
           <p:cNvPr id="20" name="">
             <a:extLst xmlns:a="http://schemas.openxmlformats.org/drawingml/2006/main">
               <a:ext uri="{FF2B5EF4-FFF2-40B4-BE49-F238E27FC236}">
-                <a16:creationId xmlns:a16="http://schemas.microsoft.com/office/drawing/2014/main" id="{5F3077A6-E76D-4DB9-8271-0DF33A73706F}"/>
+                <a16:creationId xmlns:a16="http://schemas.microsoft.com/office/drawing/2014/main" id="{959D14CC-6F39-4423-8D1C-AE48CCF8C597}"/>
               </a:ext>
             </a:extLst>
           </p:cNvPr>
@@ -12324,9 +12324,9 @@
                 <a:solidFill>
                   <a:srgbClr val="08775A"/>
                 </a:solidFill>
-                <a:latin typeface="Helvetica Neue"/>
-                <a:ea typeface="Helvetica Neue"/>
-                <a:cs typeface="Helvetica Neue"/>
+                <a:latin typeface="Liberation Sans"/>
+                <a:ea typeface="Liberation Sans"/>
+                <a:cs typeface="Liberation Sans"/>
               </a:defRPr>
             </a:pPr>
             <a:r>
@@ -12334,9 +12334,9 @@
                 <a:solidFill>
                   <a:srgbClr val="08775A"/>
                 </a:solidFill>
-                <a:latin typeface="Helvetica Neue"/>
-                <a:ea typeface="Helvetica Neue"/>
-                <a:cs typeface="Helvetica Neue"/>
+                <a:latin typeface="Liberation Sans"/>
+                <a:ea typeface="Liberation Sans"/>
+                <a:cs typeface="Liberation Sans"/>
               </a:rPr>
               <a:t>→</a:t>
             </a:r>
@@ -12348,7 +12348,7 @@
           <p:cNvPr id="21" name="">
             <a:extLst xmlns:a="http://schemas.openxmlformats.org/drawingml/2006/main">
               <a:ext uri="{FF2B5EF4-FFF2-40B4-BE49-F238E27FC236}">
-                <a16:creationId xmlns:a16="http://schemas.microsoft.com/office/drawing/2014/main" id="{B63E149E-2EC0-4D5B-87F6-BB284F93EDC3}"/>
+                <a16:creationId xmlns:a16="http://schemas.microsoft.com/office/drawing/2014/main" id="{677A5745-37A8-4116-88C1-2CA76066328C}"/>
               </a:ext>
             </a:extLst>
           </p:cNvPr>
@@ -12380,7 +12380,7 @@
           <p:cNvPr id="22" name="">
             <a:extLst xmlns:a="http://schemas.openxmlformats.org/drawingml/2006/main">
               <a:ext uri="{FF2B5EF4-FFF2-40B4-BE49-F238E27FC236}">
-                <a16:creationId xmlns:a16="http://schemas.microsoft.com/office/drawing/2014/main" id="{A7D6BD59-11FB-4C44-8B63-C25548BF81F9}"/>
+                <a16:creationId xmlns:a16="http://schemas.microsoft.com/office/drawing/2014/main" id="{11B5335B-D0CD-42E9-9F1E-37E11EA9BE56}"/>
               </a:ext>
             </a:extLst>
           </p:cNvPr>
@@ -12413,9 +12413,9 @@
                 <a:solidFill>
                   <a:srgbClr val="FFFFFF"/>
                 </a:solidFill>
-                <a:latin typeface="Helvetica Neue"/>
-                <a:ea typeface="Helvetica Neue"/>
-                <a:cs typeface="Helvetica Neue"/>
+                <a:latin typeface="Liberation Sans"/>
+                <a:ea typeface="Liberation Sans"/>
+                <a:cs typeface="Liberation Sans"/>
               </a:defRPr>
             </a:pPr>
             <a:r>
@@ -12423,9 +12423,9 @@
                 <a:solidFill>
                   <a:srgbClr val="FFFFFF"/>
                 </a:solidFill>
-                <a:latin typeface="Helvetica Neue"/>
-                <a:ea typeface="Helvetica Neue"/>
-                <a:cs typeface="Helvetica Neue"/>
+                <a:latin typeface="Liberation Sans"/>
+                <a:ea typeface="Liberation Sans"/>
+                <a:cs typeface="Liberation Sans"/>
               </a:rPr>
               <a:t>serve</a:t>
             </a:r>
@@ -12437,7 +12437,7 @@
           <p:cNvPr id="23" name="">
             <a:extLst xmlns:a="http://schemas.openxmlformats.org/drawingml/2006/main">
               <a:ext uri="{FF2B5EF4-FFF2-40B4-BE49-F238E27FC236}">
-                <a16:creationId xmlns:a16="http://schemas.microsoft.com/office/drawing/2014/main" id="{209882DB-35F6-4EB2-98AE-BEB8D2F71F6A}"/>
+                <a16:creationId xmlns:a16="http://schemas.microsoft.com/office/drawing/2014/main" id="{DB9777B5-07F8-4318-96D6-51C3FDC65717}"/>
               </a:ext>
             </a:extLst>
           </p:cNvPr>
@@ -12470,9 +12470,9 @@
                 <a:solidFill>
                   <a:srgbClr val="9DE8CA"/>
                 </a:solidFill>
-                <a:latin typeface="Helvetica Neue"/>
-                <a:ea typeface="Helvetica Neue"/>
-                <a:cs typeface="Helvetica Neue"/>
+                <a:latin typeface="Liberation Sans"/>
+                <a:ea typeface="Liberation Sans"/>
+                <a:cs typeface="Liberation Sans"/>
               </a:defRPr>
             </a:pPr>
             <a:r>
@@ -12480,9 +12480,9 @@
                 <a:solidFill>
                   <a:srgbClr val="9DE8CA"/>
                 </a:solidFill>
-                <a:latin typeface="Helvetica Neue"/>
-                <a:ea typeface="Helvetica Neue"/>
-                <a:cs typeface="Helvetica Neue"/>
+                <a:latin typeface="Liberation Sans"/>
+                <a:ea typeface="Liberation Sans"/>
+                <a:cs typeface="Liberation Sans"/>
               </a:rPr>
               <a:t>nginx :8080</a:t>
             </a:r>
@@ -12494,7 +12494,7 @@
           <p:cNvPr id="24" name="">
             <a:extLst xmlns:a="http://schemas.openxmlformats.org/drawingml/2006/main">
               <a:ext uri="{FF2B5EF4-FFF2-40B4-BE49-F238E27FC236}">
-                <a16:creationId xmlns:a16="http://schemas.microsoft.com/office/drawing/2014/main" id="{8CBB0B98-9993-4FEA-AE9A-BAFAA4826DF1}"/>
+                <a16:creationId xmlns:a16="http://schemas.microsoft.com/office/drawing/2014/main" id="{1D9E5731-D627-4324-968A-B9D42B39640E}"/>
               </a:ext>
             </a:extLst>
           </p:cNvPr>
@@ -12527,9 +12527,9 @@
                 <a:solidFill>
                   <a:srgbClr val="0B211A"/>
                 </a:solidFill>
-                <a:latin typeface="Helvetica Neue"/>
-                <a:ea typeface="Helvetica Neue"/>
-                <a:cs typeface="Helvetica Neue"/>
+                <a:latin typeface="Liberation Sans"/>
+                <a:ea typeface="Liberation Sans"/>
+                <a:cs typeface="Liberation Sans"/>
               </a:defRPr>
             </a:pPr>
             <a:r>
@@ -12537,11 +12537,11 @@
                 <a:solidFill>
                   <a:srgbClr val="0B211A"/>
                 </a:solidFill>
-                <a:latin typeface="Helvetica Neue"/>
-                <a:ea typeface="Helvetica Neue"/>
-                <a:cs typeface="Helvetica Neue"/>
-              </a:rPr>
-              <a:t>188</a:t>
+                <a:latin typeface="Liberation Sans"/>
+                <a:ea typeface="Liberation Sans"/>
+                <a:cs typeface="Liberation Sans"/>
+              </a:rPr>
+              <a:t>195</a:t>
             </a:r>
           </a:p>
         </p:txBody>
@@ -12551,7 +12551,7 @@
           <p:cNvPr id="25" name="">
             <a:extLst xmlns:a="http://schemas.openxmlformats.org/drawingml/2006/main">
               <a:ext uri="{FF2B5EF4-FFF2-40B4-BE49-F238E27FC236}">
-                <a16:creationId xmlns:a16="http://schemas.microsoft.com/office/drawing/2014/main" id="{AFFA2ED2-E95D-4817-B2C6-5902B16D304D}"/>
+                <a16:creationId xmlns:a16="http://schemas.microsoft.com/office/drawing/2014/main" id="{232AA85B-6973-409B-BC27-E0844A289641}"/>
               </a:ext>
             </a:extLst>
           </p:cNvPr>
@@ -12584,9 +12584,9 @@
                 <a:solidFill>
                   <a:srgbClr val="667A72"/>
                 </a:solidFill>
-                <a:latin typeface="Helvetica Neue"/>
-                <a:ea typeface="Helvetica Neue"/>
-                <a:cs typeface="Helvetica Neue"/>
+                <a:latin typeface="Liberation Sans"/>
+                <a:ea typeface="Liberation Sans"/>
+                <a:cs typeface="Liberation Sans"/>
               </a:defRPr>
             </a:pPr>
             <a:r>
@@ -12594,9 +12594,9 @@
                 <a:solidFill>
                   <a:srgbClr val="667A72"/>
                 </a:solidFill>
-                <a:latin typeface="Helvetica Neue"/>
-                <a:ea typeface="Helvetica Neue"/>
-                <a:cs typeface="Helvetica Neue"/>
+                <a:latin typeface="Liberation Sans"/>
+                <a:ea typeface="Liberation Sans"/>
+                <a:cs typeface="Liberation Sans"/>
               </a:rPr>
               <a:t>Python tests</a:t>
             </a:r>
@@ -12608,7 +12608,7 @@
           <p:cNvPr id="26" name="">
             <a:extLst xmlns:a="http://schemas.openxmlformats.org/drawingml/2006/main">
               <a:ext uri="{FF2B5EF4-FFF2-40B4-BE49-F238E27FC236}">
-                <a16:creationId xmlns:a16="http://schemas.microsoft.com/office/drawing/2014/main" id="{EE481124-4761-4196-86DF-FFF936AE2029}"/>
+                <a16:creationId xmlns:a16="http://schemas.microsoft.com/office/drawing/2014/main" id="{0413129B-0EBC-41D6-BEA8-A4CA8D0C78D1}"/>
               </a:ext>
             </a:extLst>
           </p:cNvPr>
@@ -12641,9 +12641,9 @@
                 <a:solidFill>
                   <a:srgbClr val="0B211A"/>
                 </a:solidFill>
-                <a:latin typeface="Helvetica Neue"/>
-                <a:ea typeface="Helvetica Neue"/>
-                <a:cs typeface="Helvetica Neue"/>
+                <a:latin typeface="Liberation Sans"/>
+                <a:ea typeface="Liberation Sans"/>
+                <a:cs typeface="Liberation Sans"/>
               </a:defRPr>
             </a:pPr>
             <a:r>
@@ -12651,11 +12651,11 @@
                 <a:solidFill>
                   <a:srgbClr val="0B211A"/>
                 </a:solidFill>
-                <a:latin typeface="Helvetica Neue"/>
-                <a:ea typeface="Helvetica Neue"/>
-                <a:cs typeface="Helvetica Neue"/>
-              </a:rPr>
-              <a:t>13</a:t>
+                <a:latin typeface="Liberation Sans"/>
+                <a:ea typeface="Liberation Sans"/>
+                <a:cs typeface="Liberation Sans"/>
+              </a:rPr>
+              <a:t>14</a:t>
             </a:r>
           </a:p>
         </p:txBody>
@@ -12665,7 +12665,7 @@
           <p:cNvPr id="27" name="">
             <a:extLst xmlns:a="http://schemas.openxmlformats.org/drawingml/2006/main">
               <a:ext uri="{FF2B5EF4-FFF2-40B4-BE49-F238E27FC236}">
-                <a16:creationId xmlns:a16="http://schemas.microsoft.com/office/drawing/2014/main" id="{7D140EF9-B4C2-4B47-852C-E409A6C13267}"/>
+                <a16:creationId xmlns:a16="http://schemas.microsoft.com/office/drawing/2014/main" id="{9F335259-E577-4AEE-B486-7E04CCD2D86D}"/>
               </a:ext>
             </a:extLst>
           </p:cNvPr>
@@ -12698,9 +12698,9 @@
                 <a:solidFill>
                   <a:srgbClr val="667A72"/>
                 </a:solidFill>
-                <a:latin typeface="Helvetica Neue"/>
-                <a:ea typeface="Helvetica Neue"/>
-                <a:cs typeface="Helvetica Neue"/>
+                <a:latin typeface="Liberation Sans"/>
+                <a:ea typeface="Liberation Sans"/>
+                <a:cs typeface="Liberation Sans"/>
               </a:defRPr>
             </a:pPr>
             <a:r>
@@ -12708,9 +12708,9 @@
                 <a:solidFill>
                   <a:srgbClr val="667A72"/>
                 </a:solidFill>
-                <a:latin typeface="Helvetica Neue"/>
-                <a:ea typeface="Helvetica Neue"/>
-                <a:cs typeface="Helvetica Neue"/>
+                <a:latin typeface="Liberation Sans"/>
+                <a:ea typeface="Liberation Sans"/>
+                <a:cs typeface="Liberation Sans"/>
               </a:rPr>
               <a:t>frontend tests</a:t>
             </a:r>
@@ -12722,7 +12722,7 @@
           <p:cNvPr id="28" name="">
             <a:extLst xmlns:a="http://schemas.openxmlformats.org/drawingml/2006/main">
               <a:ext uri="{FF2B5EF4-FFF2-40B4-BE49-F238E27FC236}">
-                <a16:creationId xmlns:a16="http://schemas.microsoft.com/office/drawing/2014/main" id="{1FE3DF09-FF24-46A0-9DCF-C58BEB4DD684}"/>
+                <a16:creationId xmlns:a16="http://schemas.microsoft.com/office/drawing/2014/main" id="{659DE016-93E4-4367-9651-B4BD4C3535C7}"/>
               </a:ext>
             </a:extLst>
           </p:cNvPr>
@@ -12755,9 +12755,9 @@
                 <a:solidFill>
                   <a:srgbClr val="0B211A"/>
                 </a:solidFill>
-                <a:latin typeface="Helvetica Neue"/>
-                <a:ea typeface="Helvetica Neue"/>
-                <a:cs typeface="Helvetica Neue"/>
+                <a:latin typeface="Liberation Sans"/>
+                <a:ea typeface="Liberation Sans"/>
+                <a:cs typeface="Liberation Sans"/>
               </a:defRPr>
             </a:pPr>
             <a:r>
@@ -12765,9 +12765,9 @@
                 <a:solidFill>
                   <a:srgbClr val="0B211A"/>
                 </a:solidFill>
-                <a:latin typeface="Helvetica Neue"/>
-                <a:ea typeface="Helvetica Neue"/>
-                <a:cs typeface="Helvetica Neue"/>
+                <a:latin typeface="Liberation Sans"/>
+                <a:ea typeface="Liberation Sans"/>
+                <a:cs typeface="Liberation Sans"/>
               </a:rPr>
               <a:t>5/5</a:t>
             </a:r>
@@ -12779,7 +12779,7 @@
           <p:cNvPr id="29" name="">
             <a:extLst xmlns:a="http://schemas.openxmlformats.org/drawingml/2006/main">
               <a:ext uri="{FF2B5EF4-FFF2-40B4-BE49-F238E27FC236}">
-                <a16:creationId xmlns:a16="http://schemas.microsoft.com/office/drawing/2014/main" id="{08BFEA3A-7737-4F2C-9753-2173713B3194}"/>
+                <a16:creationId xmlns:a16="http://schemas.microsoft.com/office/drawing/2014/main" id="{0FAB2DB4-9B98-4CA3-AB38-DA8BA097C3D5}"/>
               </a:ext>
             </a:extLst>
           </p:cNvPr>
@@ -12812,9 +12812,9 @@
                 <a:solidFill>
                   <a:srgbClr val="667A72"/>
                 </a:solidFill>
-                <a:latin typeface="Helvetica Neue"/>
-                <a:ea typeface="Helvetica Neue"/>
-                <a:cs typeface="Helvetica Neue"/>
+                <a:latin typeface="Liberation Sans"/>
+                <a:ea typeface="Liberation Sans"/>
+                <a:cs typeface="Liberation Sans"/>
               </a:defRPr>
             </a:pPr>
             <a:r>
@@ -12822,9 +12822,9 @@
                 <a:solidFill>
                   <a:srgbClr val="667A72"/>
                 </a:solidFill>
-                <a:latin typeface="Helvetica Neue"/>
-                <a:ea typeface="Helvetica Neue"/>
-                <a:cs typeface="Helvetica Neue"/>
+                <a:latin typeface="Liberation Sans"/>
+                <a:ea typeface="Liberation Sans"/>
+                <a:cs typeface="Liberation Sans"/>
               </a:rPr>
               <a:t>browser E2E</a:t>
             </a:r>
@@ -12836,7 +12836,7 @@
           <p:cNvPr id="30" name="">
             <a:extLst xmlns:a="http://schemas.openxmlformats.org/drawingml/2006/main">
               <a:ext uri="{FF2B5EF4-FFF2-40B4-BE49-F238E27FC236}">
-                <a16:creationId xmlns:a16="http://schemas.microsoft.com/office/drawing/2014/main" id="{4C0109D2-6776-4C98-9C39-492D1D529C51}"/>
+                <a16:creationId xmlns:a16="http://schemas.microsoft.com/office/drawing/2014/main" id="{E74C12CB-04B0-4E79-8F87-45CDB2000526}"/>
               </a:ext>
             </a:extLst>
           </p:cNvPr>
@@ -12869,9 +12869,9 @@
                 <a:solidFill>
                   <a:srgbClr val="0B211A"/>
                 </a:solidFill>
-                <a:latin typeface="Helvetica Neue"/>
-                <a:ea typeface="Helvetica Neue"/>
-                <a:cs typeface="Helvetica Neue"/>
+                <a:latin typeface="Liberation Sans"/>
+                <a:ea typeface="Liberation Sans"/>
+                <a:cs typeface="Liberation Sans"/>
               </a:defRPr>
             </a:pPr>
             <a:r>
@@ -12879,9 +12879,9 @@
                 <a:solidFill>
                   <a:srgbClr val="0B211A"/>
                 </a:solidFill>
-                <a:latin typeface="Helvetica Neue"/>
-                <a:ea typeface="Helvetica Neue"/>
-                <a:cs typeface="Helvetica Neue"/>
+                <a:latin typeface="Liberation Sans"/>
+                <a:ea typeface="Liberation Sans"/>
+                <a:cs typeface="Liberation Sans"/>
               </a:rPr>
               <a:t>0</a:t>
             </a:r>
@@ -12893,7 +12893,7 @@
           <p:cNvPr id="31" name="">
             <a:extLst xmlns:a="http://schemas.openxmlformats.org/drawingml/2006/main">
               <a:ext uri="{FF2B5EF4-FFF2-40B4-BE49-F238E27FC236}">
-                <a16:creationId xmlns:a16="http://schemas.microsoft.com/office/drawing/2014/main" id="{35C6B0FA-58DB-485F-90E7-B2F2F040A972}"/>
+                <a16:creationId xmlns:a16="http://schemas.microsoft.com/office/drawing/2014/main" id="{230BCD9C-B591-4CBB-A09F-F37EDD1D4532}"/>
               </a:ext>
             </a:extLst>
           </p:cNvPr>
@@ -12926,9 +12926,9 @@
                 <a:solidFill>
                   <a:srgbClr val="667A72"/>
                 </a:solidFill>
-                <a:latin typeface="Helvetica Neue"/>
-                <a:ea typeface="Helvetica Neue"/>
-                <a:cs typeface="Helvetica Neue"/>
+                <a:latin typeface="Liberation Sans"/>
+                <a:ea typeface="Liberation Sans"/>
+                <a:cs typeface="Liberation Sans"/>
               </a:defRPr>
             </a:pPr>
             <a:r>
@@ -12936,9 +12936,9 @@
                 <a:solidFill>
                   <a:srgbClr val="667A72"/>
                 </a:solidFill>
-                <a:latin typeface="Helvetica Neue"/>
-                <a:ea typeface="Helvetica Neue"/>
-                <a:cs typeface="Helvetica Neue"/>
+                <a:latin typeface="Liberation Sans"/>
+                <a:ea typeface="Liberation Sans"/>
+                <a:cs typeface="Liberation Sans"/>
               </a:rPr>
               <a:t>console errors</a:t>
             </a:r>
@@ -12950,7 +12950,7 @@
           <p:cNvPr id="32" name="">
             <a:extLst xmlns:a="http://schemas.openxmlformats.org/drawingml/2006/main">
               <a:ext uri="{FF2B5EF4-FFF2-40B4-BE49-F238E27FC236}">
-                <a16:creationId xmlns:a16="http://schemas.microsoft.com/office/drawing/2014/main" id="{847D866D-CB15-40F3-8D87-9EBC00C17FDA}"/>
+                <a16:creationId xmlns:a16="http://schemas.microsoft.com/office/drawing/2014/main" id="{2DFE0AA5-D8D4-40ED-A1DB-1C5362AF7301}"/>
               </a:ext>
             </a:extLst>
           </p:cNvPr>
@@ -12982,7 +12982,7 @@
           <p:cNvPr id="33" name="">
             <a:extLst xmlns:a="http://schemas.openxmlformats.org/drawingml/2006/main">
               <a:ext uri="{FF2B5EF4-FFF2-40B4-BE49-F238E27FC236}">
-                <a16:creationId xmlns:a16="http://schemas.microsoft.com/office/drawing/2014/main" id="{AAE7829E-EBB0-4E5E-856B-1D826357071A}"/>
+                <a16:creationId xmlns:a16="http://schemas.microsoft.com/office/drawing/2014/main" id="{F5E78546-0D53-4FFB-8D6C-9BA2ED6F38C2}"/>
               </a:ext>
             </a:extLst>
           </p:cNvPr>
@@ -13015,9 +13015,9 @@
                 <a:solidFill>
                   <a:srgbClr val="0B211A"/>
                 </a:solidFill>
-                <a:latin typeface="Helvetica Neue"/>
-                <a:ea typeface="Helvetica Neue"/>
-                <a:cs typeface="Helvetica Neue"/>
+                <a:latin typeface="Liberation Sans"/>
+                <a:ea typeface="Liberation Sans"/>
+                <a:cs typeface="Liberation Sans"/>
               </a:defRPr>
             </a:pPr>
             <a:r>
@@ -13025,9 +13025,9 @@
                 <a:solidFill>
                   <a:srgbClr val="0B211A"/>
                 </a:solidFill>
-                <a:latin typeface="Helvetica Neue"/>
-                <a:ea typeface="Helvetica Neue"/>
-                <a:cs typeface="Helvetica Neue"/>
+                <a:latin typeface="Liberation Sans"/>
+                <a:ea typeface="Liberation Sans"/>
+                <a:cs typeface="Liberation Sans"/>
               </a:rPr>
               <a:t>replay ≠ what-if</a:t>
             </a:r>
@@ -13039,7 +13039,7 @@
           <p:cNvPr id="34" name="">
             <a:extLst xmlns:a="http://schemas.openxmlformats.org/drawingml/2006/main">
               <a:ext uri="{FF2B5EF4-FFF2-40B4-BE49-F238E27FC236}">
-                <a16:creationId xmlns:a16="http://schemas.microsoft.com/office/drawing/2014/main" id="{96FE52E4-6D18-4A94-8EFA-2B8A0D4E5BA2}"/>
+                <a16:creationId xmlns:a16="http://schemas.microsoft.com/office/drawing/2014/main" id="{75891DEC-9CA2-4558-9976-B68A218B0E4A}"/>
               </a:ext>
             </a:extLst>
           </p:cNvPr>
@@ -13071,7 +13071,7 @@
           <p:cNvPr id="35" name="">
             <a:extLst xmlns:a="http://schemas.openxmlformats.org/drawingml/2006/main">
               <a:ext uri="{FF2B5EF4-FFF2-40B4-BE49-F238E27FC236}">
-                <a16:creationId xmlns:a16="http://schemas.microsoft.com/office/drawing/2014/main" id="{73556572-0294-4FCE-885A-26C6D701B1F4}"/>
+                <a16:creationId xmlns:a16="http://schemas.microsoft.com/office/drawing/2014/main" id="{FA69961D-59C7-453A-B54C-6408F5FA7182}"/>
               </a:ext>
             </a:extLst>
           </p:cNvPr>
@@ -13104,9 +13104,9 @@
                 <a:solidFill>
                   <a:srgbClr val="0B211A"/>
                 </a:solidFill>
-                <a:latin typeface="Helvetica Neue"/>
-                <a:ea typeface="Helvetica Neue"/>
-                <a:cs typeface="Helvetica Neue"/>
+                <a:latin typeface="Liberation Sans"/>
+                <a:ea typeface="Liberation Sans"/>
+                <a:cs typeface="Liberation Sans"/>
               </a:defRPr>
             </a:pPr>
             <a:r>
@@ -13114,9 +13114,9 @@
                 <a:solidFill>
                   <a:srgbClr val="0B211A"/>
                 </a:solidFill>
-                <a:latin typeface="Helvetica Neue"/>
-                <a:ea typeface="Helvetica Neue"/>
-                <a:cs typeface="Helvetica Neue"/>
+                <a:latin typeface="Liberation Sans"/>
+                <a:ea typeface="Liberation Sans"/>
+                <a:cs typeface="Liberation Sans"/>
               </a:rPr>
               <a:t>localhost only</a:t>
             </a:r>
@@ -13128,7 +13128,7 @@
           <p:cNvPr id="36" name="">
             <a:extLst xmlns:a="http://schemas.openxmlformats.org/drawingml/2006/main">
               <a:ext uri="{FF2B5EF4-FFF2-40B4-BE49-F238E27FC236}">
-                <a16:creationId xmlns:a16="http://schemas.microsoft.com/office/drawing/2014/main" id="{6042075D-663C-4D12-844C-BE39E08FDB59}"/>
+                <a16:creationId xmlns:a16="http://schemas.microsoft.com/office/drawing/2014/main" id="{886C5B0A-F62A-4C7A-9006-18721B566F78}"/>
               </a:ext>
             </a:extLst>
           </p:cNvPr>
@@ -13160,7 +13160,7 @@
           <p:cNvPr id="37" name="">
             <a:extLst xmlns:a="http://schemas.openxmlformats.org/drawingml/2006/main">
               <a:ext uri="{FF2B5EF4-FFF2-40B4-BE49-F238E27FC236}">
-                <a16:creationId xmlns:a16="http://schemas.microsoft.com/office/drawing/2014/main" id="{71B8C92E-AA7A-4D3E-B381-B445F10438D4}"/>
+                <a16:creationId xmlns:a16="http://schemas.microsoft.com/office/drawing/2014/main" id="{BCCFAB6F-8FA9-4116-80E8-2599C190832D}"/>
               </a:ext>
             </a:extLst>
           </p:cNvPr>
@@ -13193,9 +13193,9 @@
                 <a:solidFill>
                   <a:srgbClr val="0B211A"/>
                 </a:solidFill>
-                <a:latin typeface="Helvetica Neue"/>
-                <a:ea typeface="Helvetica Neue"/>
-                <a:cs typeface="Helvetica Neue"/>
+                <a:latin typeface="Liberation Sans"/>
+                <a:ea typeface="Liberation Sans"/>
+                <a:cs typeface="Liberation Sans"/>
               </a:defRPr>
             </a:pPr>
             <a:r>
@@ -13203,9 +13203,9 @@
                 <a:solidFill>
                   <a:srgbClr val="0B211A"/>
                 </a:solidFill>
-                <a:latin typeface="Helvetica Neue"/>
-                <a:ea typeface="Helvetica Neue"/>
-                <a:cs typeface="Helvetica Neue"/>
+                <a:latin typeface="Liberation Sans"/>
+                <a:ea typeface="Liberation Sans"/>
+                <a:cs typeface="Liberation Sans"/>
               </a:rPr>
               <a:t>immutable JSONB</a:t>
             </a:r>
@@ -13215,7 +13215,7 @@
     </p:spTree>
     <p:extLst>
       <p:ext uri="{BB962C8B-B14F-4D97-AF65-F5344CB8AC3E}">
-        <p14:creationId xmlns:p14="http://schemas.microsoft.com/office/powerpoint/2010/main" val="1224289277"/>
+        <p14:creationId xmlns:p14="http://schemas.microsoft.com/office/powerpoint/2010/main" val="382123354"/>
       </p:ext>
     </p:extLst>
   </p:cSld>
